--- a/content/05-teaching-resources/slides/digital-support/06-asset-version-and-mobile-device-management.pptx
+++ b/content/05-teaching-resources/slides/digital-support/06-asset-version-and-mobile-device-management.pptx
@@ -10,10 +10,16 @@
     <p:sldId id="258" r:id="rId9"/>
     <p:sldId id="259" r:id="rId10"/>
     <p:sldId id="260" r:id="rId11"/>
-    <p:sldId id="261" r:id="rId12"/>
+    <p:sldId id="261" r:id="rId13"/>
     <p:sldId id="262" r:id="rId14"/>
     <p:sldId id="263" r:id="rId15"/>
     <p:sldId id="264" r:id="rId16"/>
+    <p:sldId id="265" r:id="rId17"/>
+    <p:sldId id="266" r:id="rId18"/>
+    <p:sldId id="267" r:id="rId19"/>
+    <p:sldId id="268" r:id="rId20"/>
+    <p:sldId id="269" r:id="rId21"/>
+    <p:sldId id="270" r:id="rId22"/>
   </p:sldIdLst>
   <p:sldSz cx="12191695" cy="6858000" type="screen4x3"/>
   <p:notesSz cx="6858000" cy="9144000"/>
@@ -510,7 +516,22 @@
           <a:lstStyle/>
           <a:p>
             <a:r>
-              <a:t>Give students a few minutes to answer on mini whiteboards or paper, then reveal the answers on the next slide.</a:t>
+              <a:t>Answers:</a:t>
+            </a:r>
+          </a:p>
+          <a:p>
+            <a:r>
+              <a:t>1. To undo an update that causes problems.</a:t>
+            </a:r>
+          </a:p>
+          <a:p>
+            <a:r>
+              <a:t>2. Any two: OS, drivers, firmware, anti-malware, applications.</a:t>
+            </a:r>
+          </a:p>
+          <a:p>
+            <a:r>
+              <a:t>3. To catch problems before they affect everyone.</a:t>
             </a:r>
           </a:p>
         </p:txBody>
@@ -580,7 +601,22 @@
           <a:lstStyle/>
           <a:p>
             <a:r>
-              <a:t>Talk through any answers the class found difficult.</a:t>
+              <a:t>Answers:</a:t>
+            </a:r>
+          </a:p>
+          <a:p>
+            <a:r>
+              <a:t>1. Identify and plan, acquire and implement, operate and maintain, decommission and redeploy.</a:t>
+            </a:r>
+          </a:p>
+          <a:p>
+            <a:r>
+              <a:t>2. To stay legal and avoid paying for unused ones.</a:t>
+            </a:r>
+          </a:p>
+          <a:p>
+            <a:r>
+              <a:t>3. Old assets are retired, reused or disposed of.</a:t>
             </a:r>
           </a:p>
         </p:txBody>
@@ -606,6 +642,231 @@
 </file>
 
 <file path=ppt/notesSlides/notesSlide3.xml><?xml version="1.0" encoding="utf-8"?>
+<p:notes xmlns:a="http://schemas.openxmlformats.org/drawingml/2006/main" xmlns:p="http://schemas.openxmlformats.org/presentationml/2006/main" xmlns:r="http://schemas.openxmlformats.org/officeDocument/2006/relationships">
+  <p:cSld>
+    <p:spTree>
+      <p:nvGrpSpPr>
+        <p:cNvPr id="1" name=""/>
+        <p:cNvGrpSpPr/>
+        <p:nvPr/>
+      </p:nvGrpSpPr>
+      <p:grpSpPr>
+        <a:xfrm>
+          <a:off x="0" y="0"/>
+          <a:ext cx="0" cy="0"/>
+          <a:chOff x="0" y="0"/>
+          <a:chExt cx="0" cy="0"/>
+        </a:xfrm>
+      </p:grpSpPr>
+      <p:sp>
+        <p:nvSpPr>
+          <p:cNvPr id="2" name="Slide Image Placeholder 1"/>
+          <p:cNvSpPr>
+            <a:spLocks noGrp="1"/>
+          </p:cNvSpPr>
+          <p:nvPr>
+            <p:ph type="sldImg" idx="2"/>
+          </p:nvPr>
+        </p:nvSpPr>
+        <p:spPr/>
+      </p:sp>
+      <p:sp>
+        <p:nvSpPr>
+          <p:cNvPr id="3" name="Notes Placeholder 2"/>
+          <p:cNvSpPr>
+            <a:spLocks noGrp="1"/>
+          </p:cNvSpPr>
+          <p:nvPr>
+            <p:ph type="body" idx="3" sz="quarter"/>
+          </p:nvPr>
+        </p:nvSpPr>
+        <p:spPr/>
+        <p:txBody>
+          <a:bodyPr/>
+          <a:lstStyle/>
+          <a:p>
+            <a:r>
+              <a:t>Answers:</a:t>
+            </a:r>
+          </a:p>
+          <a:p>
+            <a:r>
+              <a:t>1. Locate it and remotely wipe it.</a:t>
+            </a:r>
+          </a:p>
+          <a:p>
+            <a:r>
+              <a:t>2. To keep company data apart and protected.</a:t>
+            </a:r>
+          </a:p>
+          <a:p>
+            <a:r>
+              <a:t>3. Any two: screen lock, encryption, password rules, login limits, MFA.</a:t>
+            </a:r>
+          </a:p>
+        </p:txBody>
+      </p:sp>
+      <p:sp>
+        <p:nvSpPr>
+          <p:cNvPr id="4" name="Slide Number Placeholder 3"/>
+          <p:cNvSpPr>
+            <a:spLocks noGrp="1"/>
+          </p:cNvSpPr>
+          <p:nvPr>
+            <p:ph type="sldNum" idx="5" sz="quarter"/>
+          </p:nvPr>
+        </p:nvSpPr>
+        <p:spPr/>
+      </p:sp>
+    </p:spTree>
+  </p:cSld>
+  <p:clrMapOvr>
+    <a:masterClrMapping/>
+  </p:clrMapOvr>
+</p:notes>
+</file>
+
+<file path=ppt/notesSlides/notesSlide4.xml><?xml version="1.0" encoding="utf-8"?>
+<p:notes xmlns:a="http://schemas.openxmlformats.org/drawingml/2006/main" xmlns:p="http://schemas.openxmlformats.org/presentationml/2006/main" xmlns:r="http://schemas.openxmlformats.org/officeDocument/2006/relationships">
+  <p:cSld>
+    <p:spTree>
+      <p:nvGrpSpPr>
+        <p:cNvPr id="1" name=""/>
+        <p:cNvGrpSpPr/>
+        <p:nvPr/>
+      </p:nvGrpSpPr>
+      <p:grpSpPr>
+        <a:xfrm>
+          <a:off x="0" y="0"/>
+          <a:ext cx="0" cy="0"/>
+          <a:chOff x="0" y="0"/>
+          <a:chExt cx="0" cy="0"/>
+        </a:xfrm>
+      </p:grpSpPr>
+      <p:sp>
+        <p:nvSpPr>
+          <p:cNvPr id="2" name="Slide Image Placeholder 1"/>
+          <p:cNvSpPr>
+            <a:spLocks noGrp="1"/>
+          </p:cNvSpPr>
+          <p:nvPr>
+            <p:ph type="sldImg" idx="2"/>
+          </p:nvPr>
+        </p:nvSpPr>
+        <p:spPr/>
+      </p:sp>
+      <p:sp>
+        <p:nvSpPr>
+          <p:cNvPr id="3" name="Notes Placeholder 2"/>
+          <p:cNvSpPr>
+            <a:spLocks noGrp="1"/>
+          </p:cNvSpPr>
+          <p:nvPr>
+            <p:ph type="body" idx="3" sz="quarter"/>
+          </p:nvPr>
+        </p:nvSpPr>
+        <p:spPr/>
+        <p:txBody>
+          <a:bodyPr/>
+          <a:lstStyle/>
+          <a:p>
+            <a:r>
+              <a:t>Give students a few minutes to answer on mini whiteboards or paper, then reveal the answers on the next slide.</a:t>
+            </a:r>
+          </a:p>
+        </p:txBody>
+      </p:sp>
+      <p:sp>
+        <p:nvSpPr>
+          <p:cNvPr id="4" name="Slide Number Placeholder 3"/>
+          <p:cNvSpPr>
+            <a:spLocks noGrp="1"/>
+          </p:cNvSpPr>
+          <p:nvPr>
+            <p:ph type="sldNum" idx="5" sz="quarter"/>
+          </p:nvPr>
+        </p:nvSpPr>
+        <p:spPr/>
+      </p:sp>
+    </p:spTree>
+  </p:cSld>
+  <p:clrMapOvr>
+    <a:masterClrMapping/>
+  </p:clrMapOvr>
+</p:notes>
+</file>
+
+<file path=ppt/notesSlides/notesSlide5.xml><?xml version="1.0" encoding="utf-8"?>
+<p:notes xmlns:a="http://schemas.openxmlformats.org/drawingml/2006/main" xmlns:p="http://schemas.openxmlformats.org/presentationml/2006/main" xmlns:r="http://schemas.openxmlformats.org/officeDocument/2006/relationships">
+  <p:cSld>
+    <p:spTree>
+      <p:nvGrpSpPr>
+        <p:cNvPr id="1" name=""/>
+        <p:cNvGrpSpPr/>
+        <p:nvPr/>
+      </p:nvGrpSpPr>
+      <p:grpSpPr>
+        <a:xfrm>
+          <a:off x="0" y="0"/>
+          <a:ext cx="0" cy="0"/>
+          <a:chOff x="0" y="0"/>
+          <a:chExt cx="0" cy="0"/>
+        </a:xfrm>
+      </p:grpSpPr>
+      <p:sp>
+        <p:nvSpPr>
+          <p:cNvPr id="2" name="Slide Image Placeholder 1"/>
+          <p:cNvSpPr>
+            <a:spLocks noGrp="1"/>
+          </p:cNvSpPr>
+          <p:nvPr>
+            <p:ph type="sldImg" idx="2"/>
+          </p:nvPr>
+        </p:nvSpPr>
+        <p:spPr/>
+      </p:sp>
+      <p:sp>
+        <p:nvSpPr>
+          <p:cNvPr id="3" name="Notes Placeholder 2"/>
+          <p:cNvSpPr>
+            <a:spLocks noGrp="1"/>
+          </p:cNvSpPr>
+          <p:nvPr>
+            <p:ph type="body" idx="3" sz="quarter"/>
+          </p:nvPr>
+        </p:nvSpPr>
+        <p:spPr/>
+        <p:txBody>
+          <a:bodyPr/>
+          <a:lstStyle/>
+          <a:p>
+            <a:r>
+              <a:t>Talk through any answers the class found difficult.</a:t>
+            </a:r>
+          </a:p>
+        </p:txBody>
+      </p:sp>
+      <p:sp>
+        <p:nvSpPr>
+          <p:cNvPr id="4" name="Slide Number Placeholder 3"/>
+          <p:cNvSpPr>
+            <a:spLocks noGrp="1"/>
+          </p:cNvSpPr>
+          <p:nvPr>
+            <p:ph type="sldNum" idx="5" sz="quarter"/>
+          </p:nvPr>
+        </p:nvSpPr>
+        <p:spPr/>
+      </p:sp>
+    </p:spTree>
+  </p:cSld>
+  <p:clrMapOvr>
+    <a:masterClrMapping/>
+  </p:clrMapOvr>
+</p:notes>
+</file>
+
+<file path=ppt/notesSlides/notesSlide6.xml><?xml version="1.0" encoding="utf-8"?>
 <p:notes xmlns:a="http://schemas.openxmlformats.org/drawingml/2006/main" xmlns:p="http://schemas.openxmlformats.org/presentationml/2006/main" xmlns:r="http://schemas.openxmlformats.org/officeDocument/2006/relationships">
   <p:cSld>
     <p:spTree>
@@ -3975,6 +4236,3614 @@
 </p:sld>
 </file>
 
+<file path=ppt/slides/slide10.xml><?xml version="1.0" encoding="utf-8"?>
+<p:sld xmlns:a="http://schemas.openxmlformats.org/drawingml/2006/main" xmlns:p="http://schemas.openxmlformats.org/presentationml/2006/main" xmlns:r="http://schemas.openxmlformats.org/officeDocument/2006/relationships">
+  <p:cSld>
+    <p:bg>
+      <p:bgPr>
+        <a:solidFill>
+          <a:srgbClr val="FFFFFF"/>
+        </a:solidFill>
+        <a:effectLst/>
+      </p:bgPr>
+    </p:bg>
+    <p:spTree>
+      <p:nvGrpSpPr>
+        <p:cNvPr id="1" name=""/>
+        <p:cNvGrpSpPr/>
+        <p:nvPr/>
+      </p:nvGrpSpPr>
+      <p:grpSpPr/>
+      <p:sp>
+        <p:nvSpPr>
+          <p:cNvPr id="2" name="TextBox 1"/>
+          <p:cNvSpPr txBox="1"/>
+          <p:nvPr/>
+        </p:nvSpPr>
+        <p:spPr>
+          <a:xfrm>
+            <a:off x="548640" y="320040"/>
+            <a:ext cx="11094415" cy="274320"/>
+          </a:xfrm>
+          <a:prstGeom prst="rect">
+            <a:avLst/>
+          </a:prstGeom>
+          <a:noFill/>
+        </p:spPr>
+        <p:txBody>
+          <a:bodyPr wrap="square" anchor="t" lIns="0" rIns="0" tIns="0" bIns="0"/>
+          <a:lstStyle/>
+          <a:p>
+            <a:pPr algn="l"/>
+            <a:r>
+              <a:rPr sz="1100" b="1" i="0">
+                <a:solidFill>
+                  <a:srgbClr val="54595D"/>
+                </a:solidFill>
+                <a:latin typeface="Calibri"/>
+              </a:rPr>
+              <a:t>DIGITAL SUPPORT  ·  Digital Support Content Area 2</a:t>
+            </a:r>
+          </a:p>
+        </p:txBody>
+      </p:sp>
+      <p:sp>
+        <p:nvSpPr>
+          <p:cNvPr id="3" name="TextBox 2"/>
+          <p:cNvSpPr txBox="1"/>
+          <p:nvPr/>
+        </p:nvSpPr>
+        <p:spPr>
+          <a:xfrm>
+            <a:off x="548640" y="566928"/>
+            <a:ext cx="11094415" cy="822960"/>
+          </a:xfrm>
+          <a:prstGeom prst="rect">
+            <a:avLst/>
+          </a:prstGeom>
+          <a:noFill/>
+        </p:spPr>
+        <p:txBody>
+          <a:bodyPr wrap="square" anchor="ctr" lIns="0" rIns="0" tIns="0" bIns="0"/>
+          <a:lstStyle/>
+          <a:p>
+            <a:pPr algn="l"/>
+            <a:r>
+              <a:rPr sz="3200" b="1" i="0">
+                <a:solidFill>
+                  <a:srgbClr val="03306E"/>
+                </a:solidFill>
+                <a:latin typeface="Cambria"/>
+              </a:rPr>
+              <a:t>Mobile Device Management (MDM)</a:t>
+            </a:r>
+          </a:p>
+        </p:txBody>
+      </p:sp>
+      <p:sp>
+        <p:nvSpPr>
+          <p:cNvPr id="4" name="TextBox 3"/>
+          <p:cNvSpPr txBox="1"/>
+          <p:nvPr/>
+        </p:nvSpPr>
+        <p:spPr>
+          <a:xfrm>
+            <a:off x="548640" y="6446520"/>
+            <a:ext cx="8229600" cy="274320"/>
+          </a:xfrm>
+          <a:prstGeom prst="rect">
+            <a:avLst/>
+          </a:prstGeom>
+          <a:noFill/>
+        </p:spPr>
+        <p:txBody>
+          <a:bodyPr wrap="square" anchor="t" lIns="0" rIns="0" tIns="0" bIns="0"/>
+          <a:lstStyle/>
+          <a:p>
+            <a:pPr algn="l"/>
+            <a:r>
+              <a:rPr sz="1000" b="0" i="0">
+                <a:solidFill>
+                  <a:srgbClr val="54595D"/>
+                </a:solidFill>
+                <a:latin typeface="Calibri"/>
+              </a:rPr>
+              <a:t>Digital Support and Security T Level  ·  Asset, Version and Mobile Device Management</a:t>
+            </a:r>
+          </a:p>
+        </p:txBody>
+      </p:sp>
+      <p:sp>
+        <p:nvSpPr>
+          <p:cNvPr id="5" name="TextBox 4"/>
+          <p:cNvSpPr txBox="1"/>
+          <p:nvPr/>
+        </p:nvSpPr>
+        <p:spPr>
+          <a:xfrm>
+            <a:off x="10728655" y="6446520"/>
+            <a:ext cx="914400" cy="274320"/>
+          </a:xfrm>
+          <a:prstGeom prst="rect">
+            <a:avLst/>
+          </a:prstGeom>
+          <a:noFill/>
+        </p:spPr>
+        <p:txBody>
+          <a:bodyPr wrap="square" anchor="t" lIns="0" rIns="0" tIns="0" bIns="0"/>
+          <a:lstStyle/>
+          <a:p>
+            <a:pPr algn="r"/>
+            <a:r>
+              <a:rPr sz="1000" b="0" i="0">
+                <a:solidFill>
+                  <a:srgbClr val="54595D"/>
+                </a:solidFill>
+                <a:latin typeface="Calibri"/>
+              </a:rPr>
+              <a:t>10</a:t>
+            </a:r>
+          </a:p>
+        </p:txBody>
+      </p:sp>
+      <p:sp>
+        <p:nvSpPr>
+          <p:cNvPr id="6" name="Rounded Rectangle 5"/>
+          <p:cNvSpPr/>
+          <p:nvPr/>
+        </p:nvSpPr>
+        <p:spPr>
+          <a:xfrm>
+            <a:off x="548640" y="1600200"/>
+            <a:ext cx="5410047" cy="2148840"/>
+          </a:xfrm>
+          <a:prstGeom prst="roundRect">
+            <a:avLst>
+              <a:gd name="adj" fmla="val 6000"/>
+            </a:avLst>
+          </a:prstGeom>
+          <a:solidFill>
+            <a:srgbClr val="EAF3FF"/>
+          </a:solidFill>
+          <a:ln>
+            <a:noFill/>
+          </a:ln>
+          <a:effectLst/>
+        </p:spPr>
+        <p:style>
+          <a:lnRef idx="1">
+            <a:schemeClr val="accent1"/>
+          </a:lnRef>
+          <a:fillRef idx="3">
+            <a:schemeClr val="accent1"/>
+          </a:fillRef>
+          <a:effectRef idx="2">
+            <a:schemeClr val="accent1"/>
+          </a:effectRef>
+          <a:fontRef idx="minor">
+            <a:schemeClr val="lt1"/>
+          </a:fontRef>
+        </p:style>
+        <p:txBody>
+          <a:bodyPr rtlCol="0" anchor="ctr"/>
+          <a:lstStyle/>
+          <a:p/>
+        </p:txBody>
+      </p:sp>
+      <p:sp>
+        <p:nvSpPr>
+          <p:cNvPr id="7" name="Oval 6"/>
+          <p:cNvSpPr/>
+          <p:nvPr/>
+        </p:nvSpPr>
+        <p:spPr>
+          <a:xfrm>
+            <a:off x="777240" y="1828800"/>
+            <a:ext cx="457200" cy="457200"/>
+          </a:xfrm>
+          <a:prstGeom prst="ellipse">
+            <a:avLst/>
+          </a:prstGeom>
+          <a:solidFill>
+            <a:srgbClr val="4EA1FF"/>
+          </a:solidFill>
+          <a:ln>
+            <a:noFill/>
+          </a:ln>
+          <a:effectLst/>
+        </p:spPr>
+        <p:style>
+          <a:lnRef idx="1">
+            <a:schemeClr val="accent1"/>
+          </a:lnRef>
+          <a:fillRef idx="3">
+            <a:schemeClr val="accent1"/>
+          </a:fillRef>
+          <a:effectRef idx="2">
+            <a:schemeClr val="accent1"/>
+          </a:effectRef>
+          <a:fontRef idx="minor">
+            <a:schemeClr val="lt1"/>
+          </a:fontRef>
+        </p:style>
+        <p:txBody>
+          <a:bodyPr rtlCol="0" anchor="ctr" lIns="0" rIns="0" tIns="0" bIns="0"/>
+          <a:lstStyle/>
+          <a:p>
+            <a:pPr algn="ctr"/>
+            <a:r>
+              <a:rPr sz="1500" b="1">
+                <a:solidFill>
+                  <a:srgbClr val="202122"/>
+                </a:solidFill>
+                <a:latin typeface="Calibri"/>
+              </a:rPr>
+              <a:t>1</a:t>
+            </a:r>
+          </a:p>
+        </p:txBody>
+      </p:sp>
+      <p:sp>
+        <p:nvSpPr>
+          <p:cNvPr id="8" name="TextBox 7"/>
+          <p:cNvSpPr txBox="1"/>
+          <p:nvPr/>
+        </p:nvSpPr>
+        <p:spPr>
+          <a:xfrm>
+            <a:off x="1371600" y="1801368"/>
+            <a:ext cx="4404207" cy="512064"/>
+          </a:xfrm>
+          <a:prstGeom prst="rect">
+            <a:avLst/>
+          </a:prstGeom>
+          <a:noFill/>
+        </p:spPr>
+        <p:txBody>
+          <a:bodyPr wrap="square" anchor="ctr" lIns="0" rIns="0" tIns="0" bIns="0"/>
+          <a:lstStyle/>
+          <a:p>
+            <a:pPr algn="l"/>
+            <a:r>
+              <a:rPr sz="1900" b="1" i="0">
+                <a:solidFill>
+                  <a:srgbClr val="03306E"/>
+                </a:solidFill>
+                <a:latin typeface="Calibri"/>
+              </a:rPr>
+              <a:t>Purpose</a:t>
+            </a:r>
+          </a:p>
+        </p:txBody>
+      </p:sp>
+      <p:sp>
+        <p:nvSpPr>
+          <p:cNvPr id="9" name="TextBox 8"/>
+          <p:cNvSpPr txBox="1"/>
+          <p:nvPr/>
+        </p:nvSpPr>
+        <p:spPr>
+          <a:xfrm>
+            <a:off x="777240" y="2468880"/>
+            <a:ext cx="4952847" cy="1143000"/>
+          </a:xfrm>
+          <a:prstGeom prst="rect">
+            <a:avLst/>
+          </a:prstGeom>
+          <a:noFill/>
+        </p:spPr>
+        <p:txBody>
+          <a:bodyPr wrap="square" anchor="t" lIns="0" rIns="0" tIns="0" bIns="0"/>
+          <a:lstStyle/>
+          <a:p>
+            <a:pPr algn="l"/>
+            <a:r>
+              <a:rPr sz="2000" b="0" i="0">
+                <a:solidFill>
+                  <a:srgbClr val="202122"/>
+                </a:solidFill>
+                <a:latin typeface="Calibri"/>
+              </a:rPr>
+              <a:t>Track, locate, secure and configure mobile devices: Wi-Fi, data, hotspot, Bluetooth, email.</a:t>
+            </a:r>
+          </a:p>
+        </p:txBody>
+      </p:sp>
+      <p:sp>
+        <p:nvSpPr>
+          <p:cNvPr id="10" name="Rounded Rectangle 9"/>
+          <p:cNvSpPr/>
+          <p:nvPr/>
+        </p:nvSpPr>
+        <p:spPr>
+          <a:xfrm>
+            <a:off x="6233007" y="1600200"/>
+            <a:ext cx="5410047" cy="2148840"/>
+          </a:xfrm>
+          <a:prstGeom prst="roundRect">
+            <a:avLst>
+              <a:gd name="adj" fmla="val 6000"/>
+            </a:avLst>
+          </a:prstGeom>
+          <a:solidFill>
+            <a:srgbClr val="EAF3FF"/>
+          </a:solidFill>
+          <a:ln>
+            <a:noFill/>
+          </a:ln>
+          <a:effectLst/>
+        </p:spPr>
+        <p:style>
+          <a:lnRef idx="1">
+            <a:schemeClr val="accent1"/>
+          </a:lnRef>
+          <a:fillRef idx="3">
+            <a:schemeClr val="accent1"/>
+          </a:fillRef>
+          <a:effectRef idx="2">
+            <a:schemeClr val="accent1"/>
+          </a:effectRef>
+          <a:fontRef idx="minor">
+            <a:schemeClr val="lt1"/>
+          </a:fontRef>
+        </p:style>
+        <p:txBody>
+          <a:bodyPr rtlCol="0" anchor="ctr"/>
+          <a:lstStyle/>
+          <a:p/>
+        </p:txBody>
+      </p:sp>
+      <p:sp>
+        <p:nvSpPr>
+          <p:cNvPr id="11" name="Oval 10"/>
+          <p:cNvSpPr/>
+          <p:nvPr/>
+        </p:nvSpPr>
+        <p:spPr>
+          <a:xfrm>
+            <a:off x="6461607" y="1828800"/>
+            <a:ext cx="457200" cy="457200"/>
+          </a:xfrm>
+          <a:prstGeom prst="ellipse">
+            <a:avLst/>
+          </a:prstGeom>
+          <a:solidFill>
+            <a:srgbClr val="4EA1FF"/>
+          </a:solidFill>
+          <a:ln>
+            <a:noFill/>
+          </a:ln>
+          <a:effectLst/>
+        </p:spPr>
+        <p:style>
+          <a:lnRef idx="1">
+            <a:schemeClr val="accent1"/>
+          </a:lnRef>
+          <a:fillRef idx="3">
+            <a:schemeClr val="accent1"/>
+          </a:fillRef>
+          <a:effectRef idx="2">
+            <a:schemeClr val="accent1"/>
+          </a:effectRef>
+          <a:fontRef idx="minor">
+            <a:schemeClr val="lt1"/>
+          </a:fontRef>
+        </p:style>
+        <p:txBody>
+          <a:bodyPr rtlCol="0" anchor="ctr" lIns="0" rIns="0" tIns="0" bIns="0"/>
+          <a:lstStyle/>
+          <a:p>
+            <a:pPr algn="ctr"/>
+            <a:r>
+              <a:rPr sz="1500" b="1">
+                <a:solidFill>
+                  <a:srgbClr val="202122"/>
+                </a:solidFill>
+                <a:latin typeface="Calibri"/>
+              </a:rPr>
+              <a:t>2</a:t>
+            </a:r>
+          </a:p>
+        </p:txBody>
+      </p:sp>
+      <p:sp>
+        <p:nvSpPr>
+          <p:cNvPr id="12" name="TextBox 11"/>
+          <p:cNvSpPr txBox="1"/>
+          <p:nvPr/>
+        </p:nvSpPr>
+        <p:spPr>
+          <a:xfrm>
+            <a:off x="7055967" y="1801368"/>
+            <a:ext cx="4404207" cy="512064"/>
+          </a:xfrm>
+          <a:prstGeom prst="rect">
+            <a:avLst/>
+          </a:prstGeom>
+          <a:noFill/>
+        </p:spPr>
+        <p:txBody>
+          <a:bodyPr wrap="square" anchor="ctr" lIns="0" rIns="0" tIns="0" bIns="0"/>
+          <a:lstStyle/>
+          <a:p>
+            <a:pPr algn="l"/>
+            <a:r>
+              <a:rPr sz="1900" b="1" i="0">
+                <a:solidFill>
+                  <a:srgbClr val="03306E"/>
+                </a:solidFill>
+                <a:latin typeface="Calibri"/>
+              </a:rPr>
+              <a:t>Applications</a:t>
+            </a:r>
+          </a:p>
+        </p:txBody>
+      </p:sp>
+      <p:sp>
+        <p:nvSpPr>
+          <p:cNvPr id="13" name="TextBox 12"/>
+          <p:cNvSpPr txBox="1"/>
+          <p:nvPr/>
+        </p:nvSpPr>
+        <p:spPr>
+          <a:xfrm>
+            <a:off x="6461607" y="2468880"/>
+            <a:ext cx="4952847" cy="1143000"/>
+          </a:xfrm>
+          <a:prstGeom prst="rect">
+            <a:avLst/>
+          </a:prstGeom>
+          <a:noFill/>
+        </p:spPr>
+        <p:txBody>
+          <a:bodyPr wrap="square" anchor="t" lIns="0" rIns="0" tIns="0" bIns="0"/>
+          <a:lstStyle/>
+          <a:p>
+            <a:pPr algn="l"/>
+            <a:r>
+              <a:rPr sz="2000" b="0" i="0">
+                <a:solidFill>
+                  <a:srgbClr val="202122"/>
+                </a:solidFill>
+                <a:latin typeface="Calibri"/>
+              </a:rPr>
+              <a:t>Separate personal and work profiles; enforce policy.</a:t>
+            </a:r>
+          </a:p>
+        </p:txBody>
+      </p:sp>
+      <p:sp>
+        <p:nvSpPr>
+          <p:cNvPr id="14" name="Rounded Rectangle 13"/>
+          <p:cNvSpPr/>
+          <p:nvPr/>
+        </p:nvSpPr>
+        <p:spPr>
+          <a:xfrm>
+            <a:off x="548640" y="4023360"/>
+            <a:ext cx="5410047" cy="2148840"/>
+          </a:xfrm>
+          <a:prstGeom prst="roundRect">
+            <a:avLst>
+              <a:gd name="adj" fmla="val 6000"/>
+            </a:avLst>
+          </a:prstGeom>
+          <a:solidFill>
+            <a:srgbClr val="EAF3FF"/>
+          </a:solidFill>
+          <a:ln>
+            <a:noFill/>
+          </a:ln>
+          <a:effectLst/>
+        </p:spPr>
+        <p:style>
+          <a:lnRef idx="1">
+            <a:schemeClr val="accent1"/>
+          </a:lnRef>
+          <a:fillRef idx="3">
+            <a:schemeClr val="accent1"/>
+          </a:fillRef>
+          <a:effectRef idx="2">
+            <a:schemeClr val="accent1"/>
+          </a:effectRef>
+          <a:fontRef idx="minor">
+            <a:schemeClr val="lt1"/>
+          </a:fontRef>
+        </p:style>
+        <p:txBody>
+          <a:bodyPr rtlCol="0" anchor="ctr"/>
+          <a:lstStyle/>
+          <a:p/>
+        </p:txBody>
+      </p:sp>
+      <p:sp>
+        <p:nvSpPr>
+          <p:cNvPr id="15" name="Oval 14"/>
+          <p:cNvSpPr/>
+          <p:nvPr/>
+        </p:nvSpPr>
+        <p:spPr>
+          <a:xfrm>
+            <a:off x="777240" y="4251960"/>
+            <a:ext cx="457200" cy="457200"/>
+          </a:xfrm>
+          <a:prstGeom prst="ellipse">
+            <a:avLst/>
+          </a:prstGeom>
+          <a:solidFill>
+            <a:srgbClr val="4EA1FF"/>
+          </a:solidFill>
+          <a:ln>
+            <a:noFill/>
+          </a:ln>
+          <a:effectLst/>
+        </p:spPr>
+        <p:style>
+          <a:lnRef idx="1">
+            <a:schemeClr val="accent1"/>
+          </a:lnRef>
+          <a:fillRef idx="3">
+            <a:schemeClr val="accent1"/>
+          </a:fillRef>
+          <a:effectRef idx="2">
+            <a:schemeClr val="accent1"/>
+          </a:effectRef>
+          <a:fontRef idx="minor">
+            <a:schemeClr val="lt1"/>
+          </a:fontRef>
+        </p:style>
+        <p:txBody>
+          <a:bodyPr rtlCol="0" anchor="ctr" lIns="0" rIns="0" tIns="0" bIns="0"/>
+          <a:lstStyle/>
+          <a:p>
+            <a:pPr algn="ctr"/>
+            <a:r>
+              <a:rPr sz="1500" b="1">
+                <a:solidFill>
+                  <a:srgbClr val="202122"/>
+                </a:solidFill>
+                <a:latin typeface="Calibri"/>
+              </a:rPr>
+              <a:t>3</a:t>
+            </a:r>
+          </a:p>
+        </p:txBody>
+      </p:sp>
+      <p:sp>
+        <p:nvSpPr>
+          <p:cNvPr id="16" name="TextBox 15"/>
+          <p:cNvSpPr txBox="1"/>
+          <p:nvPr/>
+        </p:nvSpPr>
+        <p:spPr>
+          <a:xfrm>
+            <a:off x="1371600" y="4224528"/>
+            <a:ext cx="4404207" cy="512064"/>
+          </a:xfrm>
+          <a:prstGeom prst="rect">
+            <a:avLst/>
+          </a:prstGeom>
+          <a:noFill/>
+        </p:spPr>
+        <p:txBody>
+          <a:bodyPr wrap="square" anchor="ctr" lIns="0" rIns="0" tIns="0" bIns="0"/>
+          <a:lstStyle/>
+          <a:p>
+            <a:pPr algn="l"/>
+            <a:r>
+              <a:rPr sz="1900" b="1" i="0">
+                <a:solidFill>
+                  <a:srgbClr val="03306E"/>
+                </a:solidFill>
+                <a:latin typeface="Calibri"/>
+              </a:rPr>
+              <a:t>Remote management</a:t>
+            </a:r>
+          </a:p>
+        </p:txBody>
+      </p:sp>
+      <p:sp>
+        <p:nvSpPr>
+          <p:cNvPr id="17" name="TextBox 16"/>
+          <p:cNvSpPr txBox="1"/>
+          <p:nvPr/>
+        </p:nvSpPr>
+        <p:spPr>
+          <a:xfrm>
+            <a:off x="777240" y="4892040"/>
+            <a:ext cx="4952847" cy="1143000"/>
+          </a:xfrm>
+          <a:prstGeom prst="rect">
+            <a:avLst/>
+          </a:prstGeom>
+          <a:noFill/>
+        </p:spPr>
+        <p:txBody>
+          <a:bodyPr wrap="square" anchor="t" lIns="0" rIns="0" tIns="0" bIns="0"/>
+          <a:lstStyle/>
+          <a:p>
+            <a:pPr algn="l"/>
+            <a:r>
+              <a:rPr sz="2000" b="0" i="0">
+                <a:solidFill>
+                  <a:srgbClr val="202122"/>
+                </a:solidFill>
+                <a:latin typeface="Calibri"/>
+              </a:rPr>
+              <a:t>Remote wipe, disable features, restrict app stores and data, control backup.</a:t>
+            </a:r>
+          </a:p>
+        </p:txBody>
+      </p:sp>
+      <p:sp>
+        <p:nvSpPr>
+          <p:cNvPr id="18" name="Rounded Rectangle 17"/>
+          <p:cNvSpPr/>
+          <p:nvPr/>
+        </p:nvSpPr>
+        <p:spPr>
+          <a:xfrm>
+            <a:off x="6233007" y="4023360"/>
+            <a:ext cx="5410047" cy="2148840"/>
+          </a:xfrm>
+          <a:prstGeom prst="roundRect">
+            <a:avLst>
+              <a:gd name="adj" fmla="val 6000"/>
+            </a:avLst>
+          </a:prstGeom>
+          <a:solidFill>
+            <a:srgbClr val="EAF3FF"/>
+          </a:solidFill>
+          <a:ln>
+            <a:noFill/>
+          </a:ln>
+          <a:effectLst/>
+        </p:spPr>
+        <p:style>
+          <a:lnRef idx="1">
+            <a:schemeClr val="accent1"/>
+          </a:lnRef>
+          <a:fillRef idx="3">
+            <a:schemeClr val="accent1"/>
+          </a:fillRef>
+          <a:effectRef idx="2">
+            <a:schemeClr val="accent1"/>
+          </a:effectRef>
+          <a:fontRef idx="minor">
+            <a:schemeClr val="lt1"/>
+          </a:fontRef>
+        </p:style>
+        <p:txBody>
+          <a:bodyPr rtlCol="0" anchor="ctr"/>
+          <a:lstStyle/>
+          <a:p/>
+        </p:txBody>
+      </p:sp>
+      <p:sp>
+        <p:nvSpPr>
+          <p:cNvPr id="19" name="Oval 18"/>
+          <p:cNvSpPr/>
+          <p:nvPr/>
+        </p:nvSpPr>
+        <p:spPr>
+          <a:xfrm>
+            <a:off x="6461607" y="4251960"/>
+            <a:ext cx="457200" cy="457200"/>
+          </a:xfrm>
+          <a:prstGeom prst="ellipse">
+            <a:avLst/>
+          </a:prstGeom>
+          <a:solidFill>
+            <a:srgbClr val="4EA1FF"/>
+          </a:solidFill>
+          <a:ln>
+            <a:noFill/>
+          </a:ln>
+          <a:effectLst/>
+        </p:spPr>
+        <p:style>
+          <a:lnRef idx="1">
+            <a:schemeClr val="accent1"/>
+          </a:lnRef>
+          <a:fillRef idx="3">
+            <a:schemeClr val="accent1"/>
+          </a:fillRef>
+          <a:effectRef idx="2">
+            <a:schemeClr val="accent1"/>
+          </a:effectRef>
+          <a:fontRef idx="minor">
+            <a:schemeClr val="lt1"/>
+          </a:fontRef>
+        </p:style>
+        <p:txBody>
+          <a:bodyPr rtlCol="0" anchor="ctr" lIns="0" rIns="0" tIns="0" bIns="0"/>
+          <a:lstStyle/>
+          <a:p>
+            <a:pPr algn="ctr"/>
+            <a:r>
+              <a:rPr sz="1500" b="1">
+                <a:solidFill>
+                  <a:srgbClr val="202122"/>
+                </a:solidFill>
+                <a:latin typeface="Calibri"/>
+              </a:rPr>
+              <a:t>4</a:t>
+            </a:r>
+          </a:p>
+        </p:txBody>
+      </p:sp>
+      <p:sp>
+        <p:nvSpPr>
+          <p:cNvPr id="20" name="TextBox 19"/>
+          <p:cNvSpPr txBox="1"/>
+          <p:nvPr/>
+        </p:nvSpPr>
+        <p:spPr>
+          <a:xfrm>
+            <a:off x="7055967" y="4224528"/>
+            <a:ext cx="4404207" cy="512064"/>
+          </a:xfrm>
+          <a:prstGeom prst="rect">
+            <a:avLst/>
+          </a:prstGeom>
+          <a:noFill/>
+        </p:spPr>
+        <p:txBody>
+          <a:bodyPr wrap="square" anchor="ctr" lIns="0" rIns="0" tIns="0" bIns="0"/>
+          <a:lstStyle/>
+          <a:p>
+            <a:pPr algn="l"/>
+            <a:r>
+              <a:rPr sz="1900" b="1" i="0">
+                <a:solidFill>
+                  <a:srgbClr val="03306E"/>
+                </a:solidFill>
+                <a:latin typeface="Calibri"/>
+              </a:rPr>
+              <a:t>Security features</a:t>
+            </a:r>
+          </a:p>
+        </p:txBody>
+      </p:sp>
+      <p:sp>
+        <p:nvSpPr>
+          <p:cNvPr id="21" name="TextBox 20"/>
+          <p:cNvSpPr txBox="1"/>
+          <p:nvPr/>
+        </p:nvSpPr>
+        <p:spPr>
+          <a:xfrm>
+            <a:off x="6461607" y="4892040"/>
+            <a:ext cx="4952847" cy="1143000"/>
+          </a:xfrm>
+          <a:prstGeom prst="rect">
+            <a:avLst/>
+          </a:prstGeom>
+          <a:noFill/>
+        </p:spPr>
+        <p:txBody>
+          <a:bodyPr wrap="square" anchor="t" lIns="0" rIns="0" tIns="0" bIns="0"/>
+          <a:lstStyle/>
+          <a:p>
+            <a:pPr algn="l"/>
+            <a:r>
+              <a:rPr sz="2000" b="0" i="0">
+                <a:solidFill>
+                  <a:srgbClr val="202122"/>
+                </a:solidFill>
+                <a:latin typeface="Calibri"/>
+              </a:rPr>
+              <a:t>Screen lock, encryption, password rules, login limits, MFA, authenticator apps.</a:t>
+            </a:r>
+          </a:p>
+        </p:txBody>
+      </p:sp>
+    </p:spTree>
+  </p:cSld>
+  <p:clrMapOvr>
+    <a:masterClrMapping/>
+  </p:clrMapOvr>
+</p:sld>
+</file>
+
+<file path=ppt/slides/slide11.xml><?xml version="1.0" encoding="utf-8"?>
+<p:sld xmlns:a="http://schemas.openxmlformats.org/drawingml/2006/main" xmlns:p="http://schemas.openxmlformats.org/presentationml/2006/main" xmlns:r="http://schemas.openxmlformats.org/officeDocument/2006/relationships">
+  <p:cSld>
+    <p:bg>
+      <p:bgPr>
+        <a:solidFill>
+          <a:srgbClr val="FFFFFF"/>
+        </a:solidFill>
+        <a:effectLst/>
+      </p:bgPr>
+    </p:bg>
+    <p:spTree>
+      <p:nvGrpSpPr>
+        <p:cNvPr id="1" name=""/>
+        <p:cNvGrpSpPr/>
+        <p:nvPr/>
+      </p:nvGrpSpPr>
+      <p:grpSpPr/>
+      <p:sp>
+        <p:nvSpPr>
+          <p:cNvPr id="2" name="TextBox 1"/>
+          <p:cNvSpPr txBox="1"/>
+          <p:nvPr/>
+        </p:nvSpPr>
+        <p:spPr>
+          <a:xfrm>
+            <a:off x="548640" y="320040"/>
+            <a:ext cx="11094415" cy="274320"/>
+          </a:xfrm>
+          <a:prstGeom prst="rect">
+            <a:avLst/>
+          </a:prstGeom>
+          <a:noFill/>
+        </p:spPr>
+        <p:txBody>
+          <a:bodyPr wrap="square" anchor="t" lIns="0" rIns="0" tIns="0" bIns="0"/>
+          <a:lstStyle/>
+          <a:p>
+            <a:pPr algn="l"/>
+            <a:r>
+              <a:rPr sz="1100" b="1" i="0">
+                <a:solidFill>
+                  <a:srgbClr val="54595D"/>
+                </a:solidFill>
+                <a:latin typeface="Calibri"/>
+              </a:rPr>
+              <a:t>DIGITAL SUPPORT  ·  Digital Support Content Area 2</a:t>
+            </a:r>
+          </a:p>
+        </p:txBody>
+      </p:sp>
+      <p:sp>
+        <p:nvSpPr>
+          <p:cNvPr id="3" name="TextBox 2"/>
+          <p:cNvSpPr txBox="1"/>
+          <p:nvPr/>
+        </p:nvSpPr>
+        <p:spPr>
+          <a:xfrm>
+            <a:off x="548640" y="566928"/>
+            <a:ext cx="11094415" cy="822960"/>
+          </a:xfrm>
+          <a:prstGeom prst="rect">
+            <a:avLst/>
+          </a:prstGeom>
+          <a:noFill/>
+        </p:spPr>
+        <p:txBody>
+          <a:bodyPr wrap="square" anchor="ctr" lIns="0" rIns="0" tIns="0" bIns="0"/>
+          <a:lstStyle/>
+          <a:p>
+            <a:pPr algn="l"/>
+            <a:r>
+              <a:rPr sz="3200" b="1" i="0">
+                <a:solidFill>
+                  <a:srgbClr val="03306E"/>
+                </a:solidFill>
+                <a:latin typeface="Cambria"/>
+              </a:rPr>
+              <a:t>Quick check: Mobile Device Management (MDM)</a:t>
+            </a:r>
+          </a:p>
+        </p:txBody>
+      </p:sp>
+      <p:sp>
+        <p:nvSpPr>
+          <p:cNvPr id="4" name="TextBox 3"/>
+          <p:cNvSpPr txBox="1"/>
+          <p:nvPr/>
+        </p:nvSpPr>
+        <p:spPr>
+          <a:xfrm>
+            <a:off x="548640" y="6446520"/>
+            <a:ext cx="8229600" cy="274320"/>
+          </a:xfrm>
+          <a:prstGeom prst="rect">
+            <a:avLst/>
+          </a:prstGeom>
+          <a:noFill/>
+        </p:spPr>
+        <p:txBody>
+          <a:bodyPr wrap="square" anchor="t" lIns="0" rIns="0" tIns="0" bIns="0"/>
+          <a:lstStyle/>
+          <a:p>
+            <a:pPr algn="l"/>
+            <a:r>
+              <a:rPr sz="1000" b="0" i="0">
+                <a:solidFill>
+                  <a:srgbClr val="54595D"/>
+                </a:solidFill>
+                <a:latin typeface="Calibri"/>
+              </a:rPr>
+              <a:t>Digital Support and Security T Level  ·  Asset, Version and Mobile Device Management</a:t>
+            </a:r>
+          </a:p>
+        </p:txBody>
+      </p:sp>
+      <p:sp>
+        <p:nvSpPr>
+          <p:cNvPr id="5" name="TextBox 4"/>
+          <p:cNvSpPr txBox="1"/>
+          <p:nvPr/>
+        </p:nvSpPr>
+        <p:spPr>
+          <a:xfrm>
+            <a:off x="10728655" y="6446520"/>
+            <a:ext cx="914400" cy="274320"/>
+          </a:xfrm>
+          <a:prstGeom prst="rect">
+            <a:avLst/>
+          </a:prstGeom>
+          <a:noFill/>
+        </p:spPr>
+        <p:txBody>
+          <a:bodyPr wrap="square" anchor="t" lIns="0" rIns="0" tIns="0" bIns="0"/>
+          <a:lstStyle/>
+          <a:p>
+            <a:pPr algn="r"/>
+            <a:r>
+              <a:rPr sz="1000" b="0" i="0">
+                <a:solidFill>
+                  <a:srgbClr val="54595D"/>
+                </a:solidFill>
+                <a:latin typeface="Calibri"/>
+              </a:rPr>
+              <a:t>11</a:t>
+            </a:r>
+          </a:p>
+        </p:txBody>
+      </p:sp>
+      <p:sp>
+        <p:nvSpPr>
+          <p:cNvPr id="6" name="Oval 5"/>
+          <p:cNvSpPr/>
+          <p:nvPr/>
+        </p:nvSpPr>
+        <p:spPr>
+          <a:xfrm>
+            <a:off x="548640" y="1691640"/>
+            <a:ext cx="502920" cy="502920"/>
+          </a:xfrm>
+          <a:prstGeom prst="ellipse">
+            <a:avLst/>
+          </a:prstGeom>
+          <a:solidFill>
+            <a:srgbClr val="4EA1FF"/>
+          </a:solidFill>
+          <a:ln>
+            <a:noFill/>
+          </a:ln>
+          <a:effectLst/>
+        </p:spPr>
+        <p:style>
+          <a:lnRef idx="1">
+            <a:schemeClr val="accent1"/>
+          </a:lnRef>
+          <a:fillRef idx="3">
+            <a:schemeClr val="accent1"/>
+          </a:fillRef>
+          <a:effectRef idx="2">
+            <a:schemeClr val="accent1"/>
+          </a:effectRef>
+          <a:fontRef idx="minor">
+            <a:schemeClr val="lt1"/>
+          </a:fontRef>
+        </p:style>
+        <p:txBody>
+          <a:bodyPr rtlCol="0" anchor="ctr" lIns="0" rIns="0" tIns="0" bIns="0"/>
+          <a:lstStyle/>
+          <a:p>
+            <a:pPr algn="ctr"/>
+            <a:r>
+              <a:rPr sz="1600" b="1">
+                <a:solidFill>
+                  <a:srgbClr val="202122"/>
+                </a:solidFill>
+                <a:latin typeface="Calibri"/>
+              </a:rPr>
+              <a:t>1</a:t>
+            </a:r>
+          </a:p>
+        </p:txBody>
+      </p:sp>
+      <p:sp>
+        <p:nvSpPr>
+          <p:cNvPr id="7" name="TextBox 6"/>
+          <p:cNvSpPr txBox="1"/>
+          <p:nvPr/>
+        </p:nvSpPr>
+        <p:spPr>
+          <a:xfrm>
+            <a:off x="1371600" y="1645920"/>
+            <a:ext cx="10271455" cy="1188720"/>
+          </a:xfrm>
+          <a:prstGeom prst="rect">
+            <a:avLst/>
+          </a:prstGeom>
+          <a:noFill/>
+        </p:spPr>
+        <p:txBody>
+          <a:bodyPr wrap="square" anchor="t" lIns="0" rIns="0" tIns="0" bIns="0"/>
+          <a:lstStyle/>
+          <a:p>
+            <a:pPr algn="l"/>
+            <a:r>
+              <a:rPr sz="2400" b="0" i="0">
+                <a:solidFill>
+                  <a:srgbClr val="202122"/>
+                </a:solidFill>
+                <a:latin typeface="Calibri"/>
+              </a:rPr>
+              <a:t>What can MDM do if a phone is lost?</a:t>
+            </a:r>
+          </a:p>
+        </p:txBody>
+      </p:sp>
+      <p:sp>
+        <p:nvSpPr>
+          <p:cNvPr id="8" name="Oval 7"/>
+          <p:cNvSpPr/>
+          <p:nvPr/>
+        </p:nvSpPr>
+        <p:spPr>
+          <a:xfrm>
+            <a:off x="548640" y="3108960"/>
+            <a:ext cx="502920" cy="502920"/>
+          </a:xfrm>
+          <a:prstGeom prst="ellipse">
+            <a:avLst/>
+          </a:prstGeom>
+          <a:solidFill>
+            <a:srgbClr val="4EA1FF"/>
+          </a:solidFill>
+          <a:ln>
+            <a:noFill/>
+          </a:ln>
+          <a:effectLst/>
+        </p:spPr>
+        <p:style>
+          <a:lnRef idx="1">
+            <a:schemeClr val="accent1"/>
+          </a:lnRef>
+          <a:fillRef idx="3">
+            <a:schemeClr val="accent1"/>
+          </a:fillRef>
+          <a:effectRef idx="2">
+            <a:schemeClr val="accent1"/>
+          </a:effectRef>
+          <a:fontRef idx="minor">
+            <a:schemeClr val="lt1"/>
+          </a:fontRef>
+        </p:style>
+        <p:txBody>
+          <a:bodyPr rtlCol="0" anchor="ctr" lIns="0" rIns="0" tIns="0" bIns="0"/>
+          <a:lstStyle/>
+          <a:p>
+            <a:pPr algn="ctr"/>
+            <a:r>
+              <a:rPr sz="1600" b="1">
+                <a:solidFill>
+                  <a:srgbClr val="202122"/>
+                </a:solidFill>
+                <a:latin typeface="Calibri"/>
+              </a:rPr>
+              <a:t>2</a:t>
+            </a:r>
+          </a:p>
+        </p:txBody>
+      </p:sp>
+      <p:sp>
+        <p:nvSpPr>
+          <p:cNvPr id="9" name="TextBox 8"/>
+          <p:cNvSpPr txBox="1"/>
+          <p:nvPr/>
+        </p:nvSpPr>
+        <p:spPr>
+          <a:xfrm>
+            <a:off x="1371600" y="3063240"/>
+            <a:ext cx="10271455" cy="1188720"/>
+          </a:xfrm>
+          <a:prstGeom prst="rect">
+            <a:avLst/>
+          </a:prstGeom>
+          <a:noFill/>
+        </p:spPr>
+        <p:txBody>
+          <a:bodyPr wrap="square" anchor="t" lIns="0" rIns="0" tIns="0" bIns="0"/>
+          <a:lstStyle/>
+          <a:p>
+            <a:pPr algn="l"/>
+            <a:r>
+              <a:rPr sz="2400" b="0" i="0">
+                <a:solidFill>
+                  <a:srgbClr val="202122"/>
+                </a:solidFill>
+                <a:latin typeface="Calibri"/>
+              </a:rPr>
+              <a:t>Why separate work and personal profiles?</a:t>
+            </a:r>
+          </a:p>
+        </p:txBody>
+      </p:sp>
+      <p:sp>
+        <p:nvSpPr>
+          <p:cNvPr id="10" name="Oval 9"/>
+          <p:cNvSpPr/>
+          <p:nvPr/>
+        </p:nvSpPr>
+        <p:spPr>
+          <a:xfrm>
+            <a:off x="548640" y="4526280"/>
+            <a:ext cx="502920" cy="502920"/>
+          </a:xfrm>
+          <a:prstGeom prst="ellipse">
+            <a:avLst/>
+          </a:prstGeom>
+          <a:solidFill>
+            <a:srgbClr val="4EA1FF"/>
+          </a:solidFill>
+          <a:ln>
+            <a:noFill/>
+          </a:ln>
+          <a:effectLst/>
+        </p:spPr>
+        <p:style>
+          <a:lnRef idx="1">
+            <a:schemeClr val="accent1"/>
+          </a:lnRef>
+          <a:fillRef idx="3">
+            <a:schemeClr val="accent1"/>
+          </a:fillRef>
+          <a:effectRef idx="2">
+            <a:schemeClr val="accent1"/>
+          </a:effectRef>
+          <a:fontRef idx="minor">
+            <a:schemeClr val="lt1"/>
+          </a:fontRef>
+        </p:style>
+        <p:txBody>
+          <a:bodyPr rtlCol="0" anchor="ctr" lIns="0" rIns="0" tIns="0" bIns="0"/>
+          <a:lstStyle/>
+          <a:p>
+            <a:pPr algn="ctr"/>
+            <a:r>
+              <a:rPr sz="1600" b="1">
+                <a:solidFill>
+                  <a:srgbClr val="202122"/>
+                </a:solidFill>
+                <a:latin typeface="Calibri"/>
+              </a:rPr>
+              <a:t>3</a:t>
+            </a:r>
+          </a:p>
+        </p:txBody>
+      </p:sp>
+      <p:sp>
+        <p:nvSpPr>
+          <p:cNvPr id="11" name="TextBox 10"/>
+          <p:cNvSpPr txBox="1"/>
+          <p:nvPr/>
+        </p:nvSpPr>
+        <p:spPr>
+          <a:xfrm>
+            <a:off x="1371600" y="4480560"/>
+            <a:ext cx="10271455" cy="1188720"/>
+          </a:xfrm>
+          <a:prstGeom prst="rect">
+            <a:avLst/>
+          </a:prstGeom>
+          <a:noFill/>
+        </p:spPr>
+        <p:txBody>
+          <a:bodyPr wrap="square" anchor="t" lIns="0" rIns="0" tIns="0" bIns="0"/>
+          <a:lstStyle/>
+          <a:p>
+            <a:pPr algn="l"/>
+            <a:r>
+              <a:rPr sz="2400" b="0" i="0">
+                <a:solidFill>
+                  <a:srgbClr val="202122"/>
+                </a:solidFill>
+                <a:latin typeface="Calibri"/>
+              </a:rPr>
+              <a:t>Name two security features MDM can enforce.</a:t>
+            </a:r>
+          </a:p>
+        </p:txBody>
+      </p:sp>
+      <p:sp>
+        <p:nvSpPr>
+          <p:cNvPr id="12" name="TextBox 11"/>
+          <p:cNvSpPr txBox="1"/>
+          <p:nvPr/>
+        </p:nvSpPr>
+        <p:spPr>
+          <a:xfrm>
+            <a:off x="548640" y="5852160"/>
+            <a:ext cx="11094415" cy="365760"/>
+          </a:xfrm>
+          <a:prstGeom prst="rect">
+            <a:avLst/>
+          </a:prstGeom>
+          <a:noFill/>
+        </p:spPr>
+        <p:txBody>
+          <a:bodyPr wrap="square" anchor="t" lIns="0" rIns="0" tIns="0" bIns="0"/>
+          <a:lstStyle/>
+          <a:p>
+            <a:pPr algn="l"/>
+            <a:r>
+              <a:rPr sz="1300" b="0" i="1">
+                <a:solidFill>
+                  <a:srgbClr val="54595D"/>
+                </a:solidFill>
+                <a:latin typeface="Calibri"/>
+              </a:rPr>
+              <a:t>Answer on mini whiteboards or in your book. Answers are in the speaker notes.</a:t>
+            </a:r>
+          </a:p>
+        </p:txBody>
+      </p:sp>
+    </p:spTree>
+  </p:cSld>
+  <p:clrMapOvr>
+    <a:masterClrMapping/>
+  </p:clrMapOvr>
+</p:sld>
+</file>
+
+<file path=ppt/slides/slide12.xml><?xml version="1.0" encoding="utf-8"?>
+<p:sld xmlns:a="http://schemas.openxmlformats.org/drawingml/2006/main" xmlns:p="http://schemas.openxmlformats.org/presentationml/2006/main" xmlns:r="http://schemas.openxmlformats.org/officeDocument/2006/relationships">
+  <p:cSld>
+    <p:bg>
+      <p:bgPr>
+        <a:solidFill>
+          <a:srgbClr val="FFFFFF"/>
+        </a:solidFill>
+        <a:effectLst/>
+      </p:bgPr>
+    </p:bg>
+    <p:spTree>
+      <p:nvGrpSpPr>
+        <p:cNvPr id="1" name=""/>
+        <p:cNvGrpSpPr/>
+        <p:nvPr/>
+      </p:nvGrpSpPr>
+      <p:grpSpPr/>
+      <p:sp>
+        <p:nvSpPr>
+          <p:cNvPr id="2" name="TextBox 1"/>
+          <p:cNvSpPr txBox="1"/>
+          <p:nvPr/>
+        </p:nvSpPr>
+        <p:spPr>
+          <a:xfrm>
+            <a:off x="548640" y="320040"/>
+            <a:ext cx="11094415" cy="274320"/>
+          </a:xfrm>
+          <a:prstGeom prst="rect">
+            <a:avLst/>
+          </a:prstGeom>
+          <a:noFill/>
+        </p:spPr>
+        <p:txBody>
+          <a:bodyPr wrap="square" anchor="t" lIns="0" rIns="0" tIns="0" bIns="0"/>
+          <a:lstStyle/>
+          <a:p>
+            <a:pPr algn="l"/>
+            <a:r>
+              <a:rPr sz="1100" b="1" i="0">
+                <a:solidFill>
+                  <a:srgbClr val="54595D"/>
+                </a:solidFill>
+                <a:latin typeface="Calibri"/>
+              </a:rPr>
+              <a:t>DIGITAL SUPPORT  ·  Digital Support Content Area 2</a:t>
+            </a:r>
+          </a:p>
+        </p:txBody>
+      </p:sp>
+      <p:sp>
+        <p:nvSpPr>
+          <p:cNvPr id="3" name="TextBox 2"/>
+          <p:cNvSpPr txBox="1"/>
+          <p:nvPr/>
+        </p:nvSpPr>
+        <p:spPr>
+          <a:xfrm>
+            <a:off x="548640" y="566928"/>
+            <a:ext cx="11094415" cy="822960"/>
+          </a:xfrm>
+          <a:prstGeom prst="rect">
+            <a:avLst/>
+          </a:prstGeom>
+          <a:noFill/>
+        </p:spPr>
+        <p:txBody>
+          <a:bodyPr wrap="square" anchor="ctr" lIns="0" rIns="0" tIns="0" bIns="0"/>
+          <a:lstStyle/>
+          <a:p>
+            <a:pPr algn="l"/>
+            <a:r>
+              <a:rPr sz="3200" b="1" i="0">
+                <a:solidFill>
+                  <a:srgbClr val="03306E"/>
+                </a:solidFill>
+                <a:latin typeface="Cambria"/>
+              </a:rPr>
+              <a:t>Check your understanding</a:t>
+            </a:r>
+          </a:p>
+        </p:txBody>
+      </p:sp>
+      <p:sp>
+        <p:nvSpPr>
+          <p:cNvPr id="4" name="TextBox 3"/>
+          <p:cNvSpPr txBox="1"/>
+          <p:nvPr/>
+        </p:nvSpPr>
+        <p:spPr>
+          <a:xfrm>
+            <a:off x="548640" y="6446520"/>
+            <a:ext cx="8229600" cy="274320"/>
+          </a:xfrm>
+          <a:prstGeom prst="rect">
+            <a:avLst/>
+          </a:prstGeom>
+          <a:noFill/>
+        </p:spPr>
+        <p:txBody>
+          <a:bodyPr wrap="square" anchor="t" lIns="0" rIns="0" tIns="0" bIns="0"/>
+          <a:lstStyle/>
+          <a:p>
+            <a:pPr algn="l"/>
+            <a:r>
+              <a:rPr sz="1000" b="0" i="0">
+                <a:solidFill>
+                  <a:srgbClr val="54595D"/>
+                </a:solidFill>
+                <a:latin typeface="Calibri"/>
+              </a:rPr>
+              <a:t>Digital Support and Security T Level  ·  Asset, Version and Mobile Device Management</a:t>
+            </a:r>
+          </a:p>
+        </p:txBody>
+      </p:sp>
+      <p:sp>
+        <p:nvSpPr>
+          <p:cNvPr id="5" name="TextBox 4"/>
+          <p:cNvSpPr txBox="1"/>
+          <p:nvPr/>
+        </p:nvSpPr>
+        <p:spPr>
+          <a:xfrm>
+            <a:off x="10728655" y="6446520"/>
+            <a:ext cx="914400" cy="274320"/>
+          </a:xfrm>
+          <a:prstGeom prst="rect">
+            <a:avLst/>
+          </a:prstGeom>
+          <a:noFill/>
+        </p:spPr>
+        <p:txBody>
+          <a:bodyPr wrap="square" anchor="t" lIns="0" rIns="0" tIns="0" bIns="0"/>
+          <a:lstStyle/>
+          <a:p>
+            <a:pPr algn="r"/>
+            <a:r>
+              <a:rPr sz="1000" b="0" i="0">
+                <a:solidFill>
+                  <a:srgbClr val="54595D"/>
+                </a:solidFill>
+                <a:latin typeface="Calibri"/>
+              </a:rPr>
+              <a:t>12</a:t>
+            </a:r>
+          </a:p>
+        </p:txBody>
+      </p:sp>
+      <p:sp>
+        <p:nvSpPr>
+          <p:cNvPr id="6" name="Oval 5"/>
+          <p:cNvSpPr/>
+          <p:nvPr/>
+        </p:nvSpPr>
+        <p:spPr>
+          <a:xfrm>
+            <a:off x="548640" y="1618488"/>
+            <a:ext cx="411480" cy="411480"/>
+          </a:xfrm>
+          <a:prstGeom prst="ellipse">
+            <a:avLst/>
+          </a:prstGeom>
+          <a:solidFill>
+            <a:srgbClr val="4EA1FF"/>
+          </a:solidFill>
+          <a:ln>
+            <a:noFill/>
+          </a:ln>
+          <a:effectLst/>
+        </p:spPr>
+        <p:style>
+          <a:lnRef idx="1">
+            <a:schemeClr val="accent1"/>
+          </a:lnRef>
+          <a:fillRef idx="3">
+            <a:schemeClr val="accent1"/>
+          </a:fillRef>
+          <a:effectRef idx="2">
+            <a:schemeClr val="accent1"/>
+          </a:effectRef>
+          <a:fontRef idx="minor">
+            <a:schemeClr val="lt1"/>
+          </a:fontRef>
+        </p:style>
+        <p:txBody>
+          <a:bodyPr rtlCol="0" anchor="ctr" lIns="0" rIns="0" tIns="0" bIns="0"/>
+          <a:lstStyle/>
+          <a:p>
+            <a:pPr algn="ctr"/>
+            <a:r>
+              <a:rPr sz="1400" b="1">
+                <a:solidFill>
+                  <a:srgbClr val="202122"/>
+                </a:solidFill>
+                <a:latin typeface="Calibri"/>
+              </a:rPr>
+              <a:t>1</a:t>
+            </a:r>
+          </a:p>
+        </p:txBody>
+      </p:sp>
+      <p:sp>
+        <p:nvSpPr>
+          <p:cNvPr id="7" name="TextBox 6"/>
+          <p:cNvSpPr txBox="1"/>
+          <p:nvPr/>
+        </p:nvSpPr>
+        <p:spPr>
+          <a:xfrm>
+            <a:off x="1234440" y="1600200"/>
+            <a:ext cx="10408615" cy="1030986"/>
+          </a:xfrm>
+          <a:prstGeom prst="rect">
+            <a:avLst/>
+          </a:prstGeom>
+          <a:noFill/>
+        </p:spPr>
+        <p:txBody>
+          <a:bodyPr wrap="square" anchor="t" lIns="0" rIns="0" tIns="0" bIns="0"/>
+          <a:lstStyle/>
+          <a:p>
+            <a:pPr algn="l"/>
+            <a:r>
+              <a:rPr sz="2200" b="0" i="0">
+                <a:solidFill>
+                  <a:srgbClr val="202122"/>
+                </a:solidFill>
+                <a:latin typeface="Calibri"/>
+              </a:rPr>
+              <a:t>What is a rollback procedure?</a:t>
+            </a:r>
+          </a:p>
+        </p:txBody>
+      </p:sp>
+      <p:sp>
+        <p:nvSpPr>
+          <p:cNvPr id="8" name="Oval 7"/>
+          <p:cNvSpPr/>
+          <p:nvPr/>
+        </p:nvSpPr>
+        <p:spPr>
+          <a:xfrm>
+            <a:off x="548640" y="2814066"/>
+            <a:ext cx="411480" cy="411480"/>
+          </a:xfrm>
+          <a:prstGeom prst="ellipse">
+            <a:avLst/>
+          </a:prstGeom>
+          <a:solidFill>
+            <a:srgbClr val="4EA1FF"/>
+          </a:solidFill>
+          <a:ln>
+            <a:noFill/>
+          </a:ln>
+          <a:effectLst/>
+        </p:spPr>
+        <p:style>
+          <a:lnRef idx="1">
+            <a:schemeClr val="accent1"/>
+          </a:lnRef>
+          <a:fillRef idx="3">
+            <a:schemeClr val="accent1"/>
+          </a:fillRef>
+          <a:effectRef idx="2">
+            <a:schemeClr val="accent1"/>
+          </a:effectRef>
+          <a:fontRef idx="minor">
+            <a:schemeClr val="lt1"/>
+          </a:fontRef>
+        </p:style>
+        <p:txBody>
+          <a:bodyPr rtlCol="0" anchor="ctr" lIns="0" rIns="0" tIns="0" bIns="0"/>
+          <a:lstStyle/>
+          <a:p>
+            <a:pPr algn="ctr"/>
+            <a:r>
+              <a:rPr sz="1400" b="1">
+                <a:solidFill>
+                  <a:srgbClr val="202122"/>
+                </a:solidFill>
+                <a:latin typeface="Calibri"/>
+              </a:rPr>
+              <a:t>2</a:t>
+            </a:r>
+          </a:p>
+        </p:txBody>
+      </p:sp>
+      <p:sp>
+        <p:nvSpPr>
+          <p:cNvPr id="9" name="TextBox 8"/>
+          <p:cNvSpPr txBox="1"/>
+          <p:nvPr/>
+        </p:nvSpPr>
+        <p:spPr>
+          <a:xfrm>
+            <a:off x="1234440" y="2795778"/>
+            <a:ext cx="10408615" cy="1030986"/>
+          </a:xfrm>
+          <a:prstGeom prst="rect">
+            <a:avLst/>
+          </a:prstGeom>
+          <a:noFill/>
+        </p:spPr>
+        <p:txBody>
+          <a:bodyPr wrap="square" anchor="t" lIns="0" rIns="0" tIns="0" bIns="0"/>
+          <a:lstStyle/>
+          <a:p>
+            <a:pPr algn="l"/>
+            <a:r>
+              <a:rPr sz="2200" b="0" i="0">
+                <a:solidFill>
+                  <a:srgbClr val="202122"/>
+                </a:solidFill>
+                <a:latin typeface="Calibri"/>
+              </a:rPr>
+              <a:t>What happens at the decommissioning stage of asset management?</a:t>
+            </a:r>
+          </a:p>
+        </p:txBody>
+      </p:sp>
+      <p:sp>
+        <p:nvSpPr>
+          <p:cNvPr id="10" name="Oval 9"/>
+          <p:cNvSpPr/>
+          <p:nvPr/>
+        </p:nvSpPr>
+        <p:spPr>
+          <a:xfrm>
+            <a:off x="548640" y="4009644"/>
+            <a:ext cx="411480" cy="411480"/>
+          </a:xfrm>
+          <a:prstGeom prst="ellipse">
+            <a:avLst/>
+          </a:prstGeom>
+          <a:solidFill>
+            <a:srgbClr val="4EA1FF"/>
+          </a:solidFill>
+          <a:ln>
+            <a:noFill/>
+          </a:ln>
+          <a:effectLst/>
+        </p:spPr>
+        <p:style>
+          <a:lnRef idx="1">
+            <a:schemeClr val="accent1"/>
+          </a:lnRef>
+          <a:fillRef idx="3">
+            <a:schemeClr val="accent1"/>
+          </a:fillRef>
+          <a:effectRef idx="2">
+            <a:schemeClr val="accent1"/>
+          </a:effectRef>
+          <a:fontRef idx="minor">
+            <a:schemeClr val="lt1"/>
+          </a:fontRef>
+        </p:style>
+        <p:txBody>
+          <a:bodyPr rtlCol="0" anchor="ctr" lIns="0" rIns="0" tIns="0" bIns="0"/>
+          <a:lstStyle/>
+          <a:p>
+            <a:pPr algn="ctr"/>
+            <a:r>
+              <a:rPr sz="1400" b="1">
+                <a:solidFill>
+                  <a:srgbClr val="202122"/>
+                </a:solidFill>
+                <a:latin typeface="Calibri"/>
+              </a:rPr>
+              <a:t>3</a:t>
+            </a:r>
+          </a:p>
+        </p:txBody>
+      </p:sp>
+      <p:sp>
+        <p:nvSpPr>
+          <p:cNvPr id="11" name="TextBox 10"/>
+          <p:cNvSpPr txBox="1"/>
+          <p:nvPr/>
+        </p:nvSpPr>
+        <p:spPr>
+          <a:xfrm>
+            <a:off x="1234440" y="3991356"/>
+            <a:ext cx="10408615" cy="1030986"/>
+          </a:xfrm>
+          <a:prstGeom prst="rect">
+            <a:avLst/>
+          </a:prstGeom>
+          <a:noFill/>
+        </p:spPr>
+        <p:txBody>
+          <a:bodyPr wrap="square" anchor="t" lIns="0" rIns="0" tIns="0" bIns="0"/>
+          <a:lstStyle/>
+          <a:p>
+            <a:pPr algn="l"/>
+            <a:r>
+              <a:rPr sz="2200" b="0" i="0">
+                <a:solidFill>
+                  <a:srgbClr val="202122"/>
+                </a:solidFill>
+                <a:latin typeface="Calibri"/>
+              </a:rPr>
+              <a:t>What does a remote wipe do?</a:t>
+            </a:r>
+          </a:p>
+        </p:txBody>
+      </p:sp>
+      <p:sp>
+        <p:nvSpPr>
+          <p:cNvPr id="12" name="Oval 11"/>
+          <p:cNvSpPr/>
+          <p:nvPr/>
+        </p:nvSpPr>
+        <p:spPr>
+          <a:xfrm>
+            <a:off x="548640" y="5205221"/>
+            <a:ext cx="411480" cy="411480"/>
+          </a:xfrm>
+          <a:prstGeom prst="ellipse">
+            <a:avLst/>
+          </a:prstGeom>
+          <a:solidFill>
+            <a:srgbClr val="4EA1FF"/>
+          </a:solidFill>
+          <a:ln>
+            <a:noFill/>
+          </a:ln>
+          <a:effectLst/>
+        </p:spPr>
+        <p:style>
+          <a:lnRef idx="1">
+            <a:schemeClr val="accent1"/>
+          </a:lnRef>
+          <a:fillRef idx="3">
+            <a:schemeClr val="accent1"/>
+          </a:fillRef>
+          <a:effectRef idx="2">
+            <a:schemeClr val="accent1"/>
+          </a:effectRef>
+          <a:fontRef idx="minor">
+            <a:schemeClr val="lt1"/>
+          </a:fontRef>
+        </p:style>
+        <p:txBody>
+          <a:bodyPr rtlCol="0" anchor="ctr" lIns="0" rIns="0" tIns="0" bIns="0"/>
+          <a:lstStyle/>
+          <a:p>
+            <a:pPr algn="ctr"/>
+            <a:r>
+              <a:rPr sz="1400" b="1">
+                <a:solidFill>
+                  <a:srgbClr val="202122"/>
+                </a:solidFill>
+                <a:latin typeface="Calibri"/>
+              </a:rPr>
+              <a:t>4</a:t>
+            </a:r>
+          </a:p>
+        </p:txBody>
+      </p:sp>
+      <p:sp>
+        <p:nvSpPr>
+          <p:cNvPr id="13" name="TextBox 12"/>
+          <p:cNvSpPr txBox="1"/>
+          <p:nvPr/>
+        </p:nvSpPr>
+        <p:spPr>
+          <a:xfrm>
+            <a:off x="1234440" y="5186933"/>
+            <a:ext cx="10408615" cy="1030986"/>
+          </a:xfrm>
+          <a:prstGeom prst="rect">
+            <a:avLst/>
+          </a:prstGeom>
+          <a:noFill/>
+        </p:spPr>
+        <p:txBody>
+          <a:bodyPr wrap="square" anchor="t" lIns="0" rIns="0" tIns="0" bIns="0"/>
+          <a:lstStyle/>
+          <a:p>
+            <a:pPr algn="l"/>
+            <a:r>
+              <a:rPr sz="2200" b="0" i="0">
+                <a:solidFill>
+                  <a:srgbClr val="202122"/>
+                </a:solidFill>
+                <a:latin typeface="Calibri"/>
+              </a:rPr>
+              <a:t>Give two MDM security features.</a:t>
+            </a:r>
+          </a:p>
+        </p:txBody>
+      </p:sp>
+    </p:spTree>
+  </p:cSld>
+  <p:clrMapOvr>
+    <a:masterClrMapping/>
+  </p:clrMapOvr>
+</p:sld>
+</file>
+
+<file path=ppt/slides/slide13.xml><?xml version="1.0" encoding="utf-8"?>
+<p:sld xmlns:a="http://schemas.openxmlformats.org/drawingml/2006/main" xmlns:p="http://schemas.openxmlformats.org/presentationml/2006/main" xmlns:r="http://schemas.openxmlformats.org/officeDocument/2006/relationships">
+  <p:cSld>
+    <p:bg>
+      <p:bgPr>
+        <a:solidFill>
+          <a:srgbClr val="FFFFFF"/>
+        </a:solidFill>
+        <a:effectLst/>
+      </p:bgPr>
+    </p:bg>
+    <p:spTree>
+      <p:nvGrpSpPr>
+        <p:cNvPr id="1" name=""/>
+        <p:cNvGrpSpPr/>
+        <p:nvPr/>
+      </p:nvGrpSpPr>
+      <p:grpSpPr/>
+      <p:sp>
+        <p:nvSpPr>
+          <p:cNvPr id="2" name="TextBox 1"/>
+          <p:cNvSpPr txBox="1"/>
+          <p:nvPr/>
+        </p:nvSpPr>
+        <p:spPr>
+          <a:xfrm>
+            <a:off x="548640" y="320040"/>
+            <a:ext cx="11094415" cy="274320"/>
+          </a:xfrm>
+          <a:prstGeom prst="rect">
+            <a:avLst/>
+          </a:prstGeom>
+          <a:noFill/>
+        </p:spPr>
+        <p:txBody>
+          <a:bodyPr wrap="square" anchor="t" lIns="0" rIns="0" tIns="0" bIns="0"/>
+          <a:lstStyle/>
+          <a:p>
+            <a:pPr algn="l"/>
+            <a:r>
+              <a:rPr sz="1100" b="1" i="0">
+                <a:solidFill>
+                  <a:srgbClr val="54595D"/>
+                </a:solidFill>
+                <a:latin typeface="Calibri"/>
+              </a:rPr>
+              <a:t>DIGITAL SUPPORT  ·  Digital Support Content Area 2</a:t>
+            </a:r>
+          </a:p>
+        </p:txBody>
+      </p:sp>
+      <p:sp>
+        <p:nvSpPr>
+          <p:cNvPr id="3" name="TextBox 2"/>
+          <p:cNvSpPr txBox="1"/>
+          <p:nvPr/>
+        </p:nvSpPr>
+        <p:spPr>
+          <a:xfrm>
+            <a:off x="548640" y="566928"/>
+            <a:ext cx="11094415" cy="822960"/>
+          </a:xfrm>
+          <a:prstGeom prst="rect">
+            <a:avLst/>
+          </a:prstGeom>
+          <a:noFill/>
+        </p:spPr>
+        <p:txBody>
+          <a:bodyPr wrap="square" anchor="ctr" lIns="0" rIns="0" tIns="0" bIns="0"/>
+          <a:lstStyle/>
+          <a:p>
+            <a:pPr algn="l"/>
+            <a:r>
+              <a:rPr sz="3200" b="1" i="0">
+                <a:solidFill>
+                  <a:srgbClr val="03306E"/>
+                </a:solidFill>
+                <a:latin typeface="Cambria"/>
+              </a:rPr>
+              <a:t>Answers</a:t>
+            </a:r>
+          </a:p>
+        </p:txBody>
+      </p:sp>
+      <p:sp>
+        <p:nvSpPr>
+          <p:cNvPr id="4" name="TextBox 3"/>
+          <p:cNvSpPr txBox="1"/>
+          <p:nvPr/>
+        </p:nvSpPr>
+        <p:spPr>
+          <a:xfrm>
+            <a:off x="548640" y="6446520"/>
+            <a:ext cx="8229600" cy="274320"/>
+          </a:xfrm>
+          <a:prstGeom prst="rect">
+            <a:avLst/>
+          </a:prstGeom>
+          <a:noFill/>
+        </p:spPr>
+        <p:txBody>
+          <a:bodyPr wrap="square" anchor="t" lIns="0" rIns="0" tIns="0" bIns="0"/>
+          <a:lstStyle/>
+          <a:p>
+            <a:pPr algn="l"/>
+            <a:r>
+              <a:rPr sz="1000" b="0" i="0">
+                <a:solidFill>
+                  <a:srgbClr val="54595D"/>
+                </a:solidFill>
+                <a:latin typeface="Calibri"/>
+              </a:rPr>
+              <a:t>Digital Support and Security T Level  ·  Asset, Version and Mobile Device Management</a:t>
+            </a:r>
+          </a:p>
+        </p:txBody>
+      </p:sp>
+      <p:sp>
+        <p:nvSpPr>
+          <p:cNvPr id="5" name="TextBox 4"/>
+          <p:cNvSpPr txBox="1"/>
+          <p:nvPr/>
+        </p:nvSpPr>
+        <p:spPr>
+          <a:xfrm>
+            <a:off x="10728655" y="6446520"/>
+            <a:ext cx="914400" cy="274320"/>
+          </a:xfrm>
+          <a:prstGeom prst="rect">
+            <a:avLst/>
+          </a:prstGeom>
+          <a:noFill/>
+        </p:spPr>
+        <p:txBody>
+          <a:bodyPr wrap="square" anchor="t" lIns="0" rIns="0" tIns="0" bIns="0"/>
+          <a:lstStyle/>
+          <a:p>
+            <a:pPr algn="r"/>
+            <a:r>
+              <a:rPr sz="1000" b="0" i="0">
+                <a:solidFill>
+                  <a:srgbClr val="54595D"/>
+                </a:solidFill>
+                <a:latin typeface="Calibri"/>
+              </a:rPr>
+              <a:t>13</a:t>
+            </a:r>
+          </a:p>
+        </p:txBody>
+      </p:sp>
+      <p:sp>
+        <p:nvSpPr>
+          <p:cNvPr id="6" name="Oval 5"/>
+          <p:cNvSpPr/>
+          <p:nvPr/>
+        </p:nvSpPr>
+        <p:spPr>
+          <a:xfrm>
+            <a:off x="548640" y="1618488"/>
+            <a:ext cx="411480" cy="411480"/>
+          </a:xfrm>
+          <a:prstGeom prst="ellipse">
+            <a:avLst/>
+          </a:prstGeom>
+          <a:solidFill>
+            <a:srgbClr val="4EA1FF"/>
+          </a:solidFill>
+          <a:ln>
+            <a:noFill/>
+          </a:ln>
+          <a:effectLst/>
+        </p:spPr>
+        <p:style>
+          <a:lnRef idx="1">
+            <a:schemeClr val="accent1"/>
+          </a:lnRef>
+          <a:fillRef idx="3">
+            <a:schemeClr val="accent1"/>
+          </a:fillRef>
+          <a:effectRef idx="2">
+            <a:schemeClr val="accent1"/>
+          </a:effectRef>
+          <a:fontRef idx="minor">
+            <a:schemeClr val="lt1"/>
+          </a:fontRef>
+        </p:style>
+        <p:txBody>
+          <a:bodyPr rtlCol="0" anchor="ctr" lIns="0" rIns="0" tIns="0" bIns="0"/>
+          <a:lstStyle/>
+          <a:p>
+            <a:pPr algn="ctr"/>
+            <a:r>
+              <a:rPr sz="1400" b="1">
+                <a:solidFill>
+                  <a:srgbClr val="202122"/>
+                </a:solidFill>
+                <a:latin typeface="Calibri"/>
+              </a:rPr>
+              <a:t>1</a:t>
+            </a:r>
+          </a:p>
+        </p:txBody>
+      </p:sp>
+      <p:sp>
+        <p:nvSpPr>
+          <p:cNvPr id="7" name="TextBox 6"/>
+          <p:cNvSpPr txBox="1"/>
+          <p:nvPr/>
+        </p:nvSpPr>
+        <p:spPr>
+          <a:xfrm>
+            <a:off x="1234440" y="1600200"/>
+            <a:ext cx="10408615" cy="1030986"/>
+          </a:xfrm>
+          <a:prstGeom prst="rect">
+            <a:avLst/>
+          </a:prstGeom>
+          <a:noFill/>
+        </p:spPr>
+        <p:txBody>
+          <a:bodyPr wrap="square" anchor="t" lIns="0" rIns="0" tIns="0" bIns="0"/>
+          <a:lstStyle/>
+          <a:p>
+            <a:pPr algn="l"/>
+            <a:r>
+              <a:rPr sz="1800" b="0" i="0">
+                <a:solidFill>
+                  <a:srgbClr val="54595D"/>
+                </a:solidFill>
+                <a:latin typeface="Calibri"/>
+              </a:rPr>
+              <a:t>What is a rollback procedure?</a:t>
+            </a:r>
+          </a:p>
+          <a:p>
+            <a:r>
+              <a:rPr sz="1800" b="1">
+                <a:solidFill>
+                  <a:srgbClr val="03306E"/>
+                </a:solidFill>
+                <a:latin typeface="Calibri"/>
+              </a:rPr>
+              <a:t>A way to return to the previous version if an update fails.</a:t>
+            </a:r>
+          </a:p>
+        </p:txBody>
+      </p:sp>
+      <p:sp>
+        <p:nvSpPr>
+          <p:cNvPr id="8" name="Oval 7"/>
+          <p:cNvSpPr/>
+          <p:nvPr/>
+        </p:nvSpPr>
+        <p:spPr>
+          <a:xfrm>
+            <a:off x="548640" y="2814066"/>
+            <a:ext cx="411480" cy="411480"/>
+          </a:xfrm>
+          <a:prstGeom prst="ellipse">
+            <a:avLst/>
+          </a:prstGeom>
+          <a:solidFill>
+            <a:srgbClr val="4EA1FF"/>
+          </a:solidFill>
+          <a:ln>
+            <a:noFill/>
+          </a:ln>
+          <a:effectLst/>
+        </p:spPr>
+        <p:style>
+          <a:lnRef idx="1">
+            <a:schemeClr val="accent1"/>
+          </a:lnRef>
+          <a:fillRef idx="3">
+            <a:schemeClr val="accent1"/>
+          </a:fillRef>
+          <a:effectRef idx="2">
+            <a:schemeClr val="accent1"/>
+          </a:effectRef>
+          <a:fontRef idx="minor">
+            <a:schemeClr val="lt1"/>
+          </a:fontRef>
+        </p:style>
+        <p:txBody>
+          <a:bodyPr rtlCol="0" anchor="ctr" lIns="0" rIns="0" tIns="0" bIns="0"/>
+          <a:lstStyle/>
+          <a:p>
+            <a:pPr algn="ctr"/>
+            <a:r>
+              <a:rPr sz="1400" b="1">
+                <a:solidFill>
+                  <a:srgbClr val="202122"/>
+                </a:solidFill>
+                <a:latin typeface="Calibri"/>
+              </a:rPr>
+              <a:t>2</a:t>
+            </a:r>
+          </a:p>
+        </p:txBody>
+      </p:sp>
+      <p:sp>
+        <p:nvSpPr>
+          <p:cNvPr id="9" name="TextBox 8"/>
+          <p:cNvSpPr txBox="1"/>
+          <p:nvPr/>
+        </p:nvSpPr>
+        <p:spPr>
+          <a:xfrm>
+            <a:off x="1234440" y="2795778"/>
+            <a:ext cx="10408615" cy="1030986"/>
+          </a:xfrm>
+          <a:prstGeom prst="rect">
+            <a:avLst/>
+          </a:prstGeom>
+          <a:noFill/>
+        </p:spPr>
+        <p:txBody>
+          <a:bodyPr wrap="square" anchor="t" lIns="0" rIns="0" tIns="0" bIns="0"/>
+          <a:lstStyle/>
+          <a:p>
+            <a:pPr algn="l"/>
+            <a:r>
+              <a:rPr sz="1800" b="0" i="0">
+                <a:solidFill>
+                  <a:srgbClr val="54595D"/>
+                </a:solidFill>
+                <a:latin typeface="Calibri"/>
+              </a:rPr>
+              <a:t>What happens at the decommissioning stage of asset management?</a:t>
+            </a:r>
+          </a:p>
+          <a:p>
+            <a:r>
+              <a:rPr sz="1800" b="1">
+                <a:solidFill>
+                  <a:srgbClr val="03306E"/>
+                </a:solidFill>
+                <a:latin typeface="Calibri"/>
+              </a:rPr>
+              <a:t>Old assets are removed or retired and leaver profiles managed.</a:t>
+            </a:r>
+          </a:p>
+        </p:txBody>
+      </p:sp>
+      <p:sp>
+        <p:nvSpPr>
+          <p:cNvPr id="10" name="Oval 9"/>
+          <p:cNvSpPr/>
+          <p:nvPr/>
+        </p:nvSpPr>
+        <p:spPr>
+          <a:xfrm>
+            <a:off x="548640" y="4009644"/>
+            <a:ext cx="411480" cy="411480"/>
+          </a:xfrm>
+          <a:prstGeom prst="ellipse">
+            <a:avLst/>
+          </a:prstGeom>
+          <a:solidFill>
+            <a:srgbClr val="4EA1FF"/>
+          </a:solidFill>
+          <a:ln>
+            <a:noFill/>
+          </a:ln>
+          <a:effectLst/>
+        </p:spPr>
+        <p:style>
+          <a:lnRef idx="1">
+            <a:schemeClr val="accent1"/>
+          </a:lnRef>
+          <a:fillRef idx="3">
+            <a:schemeClr val="accent1"/>
+          </a:fillRef>
+          <a:effectRef idx="2">
+            <a:schemeClr val="accent1"/>
+          </a:effectRef>
+          <a:fontRef idx="minor">
+            <a:schemeClr val="lt1"/>
+          </a:fontRef>
+        </p:style>
+        <p:txBody>
+          <a:bodyPr rtlCol="0" anchor="ctr" lIns="0" rIns="0" tIns="0" bIns="0"/>
+          <a:lstStyle/>
+          <a:p>
+            <a:pPr algn="ctr"/>
+            <a:r>
+              <a:rPr sz="1400" b="1">
+                <a:solidFill>
+                  <a:srgbClr val="202122"/>
+                </a:solidFill>
+                <a:latin typeface="Calibri"/>
+              </a:rPr>
+              <a:t>3</a:t>
+            </a:r>
+          </a:p>
+        </p:txBody>
+      </p:sp>
+      <p:sp>
+        <p:nvSpPr>
+          <p:cNvPr id="11" name="TextBox 10"/>
+          <p:cNvSpPr txBox="1"/>
+          <p:nvPr/>
+        </p:nvSpPr>
+        <p:spPr>
+          <a:xfrm>
+            <a:off x="1234440" y="3991356"/>
+            <a:ext cx="10408615" cy="1030986"/>
+          </a:xfrm>
+          <a:prstGeom prst="rect">
+            <a:avLst/>
+          </a:prstGeom>
+          <a:noFill/>
+        </p:spPr>
+        <p:txBody>
+          <a:bodyPr wrap="square" anchor="t" lIns="0" rIns="0" tIns="0" bIns="0"/>
+          <a:lstStyle/>
+          <a:p>
+            <a:pPr algn="l"/>
+            <a:r>
+              <a:rPr sz="1800" b="0" i="0">
+                <a:solidFill>
+                  <a:srgbClr val="54595D"/>
+                </a:solidFill>
+                <a:latin typeface="Calibri"/>
+              </a:rPr>
+              <a:t>What does a remote wipe do?</a:t>
+            </a:r>
+          </a:p>
+          <a:p>
+            <a:r>
+              <a:rPr sz="1800" b="1">
+                <a:solidFill>
+                  <a:srgbClr val="03306E"/>
+                </a:solidFill>
+                <a:latin typeface="Calibri"/>
+              </a:rPr>
+              <a:t>Erases a lost or stolen device remotely.</a:t>
+            </a:r>
+          </a:p>
+        </p:txBody>
+      </p:sp>
+      <p:sp>
+        <p:nvSpPr>
+          <p:cNvPr id="12" name="Oval 11"/>
+          <p:cNvSpPr/>
+          <p:nvPr/>
+        </p:nvSpPr>
+        <p:spPr>
+          <a:xfrm>
+            <a:off x="548640" y="5205221"/>
+            <a:ext cx="411480" cy="411480"/>
+          </a:xfrm>
+          <a:prstGeom prst="ellipse">
+            <a:avLst/>
+          </a:prstGeom>
+          <a:solidFill>
+            <a:srgbClr val="4EA1FF"/>
+          </a:solidFill>
+          <a:ln>
+            <a:noFill/>
+          </a:ln>
+          <a:effectLst/>
+        </p:spPr>
+        <p:style>
+          <a:lnRef idx="1">
+            <a:schemeClr val="accent1"/>
+          </a:lnRef>
+          <a:fillRef idx="3">
+            <a:schemeClr val="accent1"/>
+          </a:fillRef>
+          <a:effectRef idx="2">
+            <a:schemeClr val="accent1"/>
+          </a:effectRef>
+          <a:fontRef idx="minor">
+            <a:schemeClr val="lt1"/>
+          </a:fontRef>
+        </p:style>
+        <p:txBody>
+          <a:bodyPr rtlCol="0" anchor="ctr" lIns="0" rIns="0" tIns="0" bIns="0"/>
+          <a:lstStyle/>
+          <a:p>
+            <a:pPr algn="ctr"/>
+            <a:r>
+              <a:rPr sz="1400" b="1">
+                <a:solidFill>
+                  <a:srgbClr val="202122"/>
+                </a:solidFill>
+                <a:latin typeface="Calibri"/>
+              </a:rPr>
+              <a:t>4</a:t>
+            </a:r>
+          </a:p>
+        </p:txBody>
+      </p:sp>
+      <p:sp>
+        <p:nvSpPr>
+          <p:cNvPr id="13" name="TextBox 12"/>
+          <p:cNvSpPr txBox="1"/>
+          <p:nvPr/>
+        </p:nvSpPr>
+        <p:spPr>
+          <a:xfrm>
+            <a:off x="1234440" y="5186933"/>
+            <a:ext cx="10408615" cy="1030986"/>
+          </a:xfrm>
+          <a:prstGeom prst="rect">
+            <a:avLst/>
+          </a:prstGeom>
+          <a:noFill/>
+        </p:spPr>
+        <p:txBody>
+          <a:bodyPr wrap="square" anchor="t" lIns="0" rIns="0" tIns="0" bIns="0"/>
+          <a:lstStyle/>
+          <a:p>
+            <a:pPr algn="l"/>
+            <a:r>
+              <a:rPr sz="1800" b="0" i="0">
+                <a:solidFill>
+                  <a:srgbClr val="54595D"/>
+                </a:solidFill>
+                <a:latin typeface="Calibri"/>
+              </a:rPr>
+              <a:t>Give two MDM security features.</a:t>
+            </a:r>
+          </a:p>
+          <a:p>
+            <a:r>
+              <a:rPr sz="1800" b="1">
+                <a:solidFill>
+                  <a:srgbClr val="03306E"/>
+                </a:solidFill>
+                <a:latin typeface="Calibri"/>
+              </a:rPr>
+              <a:t>Any two of: screen lock, encryption, password enforcement, login limits, MFA, authenticator apps.</a:t>
+            </a:r>
+          </a:p>
+        </p:txBody>
+      </p:sp>
+    </p:spTree>
+  </p:cSld>
+  <p:clrMapOvr>
+    <a:masterClrMapping/>
+  </p:clrMapOvr>
+</p:sld>
+</file>
+
+<file path=ppt/slides/slide14.xml><?xml version="1.0" encoding="utf-8"?>
+<p:sld xmlns:a="http://schemas.openxmlformats.org/drawingml/2006/main" xmlns:p="http://schemas.openxmlformats.org/presentationml/2006/main" xmlns:r="http://schemas.openxmlformats.org/officeDocument/2006/relationships">
+  <p:cSld>
+    <p:bg>
+      <p:bgPr>
+        <a:solidFill>
+          <a:srgbClr val="FFFFFF"/>
+        </a:solidFill>
+        <a:effectLst/>
+      </p:bgPr>
+    </p:bg>
+    <p:spTree>
+      <p:nvGrpSpPr>
+        <p:cNvPr id="1" name=""/>
+        <p:cNvGrpSpPr/>
+        <p:nvPr/>
+      </p:nvGrpSpPr>
+      <p:grpSpPr/>
+      <p:sp>
+        <p:nvSpPr>
+          <p:cNvPr id="2" name="TextBox 1"/>
+          <p:cNvSpPr txBox="1"/>
+          <p:nvPr/>
+        </p:nvSpPr>
+        <p:spPr>
+          <a:xfrm>
+            <a:off x="548640" y="320040"/>
+            <a:ext cx="11094415" cy="274320"/>
+          </a:xfrm>
+          <a:prstGeom prst="rect">
+            <a:avLst/>
+          </a:prstGeom>
+          <a:noFill/>
+        </p:spPr>
+        <p:txBody>
+          <a:bodyPr wrap="square" anchor="t" lIns="0" rIns="0" tIns="0" bIns="0"/>
+          <a:lstStyle/>
+          <a:p>
+            <a:pPr algn="l"/>
+            <a:r>
+              <a:rPr sz="1100" b="1" i="0">
+                <a:solidFill>
+                  <a:srgbClr val="54595D"/>
+                </a:solidFill>
+                <a:latin typeface="Calibri"/>
+              </a:rPr>
+              <a:t>DIGITAL SUPPORT  ·  Digital Support Content Area 2</a:t>
+            </a:r>
+          </a:p>
+        </p:txBody>
+      </p:sp>
+      <p:sp>
+        <p:nvSpPr>
+          <p:cNvPr id="3" name="TextBox 2"/>
+          <p:cNvSpPr txBox="1"/>
+          <p:nvPr/>
+        </p:nvSpPr>
+        <p:spPr>
+          <a:xfrm>
+            <a:off x="548640" y="566928"/>
+            <a:ext cx="11094415" cy="822960"/>
+          </a:xfrm>
+          <a:prstGeom prst="rect">
+            <a:avLst/>
+          </a:prstGeom>
+          <a:noFill/>
+        </p:spPr>
+        <p:txBody>
+          <a:bodyPr wrap="square" anchor="ctr" lIns="0" rIns="0" tIns="0" bIns="0"/>
+          <a:lstStyle/>
+          <a:p>
+            <a:pPr algn="l"/>
+            <a:r>
+              <a:rPr sz="3200" b="1" i="0">
+                <a:solidFill>
+                  <a:srgbClr val="03306E"/>
+                </a:solidFill>
+                <a:latin typeface="Cambria"/>
+              </a:rPr>
+              <a:t>Activity: Write an MDM policy</a:t>
+            </a:r>
+          </a:p>
+        </p:txBody>
+      </p:sp>
+      <p:sp>
+        <p:nvSpPr>
+          <p:cNvPr id="4" name="TextBox 3"/>
+          <p:cNvSpPr txBox="1"/>
+          <p:nvPr/>
+        </p:nvSpPr>
+        <p:spPr>
+          <a:xfrm>
+            <a:off x="548640" y="6446520"/>
+            <a:ext cx="8229600" cy="274320"/>
+          </a:xfrm>
+          <a:prstGeom prst="rect">
+            <a:avLst/>
+          </a:prstGeom>
+          <a:noFill/>
+        </p:spPr>
+        <p:txBody>
+          <a:bodyPr wrap="square" anchor="t" lIns="0" rIns="0" tIns="0" bIns="0"/>
+          <a:lstStyle/>
+          <a:p>
+            <a:pPr algn="l"/>
+            <a:r>
+              <a:rPr sz="1000" b="0" i="0">
+                <a:solidFill>
+                  <a:srgbClr val="54595D"/>
+                </a:solidFill>
+                <a:latin typeface="Calibri"/>
+              </a:rPr>
+              <a:t>Digital Support and Security T Level  ·  Asset, Version and Mobile Device Management</a:t>
+            </a:r>
+          </a:p>
+        </p:txBody>
+      </p:sp>
+      <p:sp>
+        <p:nvSpPr>
+          <p:cNvPr id="5" name="TextBox 4"/>
+          <p:cNvSpPr txBox="1"/>
+          <p:nvPr/>
+        </p:nvSpPr>
+        <p:spPr>
+          <a:xfrm>
+            <a:off x="10728655" y="6446520"/>
+            <a:ext cx="914400" cy="274320"/>
+          </a:xfrm>
+          <a:prstGeom prst="rect">
+            <a:avLst/>
+          </a:prstGeom>
+          <a:noFill/>
+        </p:spPr>
+        <p:txBody>
+          <a:bodyPr wrap="square" anchor="t" lIns="0" rIns="0" tIns="0" bIns="0"/>
+          <a:lstStyle/>
+          <a:p>
+            <a:pPr algn="r"/>
+            <a:r>
+              <a:rPr sz="1000" b="0" i="0">
+                <a:solidFill>
+                  <a:srgbClr val="54595D"/>
+                </a:solidFill>
+                <a:latin typeface="Calibri"/>
+              </a:rPr>
+              <a:t>14</a:t>
+            </a:r>
+          </a:p>
+        </p:txBody>
+      </p:sp>
+      <p:sp>
+        <p:nvSpPr>
+          <p:cNvPr id="6" name="Rounded Rectangle 5"/>
+          <p:cNvSpPr/>
+          <p:nvPr/>
+        </p:nvSpPr>
+        <p:spPr>
+          <a:xfrm>
+            <a:off x="548640" y="1508760"/>
+            <a:ext cx="2011680" cy="457200"/>
+          </a:xfrm>
+          <a:prstGeom prst="roundRect">
+            <a:avLst>
+              <a:gd name="adj" fmla="val 50000"/>
+            </a:avLst>
+          </a:prstGeom>
+          <a:solidFill>
+            <a:srgbClr val="4EA1FF"/>
+          </a:solidFill>
+          <a:ln>
+            <a:noFill/>
+          </a:ln>
+          <a:effectLst/>
+        </p:spPr>
+        <p:style>
+          <a:lnRef idx="1">
+            <a:schemeClr val="accent1"/>
+          </a:lnRef>
+          <a:fillRef idx="3">
+            <a:schemeClr val="accent1"/>
+          </a:fillRef>
+          <a:effectRef idx="2">
+            <a:schemeClr val="accent1"/>
+          </a:effectRef>
+          <a:fontRef idx="minor">
+            <a:schemeClr val="lt1"/>
+          </a:fontRef>
+        </p:style>
+        <p:txBody>
+          <a:bodyPr rtlCol="0" anchor="ctr"/>
+          <a:lstStyle/>
+          <a:p/>
+        </p:txBody>
+      </p:sp>
+      <p:sp>
+        <p:nvSpPr>
+          <p:cNvPr id="7" name="TextBox 6"/>
+          <p:cNvSpPr txBox="1"/>
+          <p:nvPr/>
+        </p:nvSpPr>
+        <p:spPr>
+          <a:xfrm>
+            <a:off x="548640" y="1508760"/>
+            <a:ext cx="2011680" cy="457200"/>
+          </a:xfrm>
+          <a:prstGeom prst="rect">
+            <a:avLst/>
+          </a:prstGeom>
+          <a:noFill/>
+        </p:spPr>
+        <p:txBody>
+          <a:bodyPr wrap="square" anchor="ctr" lIns="0" rIns="0" tIns="0" bIns="0"/>
+          <a:lstStyle/>
+          <a:p>
+            <a:pPr algn="ctr"/>
+            <a:r>
+              <a:rPr sz="1400" b="1" i="0">
+                <a:solidFill>
+                  <a:srgbClr val="202122"/>
+                </a:solidFill>
+                <a:latin typeface="Calibri"/>
+              </a:rPr>
+              <a:t>25 minutes</a:t>
+            </a:r>
+          </a:p>
+        </p:txBody>
+      </p:sp>
+      <p:sp>
+        <p:nvSpPr>
+          <p:cNvPr id="8" name="TextBox 7"/>
+          <p:cNvSpPr txBox="1"/>
+          <p:nvPr/>
+        </p:nvSpPr>
+        <p:spPr>
+          <a:xfrm>
+            <a:off x="2743200" y="1508760"/>
+            <a:ext cx="4754880" cy="457200"/>
+          </a:xfrm>
+          <a:prstGeom prst="rect">
+            <a:avLst/>
+          </a:prstGeom>
+          <a:noFill/>
+        </p:spPr>
+        <p:txBody>
+          <a:bodyPr wrap="square" anchor="ctr" lIns="0" rIns="0" tIns="0" bIns="0"/>
+          <a:lstStyle/>
+          <a:p>
+            <a:pPr algn="l"/>
+            <a:r>
+              <a:rPr sz="1400" b="0" i="1">
+                <a:solidFill>
+                  <a:srgbClr val="54595D"/>
+                </a:solidFill>
+                <a:latin typeface="Calibri"/>
+              </a:rPr>
+              <a:t>Pairs</a:t>
+            </a:r>
+          </a:p>
+        </p:txBody>
+      </p:sp>
+      <p:sp>
+        <p:nvSpPr>
+          <p:cNvPr id="9" name="Oval 8"/>
+          <p:cNvSpPr/>
+          <p:nvPr/>
+        </p:nvSpPr>
+        <p:spPr>
+          <a:xfrm>
+            <a:off x="548640" y="2482596"/>
+            <a:ext cx="384048" cy="384048"/>
+          </a:xfrm>
+          <a:prstGeom prst="ellipse">
+            <a:avLst/>
+          </a:prstGeom>
+          <a:solidFill>
+            <a:srgbClr val="0645AD"/>
+          </a:solidFill>
+          <a:ln>
+            <a:noFill/>
+          </a:ln>
+          <a:effectLst/>
+        </p:spPr>
+        <p:style>
+          <a:lnRef idx="1">
+            <a:schemeClr val="accent1"/>
+          </a:lnRef>
+          <a:fillRef idx="3">
+            <a:schemeClr val="accent1"/>
+          </a:fillRef>
+          <a:effectRef idx="2">
+            <a:schemeClr val="accent1"/>
+          </a:effectRef>
+          <a:fontRef idx="minor">
+            <a:schemeClr val="lt1"/>
+          </a:fontRef>
+        </p:style>
+        <p:txBody>
+          <a:bodyPr rtlCol="0" anchor="ctr" lIns="0" rIns="0" tIns="0" bIns="0"/>
+          <a:lstStyle/>
+          <a:p>
+            <a:pPr algn="ctr"/>
+            <a:r>
+              <a:rPr sz="1300" b="1">
+                <a:solidFill>
+                  <a:srgbClr val="FFFFFF"/>
+                </a:solidFill>
+                <a:latin typeface="Calibri"/>
+              </a:rPr>
+              <a:t>1</a:t>
+            </a:r>
+          </a:p>
+        </p:txBody>
+      </p:sp>
+      <p:sp>
+        <p:nvSpPr>
+          <p:cNvPr id="10" name="TextBox 9"/>
+          <p:cNvSpPr txBox="1"/>
+          <p:nvPr/>
+        </p:nvSpPr>
+        <p:spPr>
+          <a:xfrm>
+            <a:off x="1143000" y="2240280"/>
+            <a:ext cx="5943600" cy="868680"/>
+          </a:xfrm>
+          <a:prstGeom prst="rect">
+            <a:avLst/>
+          </a:prstGeom>
+          <a:noFill/>
+        </p:spPr>
+        <p:txBody>
+          <a:bodyPr wrap="square" anchor="ctr" lIns="0" rIns="0" tIns="0" bIns="0"/>
+          <a:lstStyle/>
+          <a:p>
+            <a:pPr algn="l"/>
+            <a:r>
+              <a:rPr sz="1700" b="0" i="0">
+                <a:solidFill>
+                  <a:srgbClr val="202122"/>
+                </a:solidFill>
+                <a:latin typeface="Calibri"/>
+              </a:rPr>
+              <a:t>A charity is giving 25 staff smartphones for fieldwork.</a:t>
+            </a:r>
+          </a:p>
+        </p:txBody>
+      </p:sp>
+      <p:sp>
+        <p:nvSpPr>
+          <p:cNvPr id="11" name="Oval 10"/>
+          <p:cNvSpPr/>
+          <p:nvPr/>
+        </p:nvSpPr>
+        <p:spPr>
+          <a:xfrm>
+            <a:off x="548640" y="3461004"/>
+            <a:ext cx="384048" cy="384048"/>
+          </a:xfrm>
+          <a:prstGeom prst="ellipse">
+            <a:avLst/>
+          </a:prstGeom>
+          <a:solidFill>
+            <a:srgbClr val="0645AD"/>
+          </a:solidFill>
+          <a:ln>
+            <a:noFill/>
+          </a:ln>
+          <a:effectLst/>
+        </p:spPr>
+        <p:style>
+          <a:lnRef idx="1">
+            <a:schemeClr val="accent1"/>
+          </a:lnRef>
+          <a:fillRef idx="3">
+            <a:schemeClr val="accent1"/>
+          </a:fillRef>
+          <a:effectRef idx="2">
+            <a:schemeClr val="accent1"/>
+          </a:effectRef>
+          <a:fontRef idx="minor">
+            <a:schemeClr val="lt1"/>
+          </a:fontRef>
+        </p:style>
+        <p:txBody>
+          <a:bodyPr rtlCol="0" anchor="ctr" lIns="0" rIns="0" tIns="0" bIns="0"/>
+          <a:lstStyle/>
+          <a:p>
+            <a:pPr algn="ctr"/>
+            <a:r>
+              <a:rPr sz="1300" b="1">
+                <a:solidFill>
+                  <a:srgbClr val="FFFFFF"/>
+                </a:solidFill>
+                <a:latin typeface="Calibri"/>
+              </a:rPr>
+              <a:t>2</a:t>
+            </a:r>
+          </a:p>
+        </p:txBody>
+      </p:sp>
+      <p:sp>
+        <p:nvSpPr>
+          <p:cNvPr id="12" name="TextBox 11"/>
+          <p:cNvSpPr txBox="1"/>
+          <p:nvPr/>
+        </p:nvSpPr>
+        <p:spPr>
+          <a:xfrm>
+            <a:off x="1143000" y="3218688"/>
+            <a:ext cx="5943600" cy="868680"/>
+          </a:xfrm>
+          <a:prstGeom prst="rect">
+            <a:avLst/>
+          </a:prstGeom>
+          <a:noFill/>
+        </p:spPr>
+        <p:txBody>
+          <a:bodyPr wrap="square" anchor="ctr" lIns="0" rIns="0" tIns="0" bIns="0"/>
+          <a:lstStyle/>
+          <a:p>
+            <a:pPr algn="l"/>
+            <a:r>
+              <a:rPr sz="1700" b="0" i="0">
+                <a:solidFill>
+                  <a:srgbClr val="202122"/>
+                </a:solidFill>
+                <a:latin typeface="Calibri"/>
+              </a:rPr>
+              <a:t>Choose the MDM settings you would enforce and explain each.</a:t>
+            </a:r>
+          </a:p>
+        </p:txBody>
+      </p:sp>
+      <p:sp>
+        <p:nvSpPr>
+          <p:cNvPr id="13" name="Oval 12"/>
+          <p:cNvSpPr/>
+          <p:nvPr/>
+        </p:nvSpPr>
+        <p:spPr>
+          <a:xfrm>
+            <a:off x="548640" y="4439412"/>
+            <a:ext cx="384048" cy="384048"/>
+          </a:xfrm>
+          <a:prstGeom prst="ellipse">
+            <a:avLst/>
+          </a:prstGeom>
+          <a:solidFill>
+            <a:srgbClr val="0645AD"/>
+          </a:solidFill>
+          <a:ln>
+            <a:noFill/>
+          </a:ln>
+          <a:effectLst/>
+        </p:spPr>
+        <p:style>
+          <a:lnRef idx="1">
+            <a:schemeClr val="accent1"/>
+          </a:lnRef>
+          <a:fillRef idx="3">
+            <a:schemeClr val="accent1"/>
+          </a:fillRef>
+          <a:effectRef idx="2">
+            <a:schemeClr val="accent1"/>
+          </a:effectRef>
+          <a:fontRef idx="minor">
+            <a:schemeClr val="lt1"/>
+          </a:fontRef>
+        </p:style>
+        <p:txBody>
+          <a:bodyPr rtlCol="0" anchor="ctr" lIns="0" rIns="0" tIns="0" bIns="0"/>
+          <a:lstStyle/>
+          <a:p>
+            <a:pPr algn="ctr"/>
+            <a:r>
+              <a:rPr sz="1300" b="1">
+                <a:solidFill>
+                  <a:srgbClr val="FFFFFF"/>
+                </a:solidFill>
+                <a:latin typeface="Calibri"/>
+              </a:rPr>
+              <a:t>3</a:t>
+            </a:r>
+          </a:p>
+        </p:txBody>
+      </p:sp>
+      <p:sp>
+        <p:nvSpPr>
+          <p:cNvPr id="14" name="TextBox 13"/>
+          <p:cNvSpPr txBox="1"/>
+          <p:nvPr/>
+        </p:nvSpPr>
+        <p:spPr>
+          <a:xfrm>
+            <a:off x="1143000" y="4197096"/>
+            <a:ext cx="5943600" cy="868680"/>
+          </a:xfrm>
+          <a:prstGeom prst="rect">
+            <a:avLst/>
+          </a:prstGeom>
+          <a:noFill/>
+        </p:spPr>
+        <p:txBody>
+          <a:bodyPr wrap="square" anchor="ctr" lIns="0" rIns="0" tIns="0" bIns="0"/>
+          <a:lstStyle/>
+          <a:p>
+            <a:pPr algn="l"/>
+            <a:r>
+              <a:rPr sz="1700" b="0" i="0">
+                <a:solidFill>
+                  <a:srgbClr val="202122"/>
+                </a:solidFill>
+                <a:latin typeface="Calibri"/>
+              </a:rPr>
+              <a:t>Decide which features to disable and why.</a:t>
+            </a:r>
+          </a:p>
+        </p:txBody>
+      </p:sp>
+      <p:sp>
+        <p:nvSpPr>
+          <p:cNvPr id="15" name="Oval 14"/>
+          <p:cNvSpPr/>
+          <p:nvPr/>
+        </p:nvSpPr>
+        <p:spPr>
+          <a:xfrm>
+            <a:off x="548640" y="5417820"/>
+            <a:ext cx="384048" cy="384048"/>
+          </a:xfrm>
+          <a:prstGeom prst="ellipse">
+            <a:avLst/>
+          </a:prstGeom>
+          <a:solidFill>
+            <a:srgbClr val="0645AD"/>
+          </a:solidFill>
+          <a:ln>
+            <a:noFill/>
+          </a:ln>
+          <a:effectLst/>
+        </p:spPr>
+        <p:style>
+          <a:lnRef idx="1">
+            <a:schemeClr val="accent1"/>
+          </a:lnRef>
+          <a:fillRef idx="3">
+            <a:schemeClr val="accent1"/>
+          </a:fillRef>
+          <a:effectRef idx="2">
+            <a:schemeClr val="accent1"/>
+          </a:effectRef>
+          <a:fontRef idx="minor">
+            <a:schemeClr val="lt1"/>
+          </a:fontRef>
+        </p:style>
+        <p:txBody>
+          <a:bodyPr rtlCol="0" anchor="ctr" lIns="0" rIns="0" tIns="0" bIns="0"/>
+          <a:lstStyle/>
+          <a:p>
+            <a:pPr algn="ctr"/>
+            <a:r>
+              <a:rPr sz="1300" b="1">
+                <a:solidFill>
+                  <a:srgbClr val="FFFFFF"/>
+                </a:solidFill>
+                <a:latin typeface="Calibri"/>
+              </a:rPr>
+              <a:t>4</a:t>
+            </a:r>
+          </a:p>
+        </p:txBody>
+      </p:sp>
+      <p:sp>
+        <p:nvSpPr>
+          <p:cNvPr id="16" name="TextBox 15"/>
+          <p:cNvSpPr txBox="1"/>
+          <p:nvPr/>
+        </p:nvSpPr>
+        <p:spPr>
+          <a:xfrm>
+            <a:off x="1143000" y="5175504"/>
+            <a:ext cx="5943600" cy="868680"/>
+          </a:xfrm>
+          <a:prstGeom prst="rect">
+            <a:avLst/>
+          </a:prstGeom>
+          <a:noFill/>
+        </p:spPr>
+        <p:txBody>
+          <a:bodyPr wrap="square" anchor="ctr" lIns="0" rIns="0" tIns="0" bIns="0"/>
+          <a:lstStyle/>
+          <a:p>
+            <a:pPr algn="l"/>
+            <a:r>
+              <a:rPr sz="1700" b="0" i="0">
+                <a:solidFill>
+                  <a:srgbClr val="202122"/>
+                </a:solidFill>
+                <a:latin typeface="Calibri"/>
+              </a:rPr>
+              <a:t>Write the steps to follow when a phone is reported lost.</a:t>
+            </a:r>
+          </a:p>
+        </p:txBody>
+      </p:sp>
+      <p:sp>
+        <p:nvSpPr>
+          <p:cNvPr id="17" name="Rounded Rectangle 16"/>
+          <p:cNvSpPr/>
+          <p:nvPr/>
+        </p:nvSpPr>
+        <p:spPr>
+          <a:xfrm>
+            <a:off x="7772400" y="1508760"/>
+            <a:ext cx="3867912" cy="4572000"/>
+          </a:xfrm>
+          <a:prstGeom prst="roundRect">
+            <a:avLst>
+              <a:gd name="adj" fmla="val 8000"/>
+            </a:avLst>
+          </a:prstGeom>
+          <a:solidFill>
+            <a:srgbClr val="EAF3FF"/>
+          </a:solidFill>
+          <a:ln>
+            <a:noFill/>
+          </a:ln>
+          <a:effectLst/>
+        </p:spPr>
+        <p:style>
+          <a:lnRef idx="1">
+            <a:schemeClr val="accent1"/>
+          </a:lnRef>
+          <a:fillRef idx="3">
+            <a:schemeClr val="accent1"/>
+          </a:fillRef>
+          <a:effectRef idx="2">
+            <a:schemeClr val="accent1"/>
+          </a:effectRef>
+          <a:fontRef idx="minor">
+            <a:schemeClr val="lt1"/>
+          </a:fontRef>
+        </p:style>
+        <p:txBody>
+          <a:bodyPr rtlCol="0" anchor="ctr"/>
+          <a:lstStyle/>
+          <a:p/>
+        </p:txBody>
+      </p:sp>
+      <p:sp>
+        <p:nvSpPr>
+          <p:cNvPr id="18" name="TextBox 17"/>
+          <p:cNvSpPr txBox="1"/>
+          <p:nvPr/>
+        </p:nvSpPr>
+        <p:spPr>
+          <a:xfrm>
+            <a:off x="8046720" y="1737360"/>
+            <a:ext cx="3291840" cy="365760"/>
+          </a:xfrm>
+          <a:prstGeom prst="rect">
+            <a:avLst/>
+          </a:prstGeom>
+          <a:noFill/>
+        </p:spPr>
+        <p:txBody>
+          <a:bodyPr wrap="square" anchor="t" lIns="0" rIns="0" tIns="0" bIns="0"/>
+          <a:lstStyle/>
+          <a:p>
+            <a:pPr algn="l"/>
+            <a:r>
+              <a:rPr sz="1300" b="1" i="0">
+                <a:solidFill>
+                  <a:srgbClr val="0645AD"/>
+                </a:solidFill>
+                <a:latin typeface="Calibri"/>
+              </a:rPr>
+              <a:t>SUCCESS CRITERIA</a:t>
+            </a:r>
+          </a:p>
+        </p:txBody>
+      </p:sp>
+      <p:sp>
+        <p:nvSpPr>
+          <p:cNvPr id="19" name="TextBox 18"/>
+          <p:cNvSpPr txBox="1"/>
+          <p:nvPr/>
+        </p:nvSpPr>
+        <p:spPr>
+          <a:xfrm>
+            <a:off x="8046720" y="2240280"/>
+            <a:ext cx="3337560" cy="3657600"/>
+          </a:xfrm>
+          <a:prstGeom prst="rect">
+            <a:avLst/>
+          </a:prstGeom>
+          <a:noFill/>
+        </p:spPr>
+        <p:txBody>
+          <a:bodyPr wrap="square" lIns="0" rIns="0" tIns="0" bIns="0">
+            <a:spAutoFit/>
+          </a:bodyPr>
+          <a:lstStyle/>
+          <a:p>
+            <a:pPr marL="274320" indent="-274320">
+              <a:spcAft>
+                <a:spcPts val="810"/>
+              </a:spcAft>
+              <a:buClr>
+                <a:srgbClr val="0645AD"/>
+              </a:buClr>
+              <a:buFont typeface="Arial"/>
+              <a:buChar char="•"/>
+            </a:pPr>
+            <a:r>
+              <a:rPr sz="1800" b="0">
+                <a:solidFill>
+                  <a:srgbClr val="202122"/>
+                </a:solidFill>
+                <a:latin typeface="Calibri"/>
+              </a:rPr>
+              <a:t>Security and usability balanced</a:t>
+            </a:r>
+          </a:p>
+          <a:p>
+            <a:pPr marL="274320" indent="-274320">
+              <a:spcAft>
+                <a:spcPts val="810"/>
+              </a:spcAft>
+              <a:buClr>
+                <a:srgbClr val="0645AD"/>
+              </a:buClr>
+              <a:buFont typeface="Arial"/>
+              <a:buChar char="•"/>
+            </a:pPr>
+            <a:r>
+              <a:rPr sz="1800" b="0">
+                <a:solidFill>
+                  <a:srgbClr val="202122"/>
+                </a:solidFill>
+                <a:latin typeface="Calibri"/>
+              </a:rPr>
+              <a:t>Lost-device steps include remote wipe</a:t>
+            </a:r>
+          </a:p>
+          <a:p>
+            <a:pPr marL="274320" indent="-274320">
+              <a:spcAft>
+                <a:spcPts val="810"/>
+              </a:spcAft>
+              <a:buClr>
+                <a:srgbClr val="0645AD"/>
+              </a:buClr>
+              <a:buFont typeface="Arial"/>
+              <a:buChar char="•"/>
+            </a:pPr>
+            <a:r>
+              <a:rPr sz="1800" b="0">
+                <a:solidFill>
+                  <a:srgbClr val="202122"/>
+                </a:solidFill>
+                <a:latin typeface="Calibri"/>
+              </a:rPr>
+              <a:t>Personal data considered</a:t>
+            </a:r>
+          </a:p>
+        </p:txBody>
+      </p:sp>
+    </p:spTree>
+  </p:cSld>
+  <p:clrMapOvr>
+    <a:masterClrMapping/>
+  </p:clrMapOvr>
+</p:sld>
+</file>
+
+<file path=ppt/slides/slide15.xml><?xml version="1.0" encoding="utf-8"?>
+<p:sld xmlns:a="http://schemas.openxmlformats.org/drawingml/2006/main" xmlns:p="http://schemas.openxmlformats.org/presentationml/2006/main" xmlns:r="http://schemas.openxmlformats.org/officeDocument/2006/relationships">
+  <p:cSld>
+    <p:bg>
+      <p:bgPr>
+        <a:solidFill>
+          <a:srgbClr val="03306E"/>
+        </a:solidFill>
+        <a:effectLst/>
+      </p:bgPr>
+    </p:bg>
+    <p:spTree>
+      <p:nvGrpSpPr>
+        <p:cNvPr id="1" name=""/>
+        <p:cNvGrpSpPr/>
+        <p:nvPr/>
+      </p:nvGrpSpPr>
+      <p:grpSpPr/>
+      <p:sp>
+        <p:nvSpPr>
+          <p:cNvPr id="2" name="TextBox 1"/>
+          <p:cNvSpPr txBox="1"/>
+          <p:nvPr/>
+        </p:nvSpPr>
+        <p:spPr>
+          <a:xfrm>
+            <a:off x="548640" y="320040"/>
+            <a:ext cx="11094415" cy="274320"/>
+          </a:xfrm>
+          <a:prstGeom prst="rect">
+            <a:avLst/>
+          </a:prstGeom>
+          <a:noFill/>
+        </p:spPr>
+        <p:txBody>
+          <a:bodyPr wrap="square" anchor="t" lIns="0" rIns="0" tIns="0" bIns="0"/>
+          <a:lstStyle/>
+          <a:p>
+            <a:pPr algn="l"/>
+            <a:r>
+              <a:rPr sz="1100" b="1" i="0">
+                <a:solidFill>
+                  <a:srgbClr val="A9C8F0"/>
+                </a:solidFill>
+                <a:latin typeface="Calibri"/>
+              </a:rPr>
+              <a:t>DIGITAL SUPPORT  ·  Digital Support Content Area 2</a:t>
+            </a:r>
+          </a:p>
+        </p:txBody>
+      </p:sp>
+      <p:sp>
+        <p:nvSpPr>
+          <p:cNvPr id="3" name="TextBox 2"/>
+          <p:cNvSpPr txBox="1"/>
+          <p:nvPr/>
+        </p:nvSpPr>
+        <p:spPr>
+          <a:xfrm>
+            <a:off x="548640" y="566928"/>
+            <a:ext cx="11094415" cy="822960"/>
+          </a:xfrm>
+          <a:prstGeom prst="rect">
+            <a:avLst/>
+          </a:prstGeom>
+          <a:noFill/>
+        </p:spPr>
+        <p:txBody>
+          <a:bodyPr wrap="square" anchor="ctr" lIns="0" rIns="0" tIns="0" bIns="0"/>
+          <a:lstStyle/>
+          <a:p>
+            <a:pPr algn="l"/>
+            <a:r>
+              <a:rPr sz="3200" b="1" i="0">
+                <a:solidFill>
+                  <a:srgbClr val="FFFFFF"/>
+                </a:solidFill>
+                <a:latin typeface="Cambria"/>
+              </a:rPr>
+              <a:t>Exit ticket</a:t>
+            </a:r>
+          </a:p>
+        </p:txBody>
+      </p:sp>
+      <p:sp>
+        <p:nvSpPr>
+          <p:cNvPr id="4" name="Oval 3"/>
+          <p:cNvSpPr/>
+          <p:nvPr/>
+        </p:nvSpPr>
+        <p:spPr>
+          <a:xfrm>
+            <a:off x="548640" y="1737360"/>
+            <a:ext cx="502920" cy="502920"/>
+          </a:xfrm>
+          <a:prstGeom prst="ellipse">
+            <a:avLst/>
+          </a:prstGeom>
+          <a:solidFill>
+            <a:srgbClr val="4EA1FF"/>
+          </a:solidFill>
+          <a:ln>
+            <a:noFill/>
+          </a:ln>
+          <a:effectLst/>
+        </p:spPr>
+        <p:style>
+          <a:lnRef idx="1">
+            <a:schemeClr val="accent1"/>
+          </a:lnRef>
+          <a:fillRef idx="3">
+            <a:schemeClr val="accent1"/>
+          </a:fillRef>
+          <a:effectRef idx="2">
+            <a:schemeClr val="accent1"/>
+          </a:effectRef>
+          <a:fontRef idx="minor">
+            <a:schemeClr val="lt1"/>
+          </a:fontRef>
+        </p:style>
+        <p:txBody>
+          <a:bodyPr rtlCol="0" anchor="ctr" lIns="0" rIns="0" tIns="0" bIns="0"/>
+          <a:lstStyle/>
+          <a:p>
+            <a:pPr algn="ctr"/>
+            <a:r>
+              <a:rPr sz="1700" b="1">
+                <a:solidFill>
+                  <a:srgbClr val="202122"/>
+                </a:solidFill>
+                <a:latin typeface="Calibri"/>
+              </a:rPr>
+              <a:t>1</a:t>
+            </a:r>
+          </a:p>
+        </p:txBody>
+      </p:sp>
+      <p:sp>
+        <p:nvSpPr>
+          <p:cNvPr id="5" name="TextBox 4"/>
+          <p:cNvSpPr txBox="1"/>
+          <p:nvPr/>
+        </p:nvSpPr>
+        <p:spPr>
+          <a:xfrm>
+            <a:off x="1325880" y="1645920"/>
+            <a:ext cx="6583680" cy="822960"/>
+          </a:xfrm>
+          <a:prstGeom prst="rect">
+            <a:avLst/>
+          </a:prstGeom>
+          <a:noFill/>
+        </p:spPr>
+        <p:txBody>
+          <a:bodyPr wrap="square" anchor="ctr" lIns="0" rIns="0" tIns="0" bIns="0"/>
+          <a:lstStyle/>
+          <a:p>
+            <a:pPr algn="l"/>
+            <a:r>
+              <a:rPr sz="2000" b="0" i="0">
+                <a:solidFill>
+                  <a:srgbClr val="FFFFFF"/>
+                </a:solidFill>
+                <a:latin typeface="Calibri"/>
+              </a:rPr>
+              <a:t>Why track software licences?</a:t>
+            </a:r>
+          </a:p>
+        </p:txBody>
+      </p:sp>
+      <p:sp>
+        <p:nvSpPr>
+          <p:cNvPr id="6" name="Oval 5"/>
+          <p:cNvSpPr/>
+          <p:nvPr/>
+        </p:nvSpPr>
+        <p:spPr>
+          <a:xfrm>
+            <a:off x="548640" y="2697480"/>
+            <a:ext cx="502920" cy="502920"/>
+          </a:xfrm>
+          <a:prstGeom prst="ellipse">
+            <a:avLst/>
+          </a:prstGeom>
+          <a:solidFill>
+            <a:srgbClr val="4EA1FF"/>
+          </a:solidFill>
+          <a:ln>
+            <a:noFill/>
+          </a:ln>
+          <a:effectLst/>
+        </p:spPr>
+        <p:style>
+          <a:lnRef idx="1">
+            <a:schemeClr val="accent1"/>
+          </a:lnRef>
+          <a:fillRef idx="3">
+            <a:schemeClr val="accent1"/>
+          </a:fillRef>
+          <a:effectRef idx="2">
+            <a:schemeClr val="accent1"/>
+          </a:effectRef>
+          <a:fontRef idx="minor">
+            <a:schemeClr val="lt1"/>
+          </a:fontRef>
+        </p:style>
+        <p:txBody>
+          <a:bodyPr rtlCol="0" anchor="ctr" lIns="0" rIns="0" tIns="0" bIns="0"/>
+          <a:lstStyle/>
+          <a:p>
+            <a:pPr algn="ctr"/>
+            <a:r>
+              <a:rPr sz="1700" b="1">
+                <a:solidFill>
+                  <a:srgbClr val="202122"/>
+                </a:solidFill>
+                <a:latin typeface="Calibri"/>
+              </a:rPr>
+              <a:t>2</a:t>
+            </a:r>
+          </a:p>
+        </p:txBody>
+      </p:sp>
+      <p:sp>
+        <p:nvSpPr>
+          <p:cNvPr id="7" name="TextBox 6"/>
+          <p:cNvSpPr txBox="1"/>
+          <p:nvPr/>
+        </p:nvSpPr>
+        <p:spPr>
+          <a:xfrm>
+            <a:off x="1325880" y="2606040"/>
+            <a:ext cx="6583680" cy="822960"/>
+          </a:xfrm>
+          <a:prstGeom prst="rect">
+            <a:avLst/>
+          </a:prstGeom>
+          <a:noFill/>
+        </p:spPr>
+        <p:txBody>
+          <a:bodyPr wrap="square" anchor="ctr" lIns="0" rIns="0" tIns="0" bIns="0"/>
+          <a:lstStyle/>
+          <a:p>
+            <a:pPr algn="l"/>
+            <a:r>
+              <a:rPr sz="2000" b="0" i="0">
+                <a:solidFill>
+                  <a:srgbClr val="FFFFFF"/>
+                </a:solidFill>
+                <a:latin typeface="Calibri"/>
+              </a:rPr>
+              <a:t>What is the benefit of separating work and personal profiles?</a:t>
+            </a:r>
+          </a:p>
+        </p:txBody>
+      </p:sp>
+      <p:sp>
+        <p:nvSpPr>
+          <p:cNvPr id="8" name="Oval 7"/>
+          <p:cNvSpPr/>
+          <p:nvPr/>
+        </p:nvSpPr>
+        <p:spPr>
+          <a:xfrm>
+            <a:off x="548640" y="3657600"/>
+            <a:ext cx="502920" cy="502920"/>
+          </a:xfrm>
+          <a:prstGeom prst="ellipse">
+            <a:avLst/>
+          </a:prstGeom>
+          <a:solidFill>
+            <a:srgbClr val="4EA1FF"/>
+          </a:solidFill>
+          <a:ln>
+            <a:noFill/>
+          </a:ln>
+          <a:effectLst/>
+        </p:spPr>
+        <p:style>
+          <a:lnRef idx="1">
+            <a:schemeClr val="accent1"/>
+          </a:lnRef>
+          <a:fillRef idx="3">
+            <a:schemeClr val="accent1"/>
+          </a:fillRef>
+          <a:effectRef idx="2">
+            <a:schemeClr val="accent1"/>
+          </a:effectRef>
+          <a:fontRef idx="minor">
+            <a:schemeClr val="lt1"/>
+          </a:fontRef>
+        </p:style>
+        <p:txBody>
+          <a:bodyPr rtlCol="0" anchor="ctr" lIns="0" rIns="0" tIns="0" bIns="0"/>
+          <a:lstStyle/>
+          <a:p>
+            <a:pPr algn="ctr"/>
+            <a:r>
+              <a:rPr sz="1700" b="1">
+                <a:solidFill>
+                  <a:srgbClr val="202122"/>
+                </a:solidFill>
+                <a:latin typeface="Calibri"/>
+              </a:rPr>
+              <a:t>3</a:t>
+            </a:r>
+          </a:p>
+        </p:txBody>
+      </p:sp>
+      <p:sp>
+        <p:nvSpPr>
+          <p:cNvPr id="9" name="TextBox 8"/>
+          <p:cNvSpPr txBox="1"/>
+          <p:nvPr/>
+        </p:nvSpPr>
+        <p:spPr>
+          <a:xfrm>
+            <a:off x="1325880" y="3566160"/>
+            <a:ext cx="6583680" cy="822960"/>
+          </a:xfrm>
+          <a:prstGeom prst="rect">
+            <a:avLst/>
+          </a:prstGeom>
+          <a:noFill/>
+        </p:spPr>
+        <p:txBody>
+          <a:bodyPr wrap="square" anchor="ctr" lIns="0" rIns="0" tIns="0" bIns="0"/>
+          <a:lstStyle/>
+          <a:p>
+            <a:pPr algn="l"/>
+            <a:r>
+              <a:rPr sz="2000" b="0" i="0">
+                <a:solidFill>
+                  <a:srgbClr val="FFFFFF"/>
+                </a:solidFill>
+                <a:latin typeface="Calibri"/>
+              </a:rPr>
+              <a:t>Name one thing to do when a staff member leaves.</a:t>
+            </a:r>
+          </a:p>
+        </p:txBody>
+      </p:sp>
+      <p:sp>
+        <p:nvSpPr>
+          <p:cNvPr id="10" name="Rounded Rectangle 9"/>
+          <p:cNvSpPr/>
+          <p:nvPr/>
+        </p:nvSpPr>
+        <p:spPr>
+          <a:xfrm>
+            <a:off x="8229600" y="1645920"/>
+            <a:ext cx="3410712" cy="2926080"/>
+          </a:xfrm>
+          <a:prstGeom prst="roundRect">
+            <a:avLst>
+              <a:gd name="adj" fmla="val 8000"/>
+            </a:avLst>
+          </a:prstGeom>
+          <a:solidFill>
+            <a:srgbClr val="0645AD"/>
+          </a:solidFill>
+          <a:ln>
+            <a:noFill/>
+          </a:ln>
+          <a:effectLst/>
+        </p:spPr>
+        <p:style>
+          <a:lnRef idx="1">
+            <a:schemeClr val="accent1"/>
+          </a:lnRef>
+          <a:fillRef idx="3">
+            <a:schemeClr val="accent1"/>
+          </a:fillRef>
+          <a:effectRef idx="2">
+            <a:schemeClr val="accent1"/>
+          </a:effectRef>
+          <a:fontRef idx="minor">
+            <a:schemeClr val="lt1"/>
+          </a:fontRef>
+        </p:style>
+        <p:txBody>
+          <a:bodyPr rtlCol="0" anchor="ctr"/>
+          <a:lstStyle/>
+          <a:p/>
+        </p:txBody>
+      </p:sp>
+      <p:sp>
+        <p:nvSpPr>
+          <p:cNvPr id="11" name="TextBox 10"/>
+          <p:cNvSpPr txBox="1"/>
+          <p:nvPr/>
+        </p:nvSpPr>
+        <p:spPr>
+          <a:xfrm>
+            <a:off x="8503920" y="1874519"/>
+            <a:ext cx="2926080" cy="365760"/>
+          </a:xfrm>
+          <a:prstGeom prst="rect">
+            <a:avLst/>
+          </a:prstGeom>
+          <a:noFill/>
+        </p:spPr>
+        <p:txBody>
+          <a:bodyPr wrap="square" anchor="t" lIns="0" rIns="0" tIns="0" bIns="0"/>
+          <a:lstStyle/>
+          <a:p>
+            <a:pPr algn="l"/>
+            <a:r>
+              <a:rPr sz="1300" b="1" i="0">
+                <a:solidFill>
+                  <a:srgbClr val="A9C8F0"/>
+                </a:solidFill>
+                <a:latin typeface="Calibri"/>
+              </a:rPr>
+              <a:t>REVISE THIS TOPIC</a:t>
+            </a:r>
+          </a:p>
+        </p:txBody>
+      </p:sp>
+      <p:sp>
+        <p:nvSpPr>
+          <p:cNvPr id="12" name="TextBox 11"/>
+          <p:cNvSpPr txBox="1"/>
+          <p:nvPr/>
+        </p:nvSpPr>
+        <p:spPr>
+          <a:xfrm>
+            <a:off x="8503920" y="2286000"/>
+            <a:ext cx="2926080" cy="548640"/>
+          </a:xfrm>
+          <a:prstGeom prst="rect">
+            <a:avLst/>
+          </a:prstGeom>
+          <a:noFill/>
+        </p:spPr>
+        <p:txBody>
+          <a:bodyPr wrap="square" anchor="t" lIns="0" rIns="0" tIns="0" bIns="0"/>
+          <a:lstStyle/>
+          <a:p>
+            <a:pPr algn="l"/>
+            <a:r>
+              <a:rPr sz="1400" b="0" i="0">
+                <a:solidFill>
+                  <a:srgbClr val="FFFFFF"/>
+                </a:solidFill>
+                <a:latin typeface="Calibri"/>
+              </a:rPr>
+              <a:t>Revision notes for this lesson are on the study wiki:</a:t>
+            </a:r>
+          </a:p>
+        </p:txBody>
+      </p:sp>
+      <p:sp>
+        <p:nvSpPr>
+          <p:cNvPr id="13" name="TextBox 12"/>
+          <p:cNvSpPr txBox="1"/>
+          <p:nvPr/>
+        </p:nvSpPr>
+        <p:spPr>
+          <a:xfrm>
+            <a:off x="8503920" y="2926080"/>
+            <a:ext cx="2926080" cy="1463040"/>
+          </a:xfrm>
+          <a:prstGeom prst="rect">
+            <a:avLst/>
+          </a:prstGeom>
+          <a:noFill/>
+        </p:spPr>
+        <p:txBody>
+          <a:bodyPr wrap="square" anchor="t" lIns="0" rIns="0" tIns="0" bIns="0"/>
+          <a:lstStyle/>
+          <a:p>
+            <a:pPr algn="l"/>
+            <a:r>
+              <a:rPr sz="1900" b="1" i="0">
+                <a:solidFill>
+                  <a:srgbClr val="FFFFFF"/>
+                </a:solidFill>
+                <a:latin typeface="Cambria"/>
+              </a:rPr>
+              <a:t>Digital Support - Installing, Configuring and Supporting Software and Operating Systems</a:t>
+            </a:r>
+          </a:p>
+        </p:txBody>
+      </p:sp>
+      <p:sp>
+        <p:nvSpPr>
+          <p:cNvPr id="14" name="TextBox 13"/>
+          <p:cNvSpPr txBox="1"/>
+          <p:nvPr/>
+        </p:nvSpPr>
+        <p:spPr>
+          <a:xfrm>
+            <a:off x="548640" y="5669280"/>
+            <a:ext cx="11094415" cy="548640"/>
+          </a:xfrm>
+          <a:prstGeom prst="rect">
+            <a:avLst/>
+          </a:prstGeom>
+          <a:noFill/>
+        </p:spPr>
+        <p:txBody>
+          <a:bodyPr wrap="square" anchor="t" lIns="0" rIns="0" tIns="0" bIns="0"/>
+          <a:lstStyle/>
+          <a:p>
+            <a:pPr algn="l"/>
+            <a:r>
+              <a:rPr sz="1200" b="0" i="0">
+                <a:solidFill>
+                  <a:srgbClr val="A9C8F0"/>
+                </a:solidFill>
+                <a:latin typeface="Calibri"/>
+              </a:rPr>
+              <a:t>https://lana6478.github.io/Digital-Suport-and-security-T-levle/#/02-occupational-specialisms/digital-support/02-software-and-os-support.md</a:t>
+            </a:r>
+          </a:p>
+        </p:txBody>
+      </p:sp>
+    </p:spTree>
+  </p:cSld>
+  <p:clrMapOvr>
+    <a:masterClrMapping/>
+  </p:clrMapOvr>
+</p:sld>
+</file>
+
 <file path=ppt/slides/slide2.xml><?xml version="1.0" encoding="utf-8"?>
 <p:sld xmlns:a="http://schemas.openxmlformats.org/drawingml/2006/main" xmlns:p="http://schemas.openxmlformats.org/presentationml/2006/main" xmlns:r="http://schemas.openxmlformats.org/officeDocument/2006/relationships">
   <p:cSld>
@@ -4772,18 +8641,105 @@
       </p:sp>
       <p:sp>
         <p:nvSpPr>
-          <p:cNvPr id="6" name="Rounded Rectangle 5"/>
+          <p:cNvPr id="6" name="TextBox 5"/>
+          <p:cNvSpPr txBox="1"/>
+          <p:nvPr/>
+        </p:nvSpPr>
+        <p:spPr>
+          <a:xfrm>
+            <a:off x="548640" y="1554480"/>
+            <a:ext cx="6720840" cy="4617720"/>
+          </a:xfrm>
+          <a:prstGeom prst="rect">
+            <a:avLst/>
+          </a:prstGeom>
+          <a:noFill/>
+        </p:spPr>
+        <p:txBody>
+          <a:bodyPr wrap="square" lIns="0" rIns="0" tIns="0" bIns="0">
+            <a:spAutoFit/>
+          </a:bodyPr>
+          <a:lstStyle/>
+          <a:p>
+            <a:pPr>
+              <a:spcAft>
+                <a:spcPts val="1320"/>
+              </a:spcAft>
+            </a:pPr>
+            <a:r>
+              <a:rPr sz="2200" b="0">
+                <a:solidFill>
+                  <a:srgbClr val="202122"/>
+                </a:solidFill>
+                <a:latin typeface="Calibri"/>
+              </a:rPr>
+              <a:t>Keeping software versions under control stops chaos.</a:t>
+            </a:r>
+          </a:p>
+          <a:p>
+            <a:pPr>
+              <a:spcAft>
+                <a:spcPts val="1320"/>
+              </a:spcAft>
+            </a:pPr>
+            <a:r>
+              <a:rPr sz="2200" b="0">
+                <a:solidFill>
+                  <a:srgbClr val="202122"/>
+                </a:solidFill>
+                <a:latin typeface="Calibri"/>
+              </a:rPr>
+              <a:t>Fresh installations cover the OS, applications, utilities and licensing. Patching and updating covers system updates, drivers and firmware, anti-malware definitions and applications.</a:t>
+            </a:r>
+          </a:p>
+          <a:p>
+            <a:pPr>
+              <a:spcAft>
+                <a:spcPts val="1320"/>
+              </a:spcAft>
+            </a:pPr>
+            <a:r>
+              <a:rPr sz="2200" b="0">
+                <a:solidFill>
+                  <a:srgbClr val="202122"/>
+                </a:solidFill>
+                <a:latin typeface="Calibri"/>
+              </a:rPr>
+              <a:t>Every update needs a rollback procedure, such as rolling back a device driver or uninstalling a failed OS update, in case it causes problems.</a:t>
+            </a:r>
+          </a:p>
+          <a:p>
+            <a:pPr>
+              <a:spcAft>
+                <a:spcPts val="1320"/>
+              </a:spcAft>
+            </a:pPr>
+            <a:r>
+              <a:rPr sz="2200" b="0">
+                <a:solidFill>
+                  <a:srgbClr val="202122"/>
+                </a:solidFill>
+                <a:latin typeface="Calibri"/>
+              </a:rPr>
+              <a:t>Updates are deployed with network tools such as Group Policy, tested first, and released in a controlled way rather than all at once.</a:t>
+            </a:r>
+          </a:p>
+        </p:txBody>
+      </p:sp>
+      <p:sp>
+        <p:nvSpPr>
+          <p:cNvPr id="7" name="Rounded Rectangle 6"/>
           <p:cNvSpPr/>
           <p:nvPr/>
         </p:nvSpPr>
         <p:spPr>
           <a:xfrm>
-            <a:off x="548640" y="1600200"/>
-            <a:ext cx="5364327" cy="640080"/>
+            <a:off x="7772400" y="1554480"/>
+            <a:ext cx="3867912" cy="4526280"/>
           </a:xfrm>
           <a:prstGeom prst="roundRect">
             <a:avLst>
-              <a:gd name="adj" fmla="val 15000"/>
+              <a:gd name="adj" fmla="val 8000"/>
             </a:avLst>
           </a:prstGeom>
           <a:solidFill>
@@ -4816,55 +8772,20 @@
       </p:sp>
       <p:sp>
         <p:nvSpPr>
-          <p:cNvPr id="7" name="TextBox 6"/>
-          <p:cNvSpPr txBox="1"/>
-          <p:nvPr/>
-        </p:nvSpPr>
-        <p:spPr>
-          <a:xfrm>
-            <a:off x="777240" y="1600200"/>
-            <a:ext cx="4907127" cy="640080"/>
-          </a:xfrm>
-          <a:prstGeom prst="rect">
-            <a:avLst/>
-          </a:prstGeom>
-          <a:noFill/>
-        </p:spPr>
-        <p:txBody>
-          <a:bodyPr wrap="square" anchor="ctr" lIns="0" rIns="0" tIns="0" bIns="0"/>
-          <a:lstStyle/>
-          <a:p>
-            <a:pPr algn="l"/>
-            <a:r>
-              <a:rPr sz="2000" b="1" i="0">
-                <a:solidFill>
-                  <a:srgbClr val="FFFFFF"/>
-                </a:solidFill>
-                <a:latin typeface="Calibri"/>
-              </a:rPr>
-              <a:t>Installing and updating</a:t>
-            </a:r>
-          </a:p>
-        </p:txBody>
-      </p:sp>
-      <p:sp>
-        <p:nvSpPr>
-          <p:cNvPr id="8" name="Rounded Rectangle 7"/>
+          <p:cNvPr id="8" name="Oval 7"/>
           <p:cNvSpPr/>
           <p:nvPr/>
         </p:nvSpPr>
         <p:spPr>
           <a:xfrm>
-            <a:off x="548640" y="2377440"/>
-            <a:ext cx="5364327" cy="3794760"/>
-          </a:xfrm>
-          <a:prstGeom prst="roundRect">
-            <a:avLst>
-              <a:gd name="adj" fmla="val 4000"/>
-            </a:avLst>
+            <a:off x="8046720" y="1828800"/>
+            <a:ext cx="548640" cy="548640"/>
+          </a:xfrm>
+          <a:prstGeom prst="ellipse">
+            <a:avLst/>
           </a:prstGeom>
           <a:solidFill>
-            <a:srgbClr val="EAF3FF"/>
+            <a:srgbClr val="4EA1FF"/>
           </a:solidFill>
           <a:ln>
             <a:noFill/>
@@ -4886,9 +8807,20 @@
           </a:fontRef>
         </p:style>
         <p:txBody>
-          <a:bodyPr rtlCol="0" anchor="ctr"/>
-          <a:lstStyle/>
-          <a:p/>
+          <a:bodyPr rtlCol="0" anchor="ctr" lIns="0" rIns="0" tIns="0" bIns="0"/>
+          <a:lstStyle/>
+          <a:p>
+            <a:pPr algn="ctr"/>
+            <a:r>
+              <a:rPr sz="1300" b="1">
+                <a:solidFill>
+                  <a:srgbClr val="202122"/>
+                </a:solidFill>
+                <a:latin typeface="Calibri"/>
+              </a:rPr>
+              <a:t>e.g.</a:t>
+            </a:r>
+          </a:p>
         </p:txBody>
       </p:sp>
       <p:sp>
@@ -4899,305 +8831,60 @@
         </p:nvSpPr>
         <p:spPr>
           <a:xfrm>
-            <a:off x="822959" y="2606040"/>
-            <a:ext cx="4815687" cy="3337560"/>
-          </a:xfrm>
-          <a:prstGeom prst="rect">
-            <a:avLst/>
-          </a:prstGeom>
-          <a:noFill/>
-        </p:spPr>
-        <p:txBody>
-          <a:bodyPr wrap="square" lIns="0" rIns="0" tIns="0" bIns="0">
-            <a:spAutoFit/>
-          </a:bodyPr>
-          <a:lstStyle/>
-          <a:p>
-            <a:pPr marL="274320" indent="-274320">
-              <a:spcAft>
-                <a:spcPts val="990"/>
-              </a:spcAft>
-              <a:buClr>
-                <a:srgbClr val="0645AD"/>
-              </a:buClr>
-              <a:buFont typeface="Arial"/>
-              <a:buChar char="•"/>
-            </a:pPr>
-            <a:r>
-              <a:rPr sz="2200" b="1">
-                <a:solidFill>
-                  <a:srgbClr val="202122"/>
-                </a:solidFill>
-                <a:latin typeface="Calibri"/>
-              </a:rPr>
-              <a:t>Fresh installs:</a:t>
-            </a:r>
-            <a:r>
-              <a:rPr sz="2200" b="0">
-                <a:solidFill>
-                  <a:srgbClr val="202122"/>
-                </a:solidFill>
-                <a:latin typeface="Calibri"/>
-              </a:rPr>
-              <a:t> OS, applications, utilities, licensing</a:t>
-            </a:r>
-          </a:p>
-          <a:p>
-            <a:pPr marL="274320" indent="-274320">
-              <a:spcAft>
-                <a:spcPts val="990"/>
-              </a:spcAft>
-              <a:buClr>
-                <a:srgbClr val="0645AD"/>
-              </a:buClr>
-              <a:buFont typeface="Arial"/>
-              <a:buChar char="•"/>
-            </a:pPr>
-            <a:r>
-              <a:rPr sz="2200" b="1">
-                <a:solidFill>
-                  <a:srgbClr val="202122"/>
-                </a:solidFill>
-                <a:latin typeface="Calibri"/>
-              </a:rPr>
-              <a:t>Patches:</a:t>
-            </a:r>
-            <a:r>
-              <a:rPr sz="2200" b="0">
-                <a:solidFill>
-                  <a:srgbClr val="202122"/>
-                </a:solidFill>
-                <a:latin typeface="Calibri"/>
-              </a:rPr>
-              <a:t> system, driver, firmware, anti-malware, application</a:t>
-            </a:r>
-          </a:p>
-          <a:p>
-            <a:pPr marL="274320" indent="-274320">
-              <a:spcAft>
-                <a:spcPts val="990"/>
-              </a:spcAft>
-              <a:buClr>
-                <a:srgbClr val="0645AD"/>
-              </a:buClr>
-              <a:buFont typeface="Arial"/>
-              <a:buChar char="•"/>
-            </a:pPr>
-            <a:r>
-              <a:rPr sz="2200" b="0">
-                <a:solidFill>
-                  <a:srgbClr val="202122"/>
-                </a:solidFill>
-                <a:latin typeface="Calibri"/>
-              </a:rPr>
-              <a:t>Deployed with network tools such as Group Policy</a:t>
-            </a:r>
-          </a:p>
-        </p:txBody>
-      </p:sp>
-      <p:sp>
-        <p:nvSpPr>
-          <p:cNvPr id="10" name="Rounded Rectangle 9"/>
-          <p:cNvSpPr/>
-          <p:nvPr/>
-        </p:nvSpPr>
-        <p:spPr>
-          <a:xfrm>
-            <a:off x="6278727" y="1600200"/>
-            <a:ext cx="5364327" cy="640080"/>
-          </a:xfrm>
-          <a:prstGeom prst="roundRect">
-            <a:avLst>
-              <a:gd name="adj" fmla="val 15000"/>
-            </a:avLst>
-          </a:prstGeom>
-          <a:solidFill>
-            <a:srgbClr val="0645AD"/>
-          </a:solidFill>
-          <a:ln>
-            <a:noFill/>
-          </a:ln>
-          <a:effectLst/>
-        </p:spPr>
-        <p:style>
-          <a:lnRef idx="1">
-            <a:schemeClr val="accent1"/>
-          </a:lnRef>
-          <a:fillRef idx="3">
-            <a:schemeClr val="accent1"/>
-          </a:fillRef>
-          <a:effectRef idx="2">
-            <a:schemeClr val="accent1"/>
-          </a:effectRef>
-          <a:fontRef idx="minor">
-            <a:schemeClr val="lt1"/>
-          </a:fontRef>
-        </p:style>
-        <p:txBody>
-          <a:bodyPr rtlCol="0" anchor="ctr"/>
-          <a:lstStyle/>
-          <a:p/>
-        </p:txBody>
-      </p:sp>
-      <p:sp>
-        <p:nvSpPr>
-          <p:cNvPr id="11" name="TextBox 10"/>
-          <p:cNvSpPr txBox="1"/>
-          <p:nvPr/>
-        </p:nvSpPr>
-        <p:spPr>
-          <a:xfrm>
-            <a:off x="6507327" y="1600200"/>
-            <a:ext cx="4907127" cy="640080"/>
-          </a:xfrm>
-          <a:prstGeom prst="rect">
-            <a:avLst/>
-          </a:prstGeom>
-          <a:noFill/>
-        </p:spPr>
-        <p:txBody>
-          <a:bodyPr wrap="square" anchor="ctr" lIns="0" rIns="0" tIns="0" bIns="0"/>
+            <a:off x="8046720" y="2560320"/>
+            <a:ext cx="3291840" cy="365760"/>
+          </a:xfrm>
+          <a:prstGeom prst="rect">
+            <a:avLst/>
+          </a:prstGeom>
+          <a:noFill/>
+        </p:spPr>
+        <p:txBody>
+          <a:bodyPr wrap="square" anchor="t" lIns="0" rIns="0" tIns="0" bIns="0"/>
           <a:lstStyle/>
           <a:p>
             <a:pPr algn="l"/>
             <a:r>
-              <a:rPr sz="2000" b="1" i="0">
+              <a:rPr sz="1300" b="1" i="0">
+                <a:solidFill>
+                  <a:srgbClr val="A9C8F0"/>
+                </a:solidFill>
+                <a:latin typeface="Calibri"/>
+              </a:rPr>
+              <a:t>EXAMPLE</a:t>
+            </a:r>
+          </a:p>
+        </p:txBody>
+      </p:sp>
+      <p:sp>
+        <p:nvSpPr>
+          <p:cNvPr id="10" name="TextBox 9"/>
+          <p:cNvSpPr txBox="1"/>
+          <p:nvPr/>
+        </p:nvSpPr>
+        <p:spPr>
+          <a:xfrm>
+            <a:off x="8046720" y="2971800"/>
+            <a:ext cx="3291840" cy="2971800"/>
+          </a:xfrm>
+          <a:prstGeom prst="rect">
+            <a:avLst/>
+          </a:prstGeom>
+          <a:noFill/>
+        </p:spPr>
+        <p:txBody>
+          <a:bodyPr wrap="square" anchor="t" lIns="0" rIns="0" tIns="0" bIns="0"/>
+          <a:lstStyle/>
+          <a:p>
+            <a:pPr algn="l"/>
+            <a:r>
+              <a:rPr sz="1900" b="0" i="0">
                 <a:solidFill>
                   <a:srgbClr val="FFFFFF"/>
                 </a:solidFill>
-                <a:latin typeface="Calibri"/>
-              </a:rPr>
-              <a:t>Controlling change</a:t>
-            </a:r>
-          </a:p>
-        </p:txBody>
-      </p:sp>
-      <p:sp>
-        <p:nvSpPr>
-          <p:cNvPr id="12" name="Rounded Rectangle 11"/>
-          <p:cNvSpPr/>
-          <p:nvPr/>
-        </p:nvSpPr>
-        <p:spPr>
-          <a:xfrm>
-            <a:off x="6278727" y="2377440"/>
-            <a:ext cx="5364327" cy="3794760"/>
-          </a:xfrm>
-          <a:prstGeom prst="roundRect">
-            <a:avLst>
-              <a:gd name="adj" fmla="val 4000"/>
-            </a:avLst>
-          </a:prstGeom>
-          <a:solidFill>
-            <a:srgbClr val="EAF3FF"/>
-          </a:solidFill>
-          <a:ln>
-            <a:noFill/>
-          </a:ln>
-          <a:effectLst/>
-        </p:spPr>
-        <p:style>
-          <a:lnRef idx="1">
-            <a:schemeClr val="accent1"/>
-          </a:lnRef>
-          <a:fillRef idx="3">
-            <a:schemeClr val="accent1"/>
-          </a:fillRef>
-          <a:effectRef idx="2">
-            <a:schemeClr val="accent1"/>
-          </a:effectRef>
-          <a:fontRef idx="minor">
-            <a:schemeClr val="lt1"/>
-          </a:fontRef>
-        </p:style>
-        <p:txBody>
-          <a:bodyPr rtlCol="0" anchor="ctr"/>
-          <a:lstStyle/>
-          <a:p/>
-        </p:txBody>
-      </p:sp>
-      <p:sp>
-        <p:nvSpPr>
-          <p:cNvPr id="13" name="TextBox 12"/>
-          <p:cNvSpPr txBox="1"/>
-          <p:nvPr/>
-        </p:nvSpPr>
-        <p:spPr>
-          <a:xfrm>
-            <a:off x="6553047" y="2606040"/>
-            <a:ext cx="4815687" cy="3337560"/>
-          </a:xfrm>
-          <a:prstGeom prst="rect">
-            <a:avLst/>
-          </a:prstGeom>
-          <a:noFill/>
-        </p:spPr>
-        <p:txBody>
-          <a:bodyPr wrap="square" lIns="0" rIns="0" tIns="0" bIns="0">
-            <a:spAutoFit/>
-          </a:bodyPr>
-          <a:lstStyle/>
-          <a:p>
-            <a:pPr marL="274320" indent="-274320">
-              <a:spcAft>
-                <a:spcPts val="990"/>
-              </a:spcAft>
-              <a:buClr>
-                <a:srgbClr val="0645AD"/>
-              </a:buClr>
-              <a:buFont typeface="Arial"/>
-              <a:buChar char="•"/>
-            </a:pPr>
-            <a:r>
-              <a:rPr sz="2200" b="0">
-                <a:solidFill>
-                  <a:srgbClr val="202122"/>
-                </a:solidFill>
-                <a:latin typeface="Calibri"/>
-              </a:rPr>
-              <a:t>Rollback procedures, e.g. a device driver or failed OS update</a:t>
-            </a:r>
-          </a:p>
-          <a:p>
-            <a:pPr marL="274320" indent="-274320">
-              <a:spcAft>
-                <a:spcPts val="990"/>
-              </a:spcAft>
-              <a:buClr>
-                <a:srgbClr val="0645AD"/>
-              </a:buClr>
-              <a:buFont typeface="Arial"/>
-              <a:buChar char="•"/>
-            </a:pPr>
-            <a:r>
-              <a:rPr sz="2200" b="0">
-                <a:solidFill>
-                  <a:srgbClr val="202122"/>
-                </a:solidFill>
-                <a:latin typeface="Calibri"/>
-              </a:rPr>
-              <a:t>Testing before release</a:t>
-            </a:r>
-          </a:p>
-          <a:p>
-            <a:pPr marL="274320" indent="-274320">
-              <a:spcAft>
-                <a:spcPts val="990"/>
-              </a:spcAft>
-              <a:buClr>
-                <a:srgbClr val="0645AD"/>
-              </a:buClr>
-              <a:buFont typeface="Arial"/>
-              <a:buChar char="•"/>
-            </a:pPr>
-            <a:r>
-              <a:rPr sz="2200" b="0">
-                <a:solidFill>
-                  <a:srgbClr val="202122"/>
-                </a:solidFill>
-                <a:latin typeface="Calibri"/>
-              </a:rPr>
-              <a:t>Release control across local and network installs</a:t>
+                <a:latin typeface="Cambria"/>
+              </a:rPr>
+              <a:t>A graphics driver update makes screens flicker on 30 PCs. The technician rolls back the driver through Group Policy and pauses the update.</a:t>
             </a:r>
           </a:p>
         </p:txBody>
@@ -5289,7 +8976,7 @@
                 </a:solidFill>
                 <a:latin typeface="Cambria"/>
               </a:rPr>
-              <a:t>The asset management process</a:t>
+              <a:t>Version control management</a:t>
             </a:r>
           </a:p>
         </p:txBody>
@@ -5362,20 +9049,22 @@
       </p:sp>
       <p:sp>
         <p:nvSpPr>
-          <p:cNvPr id="6" name="Rectangle 5"/>
+          <p:cNvPr id="6" name="Rounded Rectangle 5"/>
           <p:cNvSpPr/>
           <p:nvPr/>
         </p:nvSpPr>
         <p:spPr>
           <a:xfrm>
-            <a:off x="1884006" y="2656332"/>
-            <a:ext cx="8423681" cy="36576"/>
-          </a:xfrm>
-          <a:prstGeom prst="rect">
-            <a:avLst/>
+            <a:off x="548640" y="1600200"/>
+            <a:ext cx="5364327" cy="640080"/>
+          </a:xfrm>
+          <a:prstGeom prst="roundRect">
+            <a:avLst>
+              <a:gd name="adj" fmla="val 15000"/>
+            </a:avLst>
           </a:prstGeom>
           <a:solidFill>
-            <a:srgbClr val="A9C8F0"/>
+            <a:srgbClr val="03306E"/>
           </a:solidFill>
           <a:ln>
             <a:noFill/>
@@ -5404,104 +9093,51 @@
       </p:sp>
       <p:sp>
         <p:nvSpPr>
-          <p:cNvPr id="7" name="Oval 6"/>
+          <p:cNvPr id="7" name="TextBox 6"/>
+          <p:cNvSpPr txBox="1"/>
+          <p:nvPr/>
+        </p:nvSpPr>
+        <p:spPr>
+          <a:xfrm>
+            <a:off x="777240" y="1600200"/>
+            <a:ext cx="4907127" cy="640080"/>
+          </a:xfrm>
+          <a:prstGeom prst="rect">
+            <a:avLst/>
+          </a:prstGeom>
+          <a:noFill/>
+        </p:spPr>
+        <p:txBody>
+          <a:bodyPr wrap="square" anchor="ctr" lIns="0" rIns="0" tIns="0" bIns="0"/>
+          <a:lstStyle/>
+          <a:p>
+            <a:pPr algn="l"/>
+            <a:r>
+              <a:rPr sz="2000" b="1" i="0">
+                <a:solidFill>
+                  <a:srgbClr val="FFFFFF"/>
+                </a:solidFill>
+                <a:latin typeface="Calibri"/>
+              </a:rPr>
+              <a:t>Installing and updating</a:t>
+            </a:r>
+          </a:p>
+        </p:txBody>
+      </p:sp>
+      <p:sp>
+        <p:nvSpPr>
+          <p:cNvPr id="8" name="Rounded Rectangle 7"/>
           <p:cNvSpPr/>
           <p:nvPr/>
         </p:nvSpPr>
         <p:spPr>
           <a:xfrm>
-            <a:off x="1563966" y="2354580"/>
-            <a:ext cx="640080" cy="640080"/>
-          </a:xfrm>
-          <a:prstGeom prst="ellipse">
-            <a:avLst/>
-          </a:prstGeom>
-          <a:solidFill>
-            <a:srgbClr val="4EA1FF"/>
-          </a:solidFill>
-          <a:ln>
-            <a:noFill/>
-          </a:ln>
-          <a:effectLst/>
-        </p:spPr>
-        <p:style>
-          <a:lnRef idx="1">
-            <a:schemeClr val="accent1"/>
-          </a:lnRef>
-          <a:fillRef idx="3">
-            <a:schemeClr val="accent1"/>
-          </a:fillRef>
-          <a:effectRef idx="2">
-            <a:schemeClr val="accent1"/>
-          </a:effectRef>
-          <a:fontRef idx="minor">
-            <a:schemeClr val="lt1"/>
-          </a:fontRef>
-        </p:style>
-        <p:txBody>
-          <a:bodyPr rtlCol="0" anchor="ctr" lIns="0" rIns="0" tIns="0" bIns="0"/>
-          <a:lstStyle/>
-          <a:p>
-            <a:pPr algn="ctr"/>
-            <a:r>
-              <a:rPr sz="2000" b="1">
-                <a:solidFill>
-                  <a:srgbClr val="202122"/>
-                </a:solidFill>
-                <a:latin typeface="Calibri"/>
-              </a:rPr>
-              <a:t>1</a:t>
-            </a:r>
-          </a:p>
-        </p:txBody>
-      </p:sp>
-      <p:sp>
-        <p:nvSpPr>
-          <p:cNvPr id="8" name="TextBox 7"/>
-          <p:cNvSpPr txBox="1"/>
-          <p:nvPr/>
-        </p:nvSpPr>
-        <p:spPr>
-          <a:xfrm>
-            <a:off x="548640" y="3131820"/>
-            <a:ext cx="2670733" cy="731520"/>
-          </a:xfrm>
-          <a:prstGeom prst="rect">
-            <a:avLst/>
-          </a:prstGeom>
-          <a:noFill/>
-        </p:spPr>
-        <p:txBody>
-          <a:bodyPr wrap="square" anchor="t" lIns="0" rIns="0" tIns="0" bIns="0"/>
-          <a:lstStyle/>
-          <a:p>
-            <a:pPr algn="ctr"/>
-            <a:r>
-              <a:rPr sz="1700" b="1" i="0">
-                <a:solidFill>
-                  <a:srgbClr val="03306E"/>
-                </a:solidFill>
-                <a:latin typeface="Calibri"/>
-              </a:rPr>
-              <a:t>Identify and plan</a:t>
-            </a:r>
-          </a:p>
-        </p:txBody>
-      </p:sp>
-      <p:sp>
-        <p:nvSpPr>
-          <p:cNvPr id="9" name="Rounded Rectangle 8"/>
-          <p:cNvSpPr/>
-          <p:nvPr/>
-        </p:nvSpPr>
-        <p:spPr>
-          <a:xfrm>
-            <a:off x="548640" y="3909060"/>
-            <a:ext cx="2670733" cy="1508760"/>
+            <a:off x="548640" y="2377440"/>
+            <a:ext cx="5364327" cy="3794760"/>
           </a:xfrm>
           <a:prstGeom prst="roundRect">
             <a:avLst>
-              <a:gd name="adj" fmla="val 6000"/>
+              <a:gd name="adj" fmla="val 4000"/>
             </a:avLst>
           </a:prstGeom>
           <a:solidFill>
@@ -5534,53 +9170,126 @@
       </p:sp>
       <p:sp>
         <p:nvSpPr>
-          <p:cNvPr id="10" name="TextBox 9"/>
-          <p:cNvSpPr txBox="1"/>
-          <p:nvPr/>
-        </p:nvSpPr>
-        <p:spPr>
-          <a:xfrm>
-            <a:off x="685800" y="4046220"/>
-            <a:ext cx="2396413" cy="1234439"/>
-          </a:xfrm>
-          <a:prstGeom prst="rect">
-            <a:avLst/>
-          </a:prstGeom>
-          <a:noFill/>
-        </p:spPr>
-        <p:txBody>
-          <a:bodyPr wrap="square" anchor="t" lIns="0" rIns="0" tIns="0" bIns="0"/>
-          <a:lstStyle/>
-          <a:p>
-            <a:pPr algn="l"/>
-            <a:r>
-              <a:rPr sz="1800" b="0" i="0">
+          <p:cNvPr id="9" name="TextBox 8"/>
+          <p:cNvSpPr txBox="1"/>
+          <p:nvPr/>
+        </p:nvSpPr>
+        <p:spPr>
+          <a:xfrm>
+            <a:off x="822959" y="2606040"/>
+            <a:ext cx="4815687" cy="3337560"/>
+          </a:xfrm>
+          <a:prstGeom prst="rect">
+            <a:avLst/>
+          </a:prstGeom>
+          <a:noFill/>
+        </p:spPr>
+        <p:txBody>
+          <a:bodyPr wrap="square" lIns="0" rIns="0" tIns="0" bIns="0">
+            <a:spAutoFit/>
+          </a:bodyPr>
+          <a:lstStyle/>
+          <a:p>
+            <a:pPr marL="274320" indent="-274320">
+              <a:spcAft>
+                <a:spcPts val="990"/>
+              </a:spcAft>
+              <a:buClr>
+                <a:srgbClr val="0645AD"/>
+              </a:buClr>
+              <a:buFont typeface="Arial"/>
+              <a:buChar char="•"/>
+            </a:pPr>
+            <a:r>
+              <a:rPr sz="2200" b="1">
                 <a:solidFill>
                   <a:srgbClr val="202122"/>
                 </a:solidFill>
                 <a:latin typeface="Calibri"/>
               </a:rPr>
-              <a:t>User and organisational needs, constraints, deployment strategy.</a:t>
-            </a:r>
-          </a:p>
-        </p:txBody>
-      </p:sp>
-      <p:sp>
-        <p:nvSpPr>
-          <p:cNvPr id="11" name="Oval 10"/>
+              <a:t>Fresh installs:</a:t>
+            </a:r>
+            <a:r>
+              <a:rPr sz="2200" b="0">
+                <a:solidFill>
+                  <a:srgbClr val="202122"/>
+                </a:solidFill>
+                <a:latin typeface="Calibri"/>
+              </a:rPr>
+              <a:t> OS, applications, utilities, licensing</a:t>
+            </a:r>
+          </a:p>
+          <a:p>
+            <a:pPr marL="274320" indent="-274320">
+              <a:spcAft>
+                <a:spcPts val="990"/>
+              </a:spcAft>
+              <a:buClr>
+                <a:srgbClr val="0645AD"/>
+              </a:buClr>
+              <a:buFont typeface="Arial"/>
+              <a:buChar char="•"/>
+            </a:pPr>
+            <a:r>
+              <a:rPr sz="2200" b="1">
+                <a:solidFill>
+                  <a:srgbClr val="202122"/>
+                </a:solidFill>
+                <a:latin typeface="Calibri"/>
+              </a:rPr>
+              <a:t>Patches:</a:t>
+            </a:r>
+            <a:r>
+              <a:rPr sz="2200" b="0">
+                <a:solidFill>
+                  <a:srgbClr val="202122"/>
+                </a:solidFill>
+                <a:latin typeface="Calibri"/>
+              </a:rPr>
+              <a:t> system, driver, firmware, anti-malware, application</a:t>
+            </a:r>
+          </a:p>
+          <a:p>
+            <a:pPr marL="274320" indent="-274320">
+              <a:spcAft>
+                <a:spcPts val="990"/>
+              </a:spcAft>
+              <a:buClr>
+                <a:srgbClr val="0645AD"/>
+              </a:buClr>
+              <a:buFont typeface="Arial"/>
+              <a:buChar char="•"/>
+            </a:pPr>
+            <a:r>
+              <a:rPr sz="2200" b="0">
+                <a:solidFill>
+                  <a:srgbClr val="202122"/>
+                </a:solidFill>
+                <a:latin typeface="Calibri"/>
+              </a:rPr>
+              <a:t>Deployed with network tools such as Group Policy</a:t>
+            </a:r>
+          </a:p>
+        </p:txBody>
+      </p:sp>
+      <p:sp>
+        <p:nvSpPr>
+          <p:cNvPr id="10" name="Rounded Rectangle 9"/>
           <p:cNvSpPr/>
           <p:nvPr/>
         </p:nvSpPr>
         <p:spPr>
           <a:xfrm>
-            <a:off x="4371860" y="2354580"/>
-            <a:ext cx="640080" cy="640080"/>
-          </a:xfrm>
-          <a:prstGeom prst="ellipse">
-            <a:avLst/>
+            <a:off x="6278727" y="1600200"/>
+            <a:ext cx="5364327" cy="640080"/>
+          </a:xfrm>
+          <a:prstGeom prst="roundRect">
+            <a:avLst>
+              <a:gd name="adj" fmla="val 15000"/>
+            </a:avLst>
           </a:prstGeom>
           <a:solidFill>
-            <a:srgbClr val="4EA1FF"/>
+            <a:srgbClr val="0645AD"/>
           </a:solidFill>
           <a:ln>
             <a:noFill/>
@@ -5602,69 +9311,58 @@
           </a:fontRef>
         </p:style>
         <p:txBody>
-          <a:bodyPr rtlCol="0" anchor="ctr" lIns="0" rIns="0" tIns="0" bIns="0"/>
-          <a:lstStyle/>
-          <a:p>
-            <a:pPr algn="ctr"/>
-            <a:r>
-              <a:rPr sz="2000" b="1">
-                <a:solidFill>
-                  <a:srgbClr val="202122"/>
-                </a:solidFill>
-                <a:latin typeface="Calibri"/>
-              </a:rPr>
-              <a:t>2</a:t>
-            </a:r>
-          </a:p>
-        </p:txBody>
-      </p:sp>
-      <p:sp>
-        <p:nvSpPr>
-          <p:cNvPr id="12" name="TextBox 11"/>
-          <p:cNvSpPr txBox="1"/>
-          <p:nvPr/>
-        </p:nvSpPr>
-        <p:spPr>
-          <a:xfrm>
-            <a:off x="3356533" y="3131820"/>
-            <a:ext cx="2670733" cy="731520"/>
-          </a:xfrm>
-          <a:prstGeom prst="rect">
-            <a:avLst/>
-          </a:prstGeom>
-          <a:noFill/>
-        </p:spPr>
-        <p:txBody>
-          <a:bodyPr wrap="square" anchor="t" lIns="0" rIns="0" tIns="0" bIns="0"/>
-          <a:lstStyle/>
-          <a:p>
-            <a:pPr algn="ctr"/>
-            <a:r>
-              <a:rPr sz="1700" b="1" i="0">
-                <a:solidFill>
-                  <a:srgbClr val="03306E"/>
-                </a:solidFill>
-                <a:latin typeface="Calibri"/>
-              </a:rPr>
-              <a:t>Acquire and implement</a:t>
-            </a:r>
-          </a:p>
-        </p:txBody>
-      </p:sp>
-      <p:sp>
-        <p:nvSpPr>
-          <p:cNvPr id="13" name="Rounded Rectangle 12"/>
+          <a:bodyPr rtlCol="0" anchor="ctr"/>
+          <a:lstStyle/>
+          <a:p/>
+        </p:txBody>
+      </p:sp>
+      <p:sp>
+        <p:nvSpPr>
+          <p:cNvPr id="11" name="TextBox 10"/>
+          <p:cNvSpPr txBox="1"/>
+          <p:nvPr/>
+        </p:nvSpPr>
+        <p:spPr>
+          <a:xfrm>
+            <a:off x="6507327" y="1600200"/>
+            <a:ext cx="4907127" cy="640080"/>
+          </a:xfrm>
+          <a:prstGeom prst="rect">
+            <a:avLst/>
+          </a:prstGeom>
+          <a:noFill/>
+        </p:spPr>
+        <p:txBody>
+          <a:bodyPr wrap="square" anchor="ctr" lIns="0" rIns="0" tIns="0" bIns="0"/>
+          <a:lstStyle/>
+          <a:p>
+            <a:pPr algn="l"/>
+            <a:r>
+              <a:rPr sz="2000" b="1" i="0">
+                <a:solidFill>
+                  <a:srgbClr val="FFFFFF"/>
+                </a:solidFill>
+                <a:latin typeface="Calibri"/>
+              </a:rPr>
+              <a:t>Controlling change</a:t>
+            </a:r>
+          </a:p>
+        </p:txBody>
+      </p:sp>
+      <p:sp>
+        <p:nvSpPr>
+          <p:cNvPr id="12" name="Rounded Rectangle 11"/>
           <p:cNvSpPr/>
           <p:nvPr/>
         </p:nvSpPr>
         <p:spPr>
           <a:xfrm>
-            <a:off x="3356533" y="3909060"/>
-            <a:ext cx="2670733" cy="1508760"/>
+            <a:off x="6278727" y="2377440"/>
+            <a:ext cx="5364327" cy="3794760"/>
           </a:xfrm>
           <a:prstGeom prst="roundRect">
             <a:avLst>
-              <a:gd name="adj" fmla="val 6000"/>
+              <a:gd name="adj" fmla="val 4000"/>
             </a:avLst>
           </a:prstGeom>
           <a:solidFill>
@@ -5697,359 +9395,86 @@
       </p:sp>
       <p:sp>
         <p:nvSpPr>
-          <p:cNvPr id="14" name="TextBox 13"/>
-          <p:cNvSpPr txBox="1"/>
-          <p:nvPr/>
-        </p:nvSpPr>
-        <p:spPr>
-          <a:xfrm>
-            <a:off x="3493693" y="4046220"/>
-            <a:ext cx="2396413" cy="1234439"/>
-          </a:xfrm>
-          <a:prstGeom prst="rect">
-            <a:avLst/>
-          </a:prstGeom>
-          <a:noFill/>
-        </p:spPr>
-        <p:txBody>
-          <a:bodyPr wrap="square" anchor="t" lIns="0" rIns="0" tIns="0" bIns="0"/>
-          <a:lstStyle/>
-          <a:p>
-            <a:pPr algn="l"/>
-            <a:r>
-              <a:rPr sz="1800" b="0" i="0">
+          <p:cNvPr id="13" name="TextBox 12"/>
+          <p:cNvSpPr txBox="1"/>
+          <p:nvPr/>
+        </p:nvSpPr>
+        <p:spPr>
+          <a:xfrm>
+            <a:off x="6553047" y="2606040"/>
+            <a:ext cx="4815687" cy="3337560"/>
+          </a:xfrm>
+          <a:prstGeom prst="rect">
+            <a:avLst/>
+          </a:prstGeom>
+          <a:noFill/>
+        </p:spPr>
+        <p:txBody>
+          <a:bodyPr wrap="square" lIns="0" rIns="0" tIns="0" bIns="0">
+            <a:spAutoFit/>
+          </a:bodyPr>
+          <a:lstStyle/>
+          <a:p>
+            <a:pPr marL="274320" indent="-274320">
+              <a:spcAft>
+                <a:spcPts val="990"/>
+              </a:spcAft>
+              <a:buClr>
+                <a:srgbClr val="0645AD"/>
+              </a:buClr>
+              <a:buFont typeface="Arial"/>
+              <a:buChar char="•"/>
+            </a:pPr>
+            <a:r>
+              <a:rPr sz="2200" b="0">
                 <a:solidFill>
                   <a:srgbClr val="202122"/>
                 </a:solidFill>
                 <a:latin typeface="Calibri"/>
               </a:rPr>
-              <a:t>Source hardware and software, integrate it.</a:t>
-            </a:r>
-          </a:p>
-        </p:txBody>
-      </p:sp>
-      <p:sp>
-        <p:nvSpPr>
-          <p:cNvPr id="15" name="Oval 14"/>
-          <p:cNvSpPr/>
-          <p:nvPr/>
-        </p:nvSpPr>
-        <p:spPr>
-          <a:xfrm>
-            <a:off x="7179754" y="2354580"/>
-            <a:ext cx="640080" cy="640080"/>
-          </a:xfrm>
-          <a:prstGeom prst="ellipse">
-            <a:avLst/>
-          </a:prstGeom>
-          <a:solidFill>
-            <a:srgbClr val="4EA1FF"/>
-          </a:solidFill>
-          <a:ln>
-            <a:noFill/>
-          </a:ln>
-          <a:effectLst/>
-        </p:spPr>
-        <p:style>
-          <a:lnRef idx="1">
-            <a:schemeClr val="accent1"/>
-          </a:lnRef>
-          <a:fillRef idx="3">
-            <a:schemeClr val="accent1"/>
-          </a:fillRef>
-          <a:effectRef idx="2">
-            <a:schemeClr val="accent1"/>
-          </a:effectRef>
-          <a:fontRef idx="minor">
-            <a:schemeClr val="lt1"/>
-          </a:fontRef>
-        </p:style>
-        <p:txBody>
-          <a:bodyPr rtlCol="0" anchor="ctr" lIns="0" rIns="0" tIns="0" bIns="0"/>
-          <a:lstStyle/>
-          <a:p>
-            <a:pPr algn="ctr"/>
-            <a:r>
-              <a:rPr sz="2000" b="1">
+              <a:t>Rollback procedures, e.g. a device driver or failed OS update</a:t>
+            </a:r>
+          </a:p>
+          <a:p>
+            <a:pPr marL="274320" indent="-274320">
+              <a:spcAft>
+                <a:spcPts val="990"/>
+              </a:spcAft>
+              <a:buClr>
+                <a:srgbClr val="0645AD"/>
+              </a:buClr>
+              <a:buFont typeface="Arial"/>
+              <a:buChar char="•"/>
+            </a:pPr>
+            <a:r>
+              <a:rPr sz="2200" b="0">
                 <a:solidFill>
                   <a:srgbClr val="202122"/>
                 </a:solidFill>
                 <a:latin typeface="Calibri"/>
               </a:rPr>
-              <a:t>3</a:t>
-            </a:r>
-          </a:p>
-        </p:txBody>
-      </p:sp>
-      <p:sp>
-        <p:nvSpPr>
-          <p:cNvPr id="16" name="TextBox 15"/>
-          <p:cNvSpPr txBox="1"/>
-          <p:nvPr/>
-        </p:nvSpPr>
-        <p:spPr>
-          <a:xfrm>
-            <a:off x="6164427" y="3131820"/>
-            <a:ext cx="2670733" cy="731520"/>
-          </a:xfrm>
-          <a:prstGeom prst="rect">
-            <a:avLst/>
-          </a:prstGeom>
-          <a:noFill/>
-        </p:spPr>
-        <p:txBody>
-          <a:bodyPr wrap="square" anchor="t" lIns="0" rIns="0" tIns="0" bIns="0"/>
-          <a:lstStyle/>
-          <a:p>
-            <a:pPr algn="ctr"/>
-            <a:r>
-              <a:rPr sz="1700" b="1" i="0">
-                <a:solidFill>
-                  <a:srgbClr val="03306E"/>
-                </a:solidFill>
-                <a:latin typeface="Calibri"/>
-              </a:rPr>
-              <a:t>Operate and maintain</a:t>
-            </a:r>
-          </a:p>
-        </p:txBody>
-      </p:sp>
-      <p:sp>
-        <p:nvSpPr>
-          <p:cNvPr id="17" name="Rounded Rectangle 16"/>
-          <p:cNvSpPr/>
-          <p:nvPr/>
-        </p:nvSpPr>
-        <p:spPr>
-          <a:xfrm>
-            <a:off x="6164427" y="3909060"/>
-            <a:ext cx="2670733" cy="1508760"/>
-          </a:xfrm>
-          <a:prstGeom prst="roundRect">
-            <a:avLst>
-              <a:gd name="adj" fmla="val 6000"/>
-            </a:avLst>
-          </a:prstGeom>
-          <a:solidFill>
-            <a:srgbClr val="EAF3FF"/>
-          </a:solidFill>
-          <a:ln>
-            <a:noFill/>
-          </a:ln>
-          <a:effectLst/>
-        </p:spPr>
-        <p:style>
-          <a:lnRef idx="1">
-            <a:schemeClr val="accent1"/>
-          </a:lnRef>
-          <a:fillRef idx="3">
-            <a:schemeClr val="accent1"/>
-          </a:fillRef>
-          <a:effectRef idx="2">
-            <a:schemeClr val="accent1"/>
-          </a:effectRef>
-          <a:fontRef idx="minor">
-            <a:schemeClr val="lt1"/>
-          </a:fontRef>
-        </p:style>
-        <p:txBody>
-          <a:bodyPr rtlCol="0" anchor="ctr"/>
-          <a:lstStyle/>
-          <a:p/>
-        </p:txBody>
-      </p:sp>
-      <p:sp>
-        <p:nvSpPr>
-          <p:cNvPr id="18" name="TextBox 17"/>
-          <p:cNvSpPr txBox="1"/>
-          <p:nvPr/>
-        </p:nvSpPr>
-        <p:spPr>
-          <a:xfrm>
-            <a:off x="6301587" y="4046220"/>
-            <a:ext cx="2396413" cy="1234439"/>
-          </a:xfrm>
-          <a:prstGeom prst="rect">
-            <a:avLst/>
-          </a:prstGeom>
-          <a:noFill/>
-        </p:spPr>
-        <p:txBody>
-          <a:bodyPr wrap="square" anchor="t" lIns="0" rIns="0" tIns="0" bIns="0"/>
-          <a:lstStyle/>
-          <a:p>
-            <a:pPr algn="l"/>
-            <a:r>
-              <a:rPr sz="1800" b="0" i="0">
+              <a:t>Testing before release</a:t>
+            </a:r>
+          </a:p>
+          <a:p>
+            <a:pPr marL="274320" indent="-274320">
+              <a:spcAft>
+                <a:spcPts val="990"/>
+              </a:spcAft>
+              <a:buClr>
+                <a:srgbClr val="0645AD"/>
+              </a:buClr>
+              <a:buFont typeface="Arial"/>
+              <a:buChar char="•"/>
+            </a:pPr>
+            <a:r>
+              <a:rPr sz="2200" b="0">
                 <a:solidFill>
                   <a:srgbClr val="202122"/>
                 </a:solidFill>
                 <a:latin typeface="Calibri"/>
               </a:rPr>
-              <a:t>Track licences, respond to requests.</a:t>
-            </a:r>
-          </a:p>
-        </p:txBody>
-      </p:sp>
-      <p:sp>
-        <p:nvSpPr>
-          <p:cNvPr id="19" name="Oval 18"/>
-          <p:cNvSpPr/>
-          <p:nvPr/>
-        </p:nvSpPr>
-        <p:spPr>
-          <a:xfrm>
-            <a:off x="9987648" y="2354580"/>
-            <a:ext cx="640080" cy="640080"/>
-          </a:xfrm>
-          <a:prstGeom prst="ellipse">
-            <a:avLst/>
-          </a:prstGeom>
-          <a:solidFill>
-            <a:srgbClr val="4EA1FF"/>
-          </a:solidFill>
-          <a:ln>
-            <a:noFill/>
-          </a:ln>
-          <a:effectLst/>
-        </p:spPr>
-        <p:style>
-          <a:lnRef idx="1">
-            <a:schemeClr val="accent1"/>
-          </a:lnRef>
-          <a:fillRef idx="3">
-            <a:schemeClr val="accent1"/>
-          </a:fillRef>
-          <a:effectRef idx="2">
-            <a:schemeClr val="accent1"/>
-          </a:effectRef>
-          <a:fontRef idx="minor">
-            <a:schemeClr val="lt1"/>
-          </a:fontRef>
-        </p:style>
-        <p:txBody>
-          <a:bodyPr rtlCol="0" anchor="ctr" lIns="0" rIns="0" tIns="0" bIns="0"/>
-          <a:lstStyle/>
-          <a:p>
-            <a:pPr algn="ctr"/>
-            <a:r>
-              <a:rPr sz="2000" b="1">
-                <a:solidFill>
-                  <a:srgbClr val="202122"/>
-                </a:solidFill>
-                <a:latin typeface="Calibri"/>
-              </a:rPr>
-              <a:t>4</a:t>
-            </a:r>
-          </a:p>
-        </p:txBody>
-      </p:sp>
-      <p:sp>
-        <p:nvSpPr>
-          <p:cNvPr id="20" name="TextBox 19"/>
-          <p:cNvSpPr txBox="1"/>
-          <p:nvPr/>
-        </p:nvSpPr>
-        <p:spPr>
-          <a:xfrm>
-            <a:off x="8972321" y="3131820"/>
-            <a:ext cx="2670733" cy="731520"/>
-          </a:xfrm>
-          <a:prstGeom prst="rect">
-            <a:avLst/>
-          </a:prstGeom>
-          <a:noFill/>
-        </p:spPr>
-        <p:txBody>
-          <a:bodyPr wrap="square" anchor="t" lIns="0" rIns="0" tIns="0" bIns="0"/>
-          <a:lstStyle/>
-          <a:p>
-            <a:pPr algn="ctr"/>
-            <a:r>
-              <a:rPr sz="1700" b="1" i="0">
-                <a:solidFill>
-                  <a:srgbClr val="03306E"/>
-                </a:solidFill>
-                <a:latin typeface="Calibri"/>
-              </a:rPr>
-              <a:t>Decommission and redeploy</a:t>
-            </a:r>
-          </a:p>
-        </p:txBody>
-      </p:sp>
-      <p:sp>
-        <p:nvSpPr>
-          <p:cNvPr id="21" name="Rounded Rectangle 20"/>
-          <p:cNvSpPr/>
-          <p:nvPr/>
-        </p:nvSpPr>
-        <p:spPr>
-          <a:xfrm>
-            <a:off x="8972321" y="3909060"/>
-            <a:ext cx="2670733" cy="1508760"/>
-          </a:xfrm>
-          <a:prstGeom prst="roundRect">
-            <a:avLst>
-              <a:gd name="adj" fmla="val 6000"/>
-            </a:avLst>
-          </a:prstGeom>
-          <a:solidFill>
-            <a:srgbClr val="EAF3FF"/>
-          </a:solidFill>
-          <a:ln>
-            <a:noFill/>
-          </a:ln>
-          <a:effectLst/>
-        </p:spPr>
-        <p:style>
-          <a:lnRef idx="1">
-            <a:schemeClr val="accent1"/>
-          </a:lnRef>
-          <a:fillRef idx="3">
-            <a:schemeClr val="accent1"/>
-          </a:fillRef>
-          <a:effectRef idx="2">
-            <a:schemeClr val="accent1"/>
-          </a:effectRef>
-          <a:fontRef idx="minor">
-            <a:schemeClr val="lt1"/>
-          </a:fontRef>
-        </p:style>
-        <p:txBody>
-          <a:bodyPr rtlCol="0" anchor="ctr"/>
-          <a:lstStyle/>
-          <a:p/>
-        </p:txBody>
-      </p:sp>
-      <p:sp>
-        <p:nvSpPr>
-          <p:cNvPr id="22" name="TextBox 21"/>
-          <p:cNvSpPr txBox="1"/>
-          <p:nvPr/>
-        </p:nvSpPr>
-        <p:spPr>
-          <a:xfrm>
-            <a:off x="9109481" y="4046220"/>
-            <a:ext cx="2396413" cy="1234439"/>
-          </a:xfrm>
-          <a:prstGeom prst="rect">
-            <a:avLst/>
-          </a:prstGeom>
-          <a:noFill/>
-        </p:spPr>
-        <p:txBody>
-          <a:bodyPr wrap="square" anchor="t" lIns="0" rIns="0" tIns="0" bIns="0"/>
-          <a:lstStyle/>
-          <a:p>
-            <a:pPr algn="l"/>
-            <a:r>
-              <a:rPr sz="1800" b="0" i="0">
-                <a:solidFill>
-                  <a:srgbClr val="202122"/>
-                </a:solidFill>
-                <a:latin typeface="Calibri"/>
-              </a:rPr>
-              <a:t>Retire old kit, manage joiners and leavers.</a:t>
+              <a:t>Release control across local and network installs</a:t>
             </a:r>
           </a:p>
         </p:txBody>
@@ -6141,7 +9566,7 @@
                 </a:solidFill>
                 <a:latin typeface="Cambria"/>
               </a:rPr>
-              <a:t>Mobile Device Management (MDM)</a:t>
+              <a:t>Quick check: Version control management</a:t>
             </a:r>
           </a:p>
         </p:txBody>
@@ -6214,58 +9639,14 @@
       </p:sp>
       <p:sp>
         <p:nvSpPr>
-          <p:cNvPr id="6" name="Rounded Rectangle 5"/>
+          <p:cNvPr id="6" name="Oval 5"/>
           <p:cNvSpPr/>
           <p:nvPr/>
         </p:nvSpPr>
         <p:spPr>
           <a:xfrm>
-            <a:off x="548640" y="1600200"/>
-            <a:ext cx="5410047" cy="2148840"/>
-          </a:xfrm>
-          <a:prstGeom prst="roundRect">
-            <a:avLst>
-              <a:gd name="adj" fmla="val 6000"/>
-            </a:avLst>
-          </a:prstGeom>
-          <a:solidFill>
-            <a:srgbClr val="EAF3FF"/>
-          </a:solidFill>
-          <a:ln>
-            <a:noFill/>
-          </a:ln>
-          <a:effectLst/>
-        </p:spPr>
-        <p:style>
-          <a:lnRef idx="1">
-            <a:schemeClr val="accent1"/>
-          </a:lnRef>
-          <a:fillRef idx="3">
-            <a:schemeClr val="accent1"/>
-          </a:fillRef>
-          <a:effectRef idx="2">
-            <a:schemeClr val="accent1"/>
-          </a:effectRef>
-          <a:fontRef idx="minor">
-            <a:schemeClr val="lt1"/>
-          </a:fontRef>
-        </p:style>
-        <p:txBody>
-          <a:bodyPr rtlCol="0" anchor="ctr"/>
-          <a:lstStyle/>
-          <a:p/>
-        </p:txBody>
-      </p:sp>
-      <p:sp>
-        <p:nvSpPr>
-          <p:cNvPr id="7" name="Oval 6"/>
-          <p:cNvSpPr/>
-          <p:nvPr/>
-        </p:nvSpPr>
-        <p:spPr>
-          <a:xfrm>
-            <a:off x="777240" y="1828800"/>
-            <a:ext cx="457200" cy="457200"/>
+            <a:off x="548640" y="1691640"/>
+            <a:ext cx="502920" cy="502920"/>
           </a:xfrm>
           <a:prstGeom prst="ellipse">
             <a:avLst/>
@@ -6298,7 +9679,7 @@
           <a:p>
             <a:pPr algn="ctr"/>
             <a:r>
-              <a:rPr sz="1500" b="1">
+              <a:rPr sz="1600" b="1">
                 <a:solidFill>
                   <a:srgbClr val="202122"/>
                 </a:solidFill>
@@ -6311,124 +9692,47 @@
       </p:sp>
       <p:sp>
         <p:nvSpPr>
-          <p:cNvPr id="8" name="TextBox 7"/>
-          <p:cNvSpPr txBox="1"/>
-          <p:nvPr/>
-        </p:nvSpPr>
-        <p:spPr>
-          <a:xfrm>
-            <a:off x="1371600" y="1801368"/>
-            <a:ext cx="4404207" cy="512064"/>
-          </a:xfrm>
-          <a:prstGeom prst="rect">
-            <a:avLst/>
-          </a:prstGeom>
-          <a:noFill/>
-        </p:spPr>
-        <p:txBody>
-          <a:bodyPr wrap="square" anchor="ctr" lIns="0" rIns="0" tIns="0" bIns="0"/>
+          <p:cNvPr id="7" name="TextBox 6"/>
+          <p:cNvSpPr txBox="1"/>
+          <p:nvPr/>
+        </p:nvSpPr>
+        <p:spPr>
+          <a:xfrm>
+            <a:off x="1371600" y="1645920"/>
+            <a:ext cx="10271455" cy="1188720"/>
+          </a:xfrm>
+          <a:prstGeom prst="rect">
+            <a:avLst/>
+          </a:prstGeom>
+          <a:noFill/>
+        </p:spPr>
+        <p:txBody>
+          <a:bodyPr wrap="square" anchor="t" lIns="0" rIns="0" tIns="0" bIns="0"/>
           <a:lstStyle/>
           <a:p>
             <a:pPr algn="l"/>
             <a:r>
-              <a:rPr sz="1900" b="1" i="0">
-                <a:solidFill>
-                  <a:srgbClr val="03306E"/>
-                </a:solidFill>
-                <a:latin typeface="Calibri"/>
-              </a:rPr>
-              <a:t>Purpose</a:t>
-            </a:r>
-          </a:p>
-        </p:txBody>
-      </p:sp>
-      <p:sp>
-        <p:nvSpPr>
-          <p:cNvPr id="9" name="TextBox 8"/>
-          <p:cNvSpPr txBox="1"/>
-          <p:nvPr/>
-        </p:nvSpPr>
-        <p:spPr>
-          <a:xfrm>
-            <a:off x="777240" y="2468880"/>
-            <a:ext cx="4952847" cy="1143000"/>
-          </a:xfrm>
-          <a:prstGeom prst="rect">
-            <a:avLst/>
-          </a:prstGeom>
-          <a:noFill/>
-        </p:spPr>
-        <p:txBody>
-          <a:bodyPr wrap="square" anchor="t" lIns="0" rIns="0" tIns="0" bIns="0"/>
-          <a:lstStyle/>
-          <a:p>
-            <a:pPr algn="l"/>
-            <a:r>
-              <a:rPr sz="2000" b="0" i="0">
+              <a:rPr sz="2400" b="0" i="0">
                 <a:solidFill>
                   <a:srgbClr val="202122"/>
                 </a:solidFill>
                 <a:latin typeface="Calibri"/>
               </a:rPr>
-              <a:t>Track, locate, secure and configure mobile devices: Wi-Fi, data, hotspot, Bluetooth, email.</a:t>
-            </a:r>
-          </a:p>
-        </p:txBody>
-      </p:sp>
-      <p:sp>
-        <p:nvSpPr>
-          <p:cNvPr id="10" name="Rounded Rectangle 9"/>
+              <a:t>Why have a rollback procedure?</a:t>
+            </a:r>
+          </a:p>
+        </p:txBody>
+      </p:sp>
+      <p:sp>
+        <p:nvSpPr>
+          <p:cNvPr id="8" name="Oval 7"/>
           <p:cNvSpPr/>
           <p:nvPr/>
         </p:nvSpPr>
         <p:spPr>
           <a:xfrm>
-            <a:off x="6233007" y="1600200"/>
-            <a:ext cx="5410047" cy="2148840"/>
-          </a:xfrm>
-          <a:prstGeom prst="roundRect">
-            <a:avLst>
-              <a:gd name="adj" fmla="val 6000"/>
-            </a:avLst>
-          </a:prstGeom>
-          <a:solidFill>
-            <a:srgbClr val="EAF3FF"/>
-          </a:solidFill>
-          <a:ln>
-            <a:noFill/>
-          </a:ln>
-          <a:effectLst/>
-        </p:spPr>
-        <p:style>
-          <a:lnRef idx="1">
-            <a:schemeClr val="accent1"/>
-          </a:lnRef>
-          <a:fillRef idx="3">
-            <a:schemeClr val="accent1"/>
-          </a:fillRef>
-          <a:effectRef idx="2">
-            <a:schemeClr val="accent1"/>
-          </a:effectRef>
-          <a:fontRef idx="minor">
-            <a:schemeClr val="lt1"/>
-          </a:fontRef>
-        </p:style>
-        <p:txBody>
-          <a:bodyPr rtlCol="0" anchor="ctr"/>
-          <a:lstStyle/>
-          <a:p/>
-        </p:txBody>
-      </p:sp>
-      <p:sp>
-        <p:nvSpPr>
-          <p:cNvPr id="11" name="Oval 10"/>
-          <p:cNvSpPr/>
-          <p:nvPr/>
-        </p:nvSpPr>
-        <p:spPr>
-          <a:xfrm>
-            <a:off x="6461607" y="1828800"/>
-            <a:ext cx="457200" cy="457200"/>
+            <a:off x="548640" y="3108960"/>
+            <a:ext cx="502920" cy="502920"/>
           </a:xfrm>
           <a:prstGeom prst="ellipse">
             <a:avLst/>
@@ -6461,7 +9765,7 @@
           <a:p>
             <a:pPr algn="ctr"/>
             <a:r>
-              <a:rPr sz="1500" b="1">
+              <a:rPr sz="1600" b="1">
                 <a:solidFill>
                   <a:srgbClr val="202122"/>
                 </a:solidFill>
@@ -6474,124 +9778,47 @@
       </p:sp>
       <p:sp>
         <p:nvSpPr>
-          <p:cNvPr id="12" name="TextBox 11"/>
-          <p:cNvSpPr txBox="1"/>
-          <p:nvPr/>
-        </p:nvSpPr>
-        <p:spPr>
-          <a:xfrm>
-            <a:off x="7055967" y="1801368"/>
-            <a:ext cx="4404207" cy="512064"/>
-          </a:xfrm>
-          <a:prstGeom prst="rect">
-            <a:avLst/>
-          </a:prstGeom>
-          <a:noFill/>
-        </p:spPr>
-        <p:txBody>
-          <a:bodyPr wrap="square" anchor="ctr" lIns="0" rIns="0" tIns="0" bIns="0"/>
+          <p:cNvPr id="9" name="TextBox 8"/>
+          <p:cNvSpPr txBox="1"/>
+          <p:nvPr/>
+        </p:nvSpPr>
+        <p:spPr>
+          <a:xfrm>
+            <a:off x="1371600" y="3063240"/>
+            <a:ext cx="10271455" cy="1188720"/>
+          </a:xfrm>
+          <a:prstGeom prst="rect">
+            <a:avLst/>
+          </a:prstGeom>
+          <a:noFill/>
+        </p:spPr>
+        <p:txBody>
+          <a:bodyPr wrap="square" anchor="t" lIns="0" rIns="0" tIns="0" bIns="0"/>
           <a:lstStyle/>
           <a:p>
             <a:pPr algn="l"/>
             <a:r>
-              <a:rPr sz="1900" b="1" i="0">
-                <a:solidFill>
-                  <a:srgbClr val="03306E"/>
-                </a:solidFill>
-                <a:latin typeface="Calibri"/>
-              </a:rPr>
-              <a:t>Applications</a:t>
-            </a:r>
-          </a:p>
-        </p:txBody>
-      </p:sp>
-      <p:sp>
-        <p:nvSpPr>
-          <p:cNvPr id="13" name="TextBox 12"/>
-          <p:cNvSpPr txBox="1"/>
-          <p:nvPr/>
-        </p:nvSpPr>
-        <p:spPr>
-          <a:xfrm>
-            <a:off x="6461607" y="2468880"/>
-            <a:ext cx="4952847" cy="1143000"/>
-          </a:xfrm>
-          <a:prstGeom prst="rect">
-            <a:avLst/>
-          </a:prstGeom>
-          <a:noFill/>
-        </p:spPr>
-        <p:txBody>
-          <a:bodyPr wrap="square" anchor="t" lIns="0" rIns="0" tIns="0" bIns="0"/>
-          <a:lstStyle/>
-          <a:p>
-            <a:pPr algn="l"/>
-            <a:r>
-              <a:rPr sz="2000" b="0" i="0">
+              <a:rPr sz="2400" b="0" i="0">
                 <a:solidFill>
                   <a:srgbClr val="202122"/>
                 </a:solidFill>
                 <a:latin typeface="Calibri"/>
               </a:rPr>
-              <a:t>Separate personal and work profiles; enforce policy.</a:t>
-            </a:r>
-          </a:p>
-        </p:txBody>
-      </p:sp>
-      <p:sp>
-        <p:nvSpPr>
-          <p:cNvPr id="14" name="Rounded Rectangle 13"/>
+              <a:t>Name two things that get patched.</a:t>
+            </a:r>
+          </a:p>
+        </p:txBody>
+      </p:sp>
+      <p:sp>
+        <p:nvSpPr>
+          <p:cNvPr id="10" name="Oval 9"/>
           <p:cNvSpPr/>
           <p:nvPr/>
         </p:nvSpPr>
         <p:spPr>
           <a:xfrm>
-            <a:off x="548640" y="4023360"/>
-            <a:ext cx="5410047" cy="2148840"/>
-          </a:xfrm>
-          <a:prstGeom prst="roundRect">
-            <a:avLst>
-              <a:gd name="adj" fmla="val 6000"/>
-            </a:avLst>
-          </a:prstGeom>
-          <a:solidFill>
-            <a:srgbClr val="EAF3FF"/>
-          </a:solidFill>
-          <a:ln>
-            <a:noFill/>
-          </a:ln>
-          <a:effectLst/>
-        </p:spPr>
-        <p:style>
-          <a:lnRef idx="1">
-            <a:schemeClr val="accent1"/>
-          </a:lnRef>
-          <a:fillRef idx="3">
-            <a:schemeClr val="accent1"/>
-          </a:fillRef>
-          <a:effectRef idx="2">
-            <a:schemeClr val="accent1"/>
-          </a:effectRef>
-          <a:fontRef idx="minor">
-            <a:schemeClr val="lt1"/>
-          </a:fontRef>
-        </p:style>
-        <p:txBody>
-          <a:bodyPr rtlCol="0" anchor="ctr"/>
-          <a:lstStyle/>
-          <a:p/>
-        </p:txBody>
-      </p:sp>
-      <p:sp>
-        <p:nvSpPr>
-          <p:cNvPr id="15" name="Oval 14"/>
-          <p:cNvSpPr/>
-          <p:nvPr/>
-        </p:nvSpPr>
-        <p:spPr>
-          <a:xfrm>
-            <a:off x="777240" y="4251960"/>
-            <a:ext cx="457200" cy="457200"/>
+            <a:off x="548640" y="4526280"/>
+            <a:ext cx="502920" cy="502920"/>
           </a:xfrm>
           <a:prstGeom prst="ellipse">
             <a:avLst/>
@@ -6624,7 +9851,7 @@
           <a:p>
             <a:pPr algn="ctr"/>
             <a:r>
-              <a:rPr sz="1500" b="1">
+              <a:rPr sz="1600" b="1">
                 <a:solidFill>
                   <a:srgbClr val="202122"/>
                 </a:solidFill>
@@ -6637,47 +9864,47 @@
       </p:sp>
       <p:sp>
         <p:nvSpPr>
-          <p:cNvPr id="16" name="TextBox 15"/>
-          <p:cNvSpPr txBox="1"/>
-          <p:nvPr/>
-        </p:nvSpPr>
-        <p:spPr>
-          <a:xfrm>
-            <a:off x="1371600" y="4224528"/>
-            <a:ext cx="4404207" cy="512064"/>
-          </a:xfrm>
-          <a:prstGeom prst="rect">
-            <a:avLst/>
-          </a:prstGeom>
-          <a:noFill/>
-        </p:spPr>
-        <p:txBody>
-          <a:bodyPr wrap="square" anchor="ctr" lIns="0" rIns="0" tIns="0" bIns="0"/>
+          <p:cNvPr id="11" name="TextBox 10"/>
+          <p:cNvSpPr txBox="1"/>
+          <p:nvPr/>
+        </p:nvSpPr>
+        <p:spPr>
+          <a:xfrm>
+            <a:off x="1371600" y="4480560"/>
+            <a:ext cx="10271455" cy="1188720"/>
+          </a:xfrm>
+          <a:prstGeom prst="rect">
+            <a:avLst/>
+          </a:prstGeom>
+          <a:noFill/>
+        </p:spPr>
+        <p:txBody>
+          <a:bodyPr wrap="square" anchor="t" lIns="0" rIns="0" tIns="0" bIns="0"/>
           <a:lstStyle/>
           <a:p>
             <a:pPr algn="l"/>
             <a:r>
-              <a:rPr sz="1900" b="1" i="0">
-                <a:solidFill>
-                  <a:srgbClr val="03306E"/>
-                </a:solidFill>
-                <a:latin typeface="Calibri"/>
-              </a:rPr>
-              <a:t>Remote management</a:t>
-            </a:r>
-          </a:p>
-        </p:txBody>
-      </p:sp>
-      <p:sp>
-        <p:nvSpPr>
-          <p:cNvPr id="17" name="TextBox 16"/>
-          <p:cNvSpPr txBox="1"/>
-          <p:nvPr/>
-        </p:nvSpPr>
-        <p:spPr>
-          <a:xfrm>
-            <a:off x="777240" y="4892040"/>
-            <a:ext cx="4952847" cy="1143000"/>
+              <a:rPr sz="2400" b="0" i="0">
+                <a:solidFill>
+                  <a:srgbClr val="202122"/>
+                </a:solidFill>
+                <a:latin typeface="Calibri"/>
+              </a:rPr>
+              <a:t>Why test updates before releasing them?</a:t>
+            </a:r>
+          </a:p>
+        </p:txBody>
+      </p:sp>
+      <p:sp>
+        <p:nvSpPr>
+          <p:cNvPr id="12" name="TextBox 11"/>
+          <p:cNvSpPr txBox="1"/>
+          <p:nvPr/>
+        </p:nvSpPr>
+        <p:spPr>
+          <a:xfrm>
+            <a:off x="548640" y="5852160"/>
+            <a:ext cx="11094415" cy="365760"/>
           </a:xfrm>
           <a:prstGeom prst="rect">
             <a:avLst/>
@@ -6690,176 +9917,13 @@
           <a:p>
             <a:pPr algn="l"/>
             <a:r>
-              <a:rPr sz="2000" b="0" i="0">
-                <a:solidFill>
-                  <a:srgbClr val="202122"/>
-                </a:solidFill>
-                <a:latin typeface="Calibri"/>
-              </a:rPr>
-              <a:t>Remote wipe, disable features, restrict app stores and data, control backup.</a:t>
-            </a:r>
-          </a:p>
-        </p:txBody>
-      </p:sp>
-      <p:sp>
-        <p:nvSpPr>
-          <p:cNvPr id="18" name="Rounded Rectangle 17"/>
-          <p:cNvSpPr/>
-          <p:nvPr/>
-        </p:nvSpPr>
-        <p:spPr>
-          <a:xfrm>
-            <a:off x="6233007" y="4023360"/>
-            <a:ext cx="5410047" cy="2148840"/>
-          </a:xfrm>
-          <a:prstGeom prst="roundRect">
-            <a:avLst>
-              <a:gd name="adj" fmla="val 6000"/>
-            </a:avLst>
-          </a:prstGeom>
-          <a:solidFill>
-            <a:srgbClr val="EAF3FF"/>
-          </a:solidFill>
-          <a:ln>
-            <a:noFill/>
-          </a:ln>
-          <a:effectLst/>
-        </p:spPr>
-        <p:style>
-          <a:lnRef idx="1">
-            <a:schemeClr val="accent1"/>
-          </a:lnRef>
-          <a:fillRef idx="3">
-            <a:schemeClr val="accent1"/>
-          </a:fillRef>
-          <a:effectRef idx="2">
-            <a:schemeClr val="accent1"/>
-          </a:effectRef>
-          <a:fontRef idx="minor">
-            <a:schemeClr val="lt1"/>
-          </a:fontRef>
-        </p:style>
-        <p:txBody>
-          <a:bodyPr rtlCol="0" anchor="ctr"/>
-          <a:lstStyle/>
-          <a:p/>
-        </p:txBody>
-      </p:sp>
-      <p:sp>
-        <p:nvSpPr>
-          <p:cNvPr id="19" name="Oval 18"/>
-          <p:cNvSpPr/>
-          <p:nvPr/>
-        </p:nvSpPr>
-        <p:spPr>
-          <a:xfrm>
-            <a:off x="6461607" y="4251960"/>
-            <a:ext cx="457200" cy="457200"/>
-          </a:xfrm>
-          <a:prstGeom prst="ellipse">
-            <a:avLst/>
-          </a:prstGeom>
-          <a:solidFill>
-            <a:srgbClr val="4EA1FF"/>
-          </a:solidFill>
-          <a:ln>
-            <a:noFill/>
-          </a:ln>
-          <a:effectLst/>
-        </p:spPr>
-        <p:style>
-          <a:lnRef idx="1">
-            <a:schemeClr val="accent1"/>
-          </a:lnRef>
-          <a:fillRef idx="3">
-            <a:schemeClr val="accent1"/>
-          </a:fillRef>
-          <a:effectRef idx="2">
-            <a:schemeClr val="accent1"/>
-          </a:effectRef>
-          <a:fontRef idx="minor">
-            <a:schemeClr val="lt1"/>
-          </a:fontRef>
-        </p:style>
-        <p:txBody>
-          <a:bodyPr rtlCol="0" anchor="ctr" lIns="0" rIns="0" tIns="0" bIns="0"/>
-          <a:lstStyle/>
-          <a:p>
-            <a:pPr algn="ctr"/>
-            <a:r>
-              <a:rPr sz="1500" b="1">
-                <a:solidFill>
-                  <a:srgbClr val="202122"/>
-                </a:solidFill>
-                <a:latin typeface="Calibri"/>
-              </a:rPr>
-              <a:t>4</a:t>
-            </a:r>
-          </a:p>
-        </p:txBody>
-      </p:sp>
-      <p:sp>
-        <p:nvSpPr>
-          <p:cNvPr id="20" name="TextBox 19"/>
-          <p:cNvSpPr txBox="1"/>
-          <p:nvPr/>
-        </p:nvSpPr>
-        <p:spPr>
-          <a:xfrm>
-            <a:off x="7055967" y="4224528"/>
-            <a:ext cx="4404207" cy="512064"/>
-          </a:xfrm>
-          <a:prstGeom prst="rect">
-            <a:avLst/>
-          </a:prstGeom>
-          <a:noFill/>
-        </p:spPr>
-        <p:txBody>
-          <a:bodyPr wrap="square" anchor="ctr" lIns="0" rIns="0" tIns="0" bIns="0"/>
-          <a:lstStyle/>
-          <a:p>
-            <a:pPr algn="l"/>
-            <a:r>
-              <a:rPr sz="1900" b="1" i="0">
-                <a:solidFill>
-                  <a:srgbClr val="03306E"/>
-                </a:solidFill>
-                <a:latin typeface="Calibri"/>
-              </a:rPr>
-              <a:t>Security features</a:t>
-            </a:r>
-          </a:p>
-        </p:txBody>
-      </p:sp>
-      <p:sp>
-        <p:nvSpPr>
-          <p:cNvPr id="21" name="TextBox 20"/>
-          <p:cNvSpPr txBox="1"/>
-          <p:nvPr/>
-        </p:nvSpPr>
-        <p:spPr>
-          <a:xfrm>
-            <a:off x="6461607" y="4892040"/>
-            <a:ext cx="4952847" cy="1143000"/>
-          </a:xfrm>
-          <a:prstGeom prst="rect">
-            <a:avLst/>
-          </a:prstGeom>
-          <a:noFill/>
-        </p:spPr>
-        <p:txBody>
-          <a:bodyPr wrap="square" anchor="t" lIns="0" rIns="0" tIns="0" bIns="0"/>
-          <a:lstStyle/>
-          <a:p>
-            <a:pPr algn="l"/>
-            <a:r>
-              <a:rPr sz="2000" b="0" i="0">
-                <a:solidFill>
-                  <a:srgbClr val="202122"/>
-                </a:solidFill>
-                <a:latin typeface="Calibri"/>
-              </a:rPr>
-              <a:t>Screen lock, encryption, password rules, login limits, MFA, authenticator apps.</a:t>
+              <a:rPr sz="1300" b="0" i="1">
+                <a:solidFill>
+                  <a:srgbClr val="54595D"/>
+                </a:solidFill>
+                <a:latin typeface="Calibri"/>
+              </a:rPr>
+              <a:t>Answer on mini whiteboards or in your book. Answers are in the speaker notes.</a:t>
             </a:r>
           </a:p>
         </p:txBody>
@@ -6951,7 +10015,7 @@
                 </a:solidFill>
                 <a:latin typeface="Cambria"/>
               </a:rPr>
-              <a:t>Check your understanding</a:t>
+              <a:t>The asset management process</a:t>
             </a:r>
           </a:p>
         </p:txBody>
@@ -7024,14 +10088,122 @@
       </p:sp>
       <p:sp>
         <p:nvSpPr>
-          <p:cNvPr id="6" name="Oval 5"/>
+          <p:cNvPr id="6" name="TextBox 5"/>
+          <p:cNvSpPr txBox="1"/>
+          <p:nvPr/>
+        </p:nvSpPr>
+        <p:spPr>
+          <a:xfrm>
+            <a:off x="548640" y="1554480"/>
+            <a:ext cx="6720840" cy="4617720"/>
+          </a:xfrm>
+          <a:prstGeom prst="rect">
+            <a:avLst/>
+          </a:prstGeom>
+          <a:noFill/>
+        </p:spPr>
+        <p:txBody>
+          <a:bodyPr wrap="square" lIns="0" rIns="0" tIns="0" bIns="0">
+            <a:spAutoFit/>
+          </a:bodyPr>
+          <a:lstStyle/>
+          <a:p>
+            <a:pPr>
+              <a:spcAft>
+                <a:spcPts val="1320"/>
+              </a:spcAft>
+            </a:pPr>
+            <a:r>
+              <a:rPr sz="2200" b="0">
+                <a:solidFill>
+                  <a:srgbClr val="202122"/>
+                </a:solidFill>
+                <a:latin typeface="Calibri"/>
+              </a:rPr>
+              <a:t>Asset management tracks every piece of hardware and software through its life.</a:t>
+            </a:r>
+          </a:p>
+          <a:p>
+            <a:pPr>
+              <a:spcAft>
+                <a:spcPts val="1320"/>
+              </a:spcAft>
+            </a:pPr>
+            <a:r>
+              <a:rPr sz="2200" b="1">
+                <a:solidFill>
+                  <a:srgbClr val="202122"/>
+                </a:solidFill>
+                <a:latin typeface="Calibri"/>
+              </a:rPr>
+              <a:t>Identification and planning:</a:t>
+            </a:r>
+            <a:r>
+              <a:rPr sz="2200" b="0">
+                <a:solidFill>
+                  <a:srgbClr val="202122"/>
+                </a:solidFill>
+                <a:latin typeface="Calibri"/>
+              </a:rPr>
+              <a:t> what do users and the organisation need, within what constraints, and how will it be deployed? Acquisition and implementation: source it and integrate it into current systems. Operation and maintenance: track licences and respond to requests. Decommissioning and redeployment: retire old systems, reuse what's still good, and manage the profiles of people joining and leaving.</a:t>
+            </a:r>
+          </a:p>
+        </p:txBody>
+      </p:sp>
+      <p:sp>
+        <p:nvSpPr>
+          <p:cNvPr id="7" name="Rounded Rectangle 6"/>
           <p:cNvSpPr/>
           <p:nvPr/>
         </p:nvSpPr>
         <p:spPr>
           <a:xfrm>
-            <a:off x="548640" y="1618488"/>
-            <a:ext cx="411480" cy="411480"/>
+            <a:off x="7772400" y="1554480"/>
+            <a:ext cx="3867912" cy="4526280"/>
+          </a:xfrm>
+          <a:prstGeom prst="roundRect">
+            <a:avLst>
+              <a:gd name="adj" fmla="val 8000"/>
+            </a:avLst>
+          </a:prstGeom>
+          <a:solidFill>
+            <a:srgbClr val="03306E"/>
+          </a:solidFill>
+          <a:ln>
+            <a:noFill/>
+          </a:ln>
+          <a:effectLst/>
+        </p:spPr>
+        <p:style>
+          <a:lnRef idx="1">
+            <a:schemeClr val="accent1"/>
+          </a:lnRef>
+          <a:fillRef idx="3">
+            <a:schemeClr val="accent1"/>
+          </a:fillRef>
+          <a:effectRef idx="2">
+            <a:schemeClr val="accent1"/>
+          </a:effectRef>
+          <a:fontRef idx="minor">
+            <a:schemeClr val="lt1"/>
+          </a:fontRef>
+        </p:style>
+        <p:txBody>
+          <a:bodyPr rtlCol="0" anchor="ctr"/>
+          <a:lstStyle/>
+          <a:p/>
+        </p:txBody>
+      </p:sp>
+      <p:sp>
+        <p:nvSpPr>
+          <p:cNvPr id="8" name="Oval 7"/>
+          <p:cNvSpPr/>
+          <p:nvPr/>
+        </p:nvSpPr>
+        <p:spPr>
+          <a:xfrm>
+            <a:off x="8046720" y="1828800"/>
+            <a:ext cx="548640" cy="548640"/>
           </a:xfrm>
           <a:prstGeom prst="ellipse">
             <a:avLst/>
@@ -7064,27 +10236,27 @@
           <a:p>
             <a:pPr algn="ctr"/>
             <a:r>
-              <a:rPr sz="1400" b="1">
+              <a:rPr sz="1300" b="1">
                 <a:solidFill>
                   <a:srgbClr val="202122"/>
                 </a:solidFill>
                 <a:latin typeface="Calibri"/>
               </a:rPr>
-              <a:t>1</a:t>
-            </a:r>
-          </a:p>
-        </p:txBody>
-      </p:sp>
-      <p:sp>
-        <p:nvSpPr>
-          <p:cNvPr id="7" name="TextBox 6"/>
-          <p:cNvSpPr txBox="1"/>
-          <p:nvPr/>
-        </p:nvSpPr>
-        <p:spPr>
-          <a:xfrm>
-            <a:off x="1234440" y="1600200"/>
-            <a:ext cx="10408615" cy="1030986"/>
+              <a:t>e.g.</a:t>
+            </a:r>
+          </a:p>
+        </p:txBody>
+      </p:sp>
+      <p:sp>
+        <p:nvSpPr>
+          <p:cNvPr id="9" name="TextBox 8"/>
+          <p:cNvSpPr txBox="1"/>
+          <p:nvPr/>
+        </p:nvSpPr>
+        <p:spPr>
+          <a:xfrm>
+            <a:off x="8046720" y="2560320"/>
+            <a:ext cx="3291840" cy="365760"/>
           </a:xfrm>
           <a:prstGeom prst="rect">
             <a:avLst/>
@@ -7097,80 +10269,27 @@
           <a:p>
             <a:pPr algn="l"/>
             <a:r>
-              <a:rPr sz="2200" b="0" i="0">
-                <a:solidFill>
-                  <a:srgbClr val="202122"/>
-                </a:solidFill>
-                <a:latin typeface="Calibri"/>
-              </a:rPr>
-              <a:t>What is a rollback procedure?</a:t>
-            </a:r>
-          </a:p>
-        </p:txBody>
-      </p:sp>
-      <p:sp>
-        <p:nvSpPr>
-          <p:cNvPr id="8" name="Oval 7"/>
-          <p:cNvSpPr/>
-          <p:nvPr/>
-        </p:nvSpPr>
-        <p:spPr>
-          <a:xfrm>
-            <a:off x="548640" y="2814066"/>
-            <a:ext cx="411480" cy="411480"/>
-          </a:xfrm>
-          <a:prstGeom prst="ellipse">
-            <a:avLst/>
-          </a:prstGeom>
-          <a:solidFill>
-            <a:srgbClr val="4EA1FF"/>
-          </a:solidFill>
-          <a:ln>
-            <a:noFill/>
-          </a:ln>
-          <a:effectLst/>
-        </p:spPr>
-        <p:style>
-          <a:lnRef idx="1">
-            <a:schemeClr val="accent1"/>
-          </a:lnRef>
-          <a:fillRef idx="3">
-            <a:schemeClr val="accent1"/>
-          </a:fillRef>
-          <a:effectRef idx="2">
-            <a:schemeClr val="accent1"/>
-          </a:effectRef>
-          <a:fontRef idx="minor">
-            <a:schemeClr val="lt1"/>
-          </a:fontRef>
-        </p:style>
-        <p:txBody>
-          <a:bodyPr rtlCol="0" anchor="ctr" lIns="0" rIns="0" tIns="0" bIns="0"/>
-          <a:lstStyle/>
-          <a:p>
-            <a:pPr algn="ctr"/>
-            <a:r>
-              <a:rPr sz="1400" b="1">
-                <a:solidFill>
-                  <a:srgbClr val="202122"/>
-                </a:solidFill>
-                <a:latin typeface="Calibri"/>
-              </a:rPr>
-              <a:t>2</a:t>
-            </a:r>
-          </a:p>
-        </p:txBody>
-      </p:sp>
-      <p:sp>
-        <p:nvSpPr>
-          <p:cNvPr id="9" name="TextBox 8"/>
-          <p:cNvSpPr txBox="1"/>
-          <p:nvPr/>
-        </p:nvSpPr>
-        <p:spPr>
-          <a:xfrm>
-            <a:off x="1234440" y="2795778"/>
-            <a:ext cx="10408615" cy="1030986"/>
+              <a:rPr sz="1300" b="1" i="0">
+                <a:solidFill>
+                  <a:srgbClr val="A9C8F0"/>
+                </a:solidFill>
+                <a:latin typeface="Calibri"/>
+              </a:rPr>
+              <a:t>EXAMPLE</a:t>
+            </a:r>
+          </a:p>
+        </p:txBody>
+      </p:sp>
+      <p:sp>
+        <p:nvSpPr>
+          <p:cNvPr id="10" name="TextBox 9"/>
+          <p:cNvSpPr txBox="1"/>
+          <p:nvPr/>
+        </p:nvSpPr>
+        <p:spPr>
+          <a:xfrm>
+            <a:off x="8046720" y="2971800"/>
+            <a:ext cx="3291840" cy="2971800"/>
           </a:xfrm>
           <a:prstGeom prst="rect">
             <a:avLst/>
@@ -7183,185 +10302,13 @@
           <a:p>
             <a:pPr algn="l"/>
             <a:r>
-              <a:rPr sz="2200" b="0" i="0">
-                <a:solidFill>
-                  <a:srgbClr val="202122"/>
-                </a:solidFill>
-                <a:latin typeface="Calibri"/>
-              </a:rPr>
-              <a:t>What happens at the decommissioning stage of asset management?</a:t>
-            </a:r>
-          </a:p>
-        </p:txBody>
-      </p:sp>
-      <p:sp>
-        <p:nvSpPr>
-          <p:cNvPr id="10" name="Oval 9"/>
-          <p:cNvSpPr/>
-          <p:nvPr/>
-        </p:nvSpPr>
-        <p:spPr>
-          <a:xfrm>
-            <a:off x="548640" y="4009644"/>
-            <a:ext cx="411480" cy="411480"/>
-          </a:xfrm>
-          <a:prstGeom prst="ellipse">
-            <a:avLst/>
-          </a:prstGeom>
-          <a:solidFill>
-            <a:srgbClr val="4EA1FF"/>
-          </a:solidFill>
-          <a:ln>
-            <a:noFill/>
-          </a:ln>
-          <a:effectLst/>
-        </p:spPr>
-        <p:style>
-          <a:lnRef idx="1">
-            <a:schemeClr val="accent1"/>
-          </a:lnRef>
-          <a:fillRef idx="3">
-            <a:schemeClr val="accent1"/>
-          </a:fillRef>
-          <a:effectRef idx="2">
-            <a:schemeClr val="accent1"/>
-          </a:effectRef>
-          <a:fontRef idx="minor">
-            <a:schemeClr val="lt1"/>
-          </a:fontRef>
-        </p:style>
-        <p:txBody>
-          <a:bodyPr rtlCol="0" anchor="ctr" lIns="0" rIns="0" tIns="0" bIns="0"/>
-          <a:lstStyle/>
-          <a:p>
-            <a:pPr algn="ctr"/>
-            <a:r>
-              <a:rPr sz="1400" b="1">
-                <a:solidFill>
-                  <a:srgbClr val="202122"/>
-                </a:solidFill>
-                <a:latin typeface="Calibri"/>
-              </a:rPr>
-              <a:t>3</a:t>
-            </a:r>
-          </a:p>
-        </p:txBody>
-      </p:sp>
-      <p:sp>
-        <p:nvSpPr>
-          <p:cNvPr id="11" name="TextBox 10"/>
-          <p:cNvSpPr txBox="1"/>
-          <p:nvPr/>
-        </p:nvSpPr>
-        <p:spPr>
-          <a:xfrm>
-            <a:off x="1234440" y="3991356"/>
-            <a:ext cx="10408615" cy="1030986"/>
-          </a:xfrm>
-          <a:prstGeom prst="rect">
-            <a:avLst/>
-          </a:prstGeom>
-          <a:noFill/>
-        </p:spPr>
-        <p:txBody>
-          <a:bodyPr wrap="square" anchor="t" lIns="0" rIns="0" tIns="0" bIns="0"/>
-          <a:lstStyle/>
-          <a:p>
-            <a:pPr algn="l"/>
-            <a:r>
-              <a:rPr sz="2200" b="0" i="0">
-                <a:solidFill>
-                  <a:srgbClr val="202122"/>
-                </a:solidFill>
-                <a:latin typeface="Calibri"/>
-              </a:rPr>
-              <a:t>What does a remote wipe do?</a:t>
-            </a:r>
-          </a:p>
-        </p:txBody>
-      </p:sp>
-      <p:sp>
-        <p:nvSpPr>
-          <p:cNvPr id="12" name="Oval 11"/>
-          <p:cNvSpPr/>
-          <p:nvPr/>
-        </p:nvSpPr>
-        <p:spPr>
-          <a:xfrm>
-            <a:off x="548640" y="5205221"/>
-            <a:ext cx="411480" cy="411480"/>
-          </a:xfrm>
-          <a:prstGeom prst="ellipse">
-            <a:avLst/>
-          </a:prstGeom>
-          <a:solidFill>
-            <a:srgbClr val="4EA1FF"/>
-          </a:solidFill>
-          <a:ln>
-            <a:noFill/>
-          </a:ln>
-          <a:effectLst/>
-        </p:spPr>
-        <p:style>
-          <a:lnRef idx="1">
-            <a:schemeClr val="accent1"/>
-          </a:lnRef>
-          <a:fillRef idx="3">
-            <a:schemeClr val="accent1"/>
-          </a:fillRef>
-          <a:effectRef idx="2">
-            <a:schemeClr val="accent1"/>
-          </a:effectRef>
-          <a:fontRef idx="minor">
-            <a:schemeClr val="lt1"/>
-          </a:fontRef>
-        </p:style>
-        <p:txBody>
-          <a:bodyPr rtlCol="0" anchor="ctr" lIns="0" rIns="0" tIns="0" bIns="0"/>
-          <a:lstStyle/>
-          <a:p>
-            <a:pPr algn="ctr"/>
-            <a:r>
-              <a:rPr sz="1400" b="1">
-                <a:solidFill>
-                  <a:srgbClr val="202122"/>
-                </a:solidFill>
-                <a:latin typeface="Calibri"/>
-              </a:rPr>
-              <a:t>4</a:t>
-            </a:r>
-          </a:p>
-        </p:txBody>
-      </p:sp>
-      <p:sp>
-        <p:nvSpPr>
-          <p:cNvPr id="13" name="TextBox 12"/>
-          <p:cNvSpPr txBox="1"/>
-          <p:nvPr/>
-        </p:nvSpPr>
-        <p:spPr>
-          <a:xfrm>
-            <a:off x="1234440" y="5186933"/>
-            <a:ext cx="10408615" cy="1030986"/>
-          </a:xfrm>
-          <a:prstGeom prst="rect">
-            <a:avLst/>
-          </a:prstGeom>
-          <a:noFill/>
-        </p:spPr>
-        <p:txBody>
-          <a:bodyPr wrap="square" anchor="t" lIns="0" rIns="0" tIns="0" bIns="0"/>
-          <a:lstStyle/>
-          <a:p>
-            <a:pPr algn="l"/>
-            <a:r>
-              <a:rPr sz="2200" b="0" i="0">
-                <a:solidFill>
-                  <a:srgbClr val="202122"/>
-                </a:solidFill>
-                <a:latin typeface="Calibri"/>
-              </a:rPr>
-              <a:t>Give two MDM security features.</a:t>
+              <a:rPr sz="1900" b="0" i="0">
+                <a:solidFill>
+                  <a:srgbClr val="FFFFFF"/>
+                </a:solidFill>
+                <a:latin typeface="Cambria"/>
+              </a:rPr>
+              <a:t>An asset register shows 20 unused software licences. They're reassigned to new starters instead of buying more, saving money.</a:t>
             </a:r>
           </a:p>
         </p:txBody>
@@ -7453,7 +10400,7 @@
                 </a:solidFill>
                 <a:latin typeface="Cambria"/>
               </a:rPr>
-              <a:t>Answers</a:t>
+              <a:t>The asset management process</a:t>
             </a:r>
           </a:p>
         </p:txBody>
@@ -7526,14 +10473,56 @@
       </p:sp>
       <p:sp>
         <p:nvSpPr>
-          <p:cNvPr id="6" name="Oval 5"/>
+          <p:cNvPr id="6" name="Rectangle 5"/>
           <p:cNvSpPr/>
           <p:nvPr/>
         </p:nvSpPr>
         <p:spPr>
           <a:xfrm>
-            <a:off x="548640" y="1618488"/>
-            <a:ext cx="411480" cy="411480"/>
+            <a:off x="1884006" y="2656332"/>
+            <a:ext cx="8423681" cy="36576"/>
+          </a:xfrm>
+          <a:prstGeom prst="rect">
+            <a:avLst/>
+          </a:prstGeom>
+          <a:solidFill>
+            <a:srgbClr val="A9C8F0"/>
+          </a:solidFill>
+          <a:ln>
+            <a:noFill/>
+          </a:ln>
+          <a:effectLst/>
+        </p:spPr>
+        <p:style>
+          <a:lnRef idx="1">
+            <a:schemeClr val="accent1"/>
+          </a:lnRef>
+          <a:fillRef idx="3">
+            <a:schemeClr val="accent1"/>
+          </a:fillRef>
+          <a:effectRef idx="2">
+            <a:schemeClr val="accent1"/>
+          </a:effectRef>
+          <a:fontRef idx="minor">
+            <a:schemeClr val="lt1"/>
+          </a:fontRef>
+        </p:style>
+        <p:txBody>
+          <a:bodyPr rtlCol="0" anchor="ctr"/>
+          <a:lstStyle/>
+          <a:p/>
+        </p:txBody>
+      </p:sp>
+      <p:sp>
+        <p:nvSpPr>
+          <p:cNvPr id="7" name="Oval 6"/>
+          <p:cNvSpPr/>
+          <p:nvPr/>
+        </p:nvSpPr>
+        <p:spPr>
+          <a:xfrm>
+            <a:off x="1563966" y="2354580"/>
+            <a:ext cx="640080" cy="640080"/>
           </a:xfrm>
           <a:prstGeom prst="ellipse">
             <a:avLst/>
@@ -7566,7 +10555,7 @@
           <a:p>
             <a:pPr algn="ctr"/>
             <a:r>
-              <a:rPr sz="1400" b="1">
+              <a:rPr sz="2000" b="1">
                 <a:solidFill>
                   <a:srgbClr val="202122"/>
                 </a:solidFill>
@@ -7579,14 +10568,14 @@
       </p:sp>
       <p:sp>
         <p:nvSpPr>
-          <p:cNvPr id="7" name="TextBox 6"/>
-          <p:cNvSpPr txBox="1"/>
-          <p:nvPr/>
-        </p:nvSpPr>
-        <p:spPr>
-          <a:xfrm>
-            <a:off x="1234440" y="1600200"/>
-            <a:ext cx="10408615" cy="1030986"/>
+          <p:cNvPr id="8" name="TextBox 7"/>
+          <p:cNvSpPr txBox="1"/>
+          <p:nvPr/>
+        </p:nvSpPr>
+        <p:spPr>
+          <a:xfrm>
+            <a:off x="548640" y="3131820"/>
+            <a:ext cx="2670733" cy="731520"/>
           </a:xfrm>
           <a:prstGeom prst="rect">
             <a:avLst/>
@@ -7597,40 +10586,106 @@
           <a:bodyPr wrap="square" anchor="t" lIns="0" rIns="0" tIns="0" bIns="0"/>
           <a:lstStyle/>
           <a:p>
+            <a:pPr algn="ctr"/>
+            <a:r>
+              <a:rPr sz="1700" b="1" i="0">
+                <a:solidFill>
+                  <a:srgbClr val="03306E"/>
+                </a:solidFill>
+                <a:latin typeface="Calibri"/>
+              </a:rPr>
+              <a:t>Identify and plan</a:t>
+            </a:r>
+          </a:p>
+        </p:txBody>
+      </p:sp>
+      <p:sp>
+        <p:nvSpPr>
+          <p:cNvPr id="9" name="Rounded Rectangle 8"/>
+          <p:cNvSpPr/>
+          <p:nvPr/>
+        </p:nvSpPr>
+        <p:spPr>
+          <a:xfrm>
+            <a:off x="548640" y="3909060"/>
+            <a:ext cx="2670733" cy="1508760"/>
+          </a:xfrm>
+          <a:prstGeom prst="roundRect">
+            <a:avLst>
+              <a:gd name="adj" fmla="val 6000"/>
+            </a:avLst>
+          </a:prstGeom>
+          <a:solidFill>
+            <a:srgbClr val="EAF3FF"/>
+          </a:solidFill>
+          <a:ln>
+            <a:noFill/>
+          </a:ln>
+          <a:effectLst/>
+        </p:spPr>
+        <p:style>
+          <a:lnRef idx="1">
+            <a:schemeClr val="accent1"/>
+          </a:lnRef>
+          <a:fillRef idx="3">
+            <a:schemeClr val="accent1"/>
+          </a:fillRef>
+          <a:effectRef idx="2">
+            <a:schemeClr val="accent1"/>
+          </a:effectRef>
+          <a:fontRef idx="minor">
+            <a:schemeClr val="lt1"/>
+          </a:fontRef>
+        </p:style>
+        <p:txBody>
+          <a:bodyPr rtlCol="0" anchor="ctr"/>
+          <a:lstStyle/>
+          <a:p/>
+        </p:txBody>
+      </p:sp>
+      <p:sp>
+        <p:nvSpPr>
+          <p:cNvPr id="10" name="TextBox 9"/>
+          <p:cNvSpPr txBox="1"/>
+          <p:nvPr/>
+        </p:nvSpPr>
+        <p:spPr>
+          <a:xfrm>
+            <a:off x="685800" y="4046220"/>
+            <a:ext cx="2396413" cy="1234439"/>
+          </a:xfrm>
+          <a:prstGeom prst="rect">
+            <a:avLst/>
+          </a:prstGeom>
+          <a:noFill/>
+        </p:spPr>
+        <p:txBody>
+          <a:bodyPr wrap="square" anchor="t" lIns="0" rIns="0" tIns="0" bIns="0"/>
+          <a:lstStyle/>
+          <a:p>
             <a:pPr algn="l"/>
             <a:r>
               <a:rPr sz="1800" b="0" i="0">
                 <a:solidFill>
-                  <a:srgbClr val="54595D"/>
-                </a:solidFill>
-                <a:latin typeface="Calibri"/>
-              </a:rPr>
-              <a:t>What is a rollback procedure?</a:t>
-            </a:r>
-          </a:p>
-          <a:p>
-            <a:r>
-              <a:rPr sz="1800" b="1">
-                <a:solidFill>
-                  <a:srgbClr val="03306E"/>
-                </a:solidFill>
-                <a:latin typeface="Calibri"/>
-              </a:rPr>
-              <a:t>A way to return to the previous version if an update fails.</a:t>
-            </a:r>
-          </a:p>
-        </p:txBody>
-      </p:sp>
-      <p:sp>
-        <p:nvSpPr>
-          <p:cNvPr id="8" name="Oval 7"/>
+                  <a:srgbClr val="202122"/>
+                </a:solidFill>
+                <a:latin typeface="Calibri"/>
+              </a:rPr>
+              <a:t>User and organisational needs, constraints, deployment strategy.</a:t>
+            </a:r>
+          </a:p>
+        </p:txBody>
+      </p:sp>
+      <p:sp>
+        <p:nvSpPr>
+          <p:cNvPr id="11" name="Oval 10"/>
           <p:cNvSpPr/>
           <p:nvPr/>
         </p:nvSpPr>
         <p:spPr>
           <a:xfrm>
-            <a:off x="548640" y="2814066"/>
-            <a:ext cx="411480" cy="411480"/>
+            <a:off x="4371860" y="2354580"/>
+            <a:ext cx="640080" cy="640080"/>
           </a:xfrm>
           <a:prstGeom prst="ellipse">
             <a:avLst/>
@@ -7663,7 +10718,7 @@
           <a:p>
             <a:pPr algn="ctr"/>
             <a:r>
-              <a:rPr sz="1400" b="1">
+              <a:rPr sz="2000" b="1">
                 <a:solidFill>
                   <a:srgbClr val="202122"/>
                 </a:solidFill>
@@ -7676,14 +10731,14 @@
       </p:sp>
       <p:sp>
         <p:nvSpPr>
-          <p:cNvPr id="9" name="TextBox 8"/>
-          <p:cNvSpPr txBox="1"/>
-          <p:nvPr/>
-        </p:nvSpPr>
-        <p:spPr>
-          <a:xfrm>
-            <a:off x="1234440" y="2795778"/>
-            <a:ext cx="10408615" cy="1030986"/>
+          <p:cNvPr id="12" name="TextBox 11"/>
+          <p:cNvSpPr txBox="1"/>
+          <p:nvPr/>
+        </p:nvSpPr>
+        <p:spPr>
+          <a:xfrm>
+            <a:off x="3356533" y="3131820"/>
+            <a:ext cx="2670733" cy="731520"/>
           </a:xfrm>
           <a:prstGeom prst="rect">
             <a:avLst/>
@@ -7694,40 +10749,106 @@
           <a:bodyPr wrap="square" anchor="t" lIns="0" rIns="0" tIns="0" bIns="0"/>
           <a:lstStyle/>
           <a:p>
+            <a:pPr algn="ctr"/>
+            <a:r>
+              <a:rPr sz="1700" b="1" i="0">
+                <a:solidFill>
+                  <a:srgbClr val="03306E"/>
+                </a:solidFill>
+                <a:latin typeface="Calibri"/>
+              </a:rPr>
+              <a:t>Acquire and implement</a:t>
+            </a:r>
+          </a:p>
+        </p:txBody>
+      </p:sp>
+      <p:sp>
+        <p:nvSpPr>
+          <p:cNvPr id="13" name="Rounded Rectangle 12"/>
+          <p:cNvSpPr/>
+          <p:nvPr/>
+        </p:nvSpPr>
+        <p:spPr>
+          <a:xfrm>
+            <a:off x="3356533" y="3909060"/>
+            <a:ext cx="2670733" cy="1508760"/>
+          </a:xfrm>
+          <a:prstGeom prst="roundRect">
+            <a:avLst>
+              <a:gd name="adj" fmla="val 6000"/>
+            </a:avLst>
+          </a:prstGeom>
+          <a:solidFill>
+            <a:srgbClr val="EAF3FF"/>
+          </a:solidFill>
+          <a:ln>
+            <a:noFill/>
+          </a:ln>
+          <a:effectLst/>
+        </p:spPr>
+        <p:style>
+          <a:lnRef idx="1">
+            <a:schemeClr val="accent1"/>
+          </a:lnRef>
+          <a:fillRef idx="3">
+            <a:schemeClr val="accent1"/>
+          </a:fillRef>
+          <a:effectRef idx="2">
+            <a:schemeClr val="accent1"/>
+          </a:effectRef>
+          <a:fontRef idx="minor">
+            <a:schemeClr val="lt1"/>
+          </a:fontRef>
+        </p:style>
+        <p:txBody>
+          <a:bodyPr rtlCol="0" anchor="ctr"/>
+          <a:lstStyle/>
+          <a:p/>
+        </p:txBody>
+      </p:sp>
+      <p:sp>
+        <p:nvSpPr>
+          <p:cNvPr id="14" name="TextBox 13"/>
+          <p:cNvSpPr txBox="1"/>
+          <p:nvPr/>
+        </p:nvSpPr>
+        <p:spPr>
+          <a:xfrm>
+            <a:off x="3493693" y="4046220"/>
+            <a:ext cx="2396413" cy="1234439"/>
+          </a:xfrm>
+          <a:prstGeom prst="rect">
+            <a:avLst/>
+          </a:prstGeom>
+          <a:noFill/>
+        </p:spPr>
+        <p:txBody>
+          <a:bodyPr wrap="square" anchor="t" lIns="0" rIns="0" tIns="0" bIns="0"/>
+          <a:lstStyle/>
+          <a:p>
             <a:pPr algn="l"/>
             <a:r>
               <a:rPr sz="1800" b="0" i="0">
                 <a:solidFill>
-                  <a:srgbClr val="54595D"/>
-                </a:solidFill>
-                <a:latin typeface="Calibri"/>
-              </a:rPr>
-              <a:t>What happens at the decommissioning stage of asset management?</a:t>
-            </a:r>
-          </a:p>
-          <a:p>
-            <a:r>
-              <a:rPr sz="1800" b="1">
-                <a:solidFill>
-                  <a:srgbClr val="03306E"/>
-                </a:solidFill>
-                <a:latin typeface="Calibri"/>
-              </a:rPr>
-              <a:t>Old assets are removed or retired and leaver profiles managed.</a:t>
-            </a:r>
-          </a:p>
-        </p:txBody>
-      </p:sp>
-      <p:sp>
-        <p:nvSpPr>
-          <p:cNvPr id="10" name="Oval 9"/>
+                  <a:srgbClr val="202122"/>
+                </a:solidFill>
+                <a:latin typeface="Calibri"/>
+              </a:rPr>
+              <a:t>Source hardware and software, integrate it.</a:t>
+            </a:r>
+          </a:p>
+        </p:txBody>
+      </p:sp>
+      <p:sp>
+        <p:nvSpPr>
+          <p:cNvPr id="15" name="Oval 14"/>
           <p:cNvSpPr/>
           <p:nvPr/>
         </p:nvSpPr>
         <p:spPr>
           <a:xfrm>
-            <a:off x="548640" y="4009644"/>
-            <a:ext cx="411480" cy="411480"/>
+            <a:off x="7179754" y="2354580"/>
+            <a:ext cx="640080" cy="640080"/>
           </a:xfrm>
           <a:prstGeom prst="ellipse">
             <a:avLst/>
@@ -7760,7 +10881,7 @@
           <a:p>
             <a:pPr algn="ctr"/>
             <a:r>
-              <a:rPr sz="1400" b="1">
+              <a:rPr sz="2000" b="1">
                 <a:solidFill>
                   <a:srgbClr val="202122"/>
                 </a:solidFill>
@@ -7773,14 +10894,14 @@
       </p:sp>
       <p:sp>
         <p:nvSpPr>
-          <p:cNvPr id="11" name="TextBox 10"/>
-          <p:cNvSpPr txBox="1"/>
-          <p:nvPr/>
-        </p:nvSpPr>
-        <p:spPr>
-          <a:xfrm>
-            <a:off x="1234440" y="3991356"/>
-            <a:ext cx="10408615" cy="1030986"/>
+          <p:cNvPr id="16" name="TextBox 15"/>
+          <p:cNvSpPr txBox="1"/>
+          <p:nvPr/>
+        </p:nvSpPr>
+        <p:spPr>
+          <a:xfrm>
+            <a:off x="6164427" y="3131820"/>
+            <a:ext cx="2670733" cy="731520"/>
           </a:xfrm>
           <a:prstGeom prst="rect">
             <a:avLst/>
@@ -7791,40 +10912,106 @@
           <a:bodyPr wrap="square" anchor="t" lIns="0" rIns="0" tIns="0" bIns="0"/>
           <a:lstStyle/>
           <a:p>
+            <a:pPr algn="ctr"/>
+            <a:r>
+              <a:rPr sz="1700" b="1" i="0">
+                <a:solidFill>
+                  <a:srgbClr val="03306E"/>
+                </a:solidFill>
+                <a:latin typeface="Calibri"/>
+              </a:rPr>
+              <a:t>Operate and maintain</a:t>
+            </a:r>
+          </a:p>
+        </p:txBody>
+      </p:sp>
+      <p:sp>
+        <p:nvSpPr>
+          <p:cNvPr id="17" name="Rounded Rectangle 16"/>
+          <p:cNvSpPr/>
+          <p:nvPr/>
+        </p:nvSpPr>
+        <p:spPr>
+          <a:xfrm>
+            <a:off x="6164427" y="3909060"/>
+            <a:ext cx="2670733" cy="1508760"/>
+          </a:xfrm>
+          <a:prstGeom prst="roundRect">
+            <a:avLst>
+              <a:gd name="adj" fmla="val 6000"/>
+            </a:avLst>
+          </a:prstGeom>
+          <a:solidFill>
+            <a:srgbClr val="EAF3FF"/>
+          </a:solidFill>
+          <a:ln>
+            <a:noFill/>
+          </a:ln>
+          <a:effectLst/>
+        </p:spPr>
+        <p:style>
+          <a:lnRef idx="1">
+            <a:schemeClr val="accent1"/>
+          </a:lnRef>
+          <a:fillRef idx="3">
+            <a:schemeClr val="accent1"/>
+          </a:fillRef>
+          <a:effectRef idx="2">
+            <a:schemeClr val="accent1"/>
+          </a:effectRef>
+          <a:fontRef idx="minor">
+            <a:schemeClr val="lt1"/>
+          </a:fontRef>
+        </p:style>
+        <p:txBody>
+          <a:bodyPr rtlCol="0" anchor="ctr"/>
+          <a:lstStyle/>
+          <a:p/>
+        </p:txBody>
+      </p:sp>
+      <p:sp>
+        <p:nvSpPr>
+          <p:cNvPr id="18" name="TextBox 17"/>
+          <p:cNvSpPr txBox="1"/>
+          <p:nvPr/>
+        </p:nvSpPr>
+        <p:spPr>
+          <a:xfrm>
+            <a:off x="6301587" y="4046220"/>
+            <a:ext cx="2396413" cy="1234439"/>
+          </a:xfrm>
+          <a:prstGeom prst="rect">
+            <a:avLst/>
+          </a:prstGeom>
+          <a:noFill/>
+        </p:spPr>
+        <p:txBody>
+          <a:bodyPr wrap="square" anchor="t" lIns="0" rIns="0" tIns="0" bIns="0"/>
+          <a:lstStyle/>
+          <a:p>
             <a:pPr algn="l"/>
             <a:r>
               <a:rPr sz="1800" b="0" i="0">
                 <a:solidFill>
-                  <a:srgbClr val="54595D"/>
-                </a:solidFill>
-                <a:latin typeface="Calibri"/>
-              </a:rPr>
-              <a:t>What does a remote wipe do?</a:t>
-            </a:r>
-          </a:p>
-          <a:p>
-            <a:r>
-              <a:rPr sz="1800" b="1">
-                <a:solidFill>
-                  <a:srgbClr val="03306E"/>
-                </a:solidFill>
-                <a:latin typeface="Calibri"/>
-              </a:rPr>
-              <a:t>Erases a lost or stolen device remotely.</a:t>
-            </a:r>
-          </a:p>
-        </p:txBody>
-      </p:sp>
-      <p:sp>
-        <p:nvSpPr>
-          <p:cNvPr id="12" name="Oval 11"/>
+                  <a:srgbClr val="202122"/>
+                </a:solidFill>
+                <a:latin typeface="Calibri"/>
+              </a:rPr>
+              <a:t>Track licences, respond to requests.</a:t>
+            </a:r>
+          </a:p>
+        </p:txBody>
+      </p:sp>
+      <p:sp>
+        <p:nvSpPr>
+          <p:cNvPr id="19" name="Oval 18"/>
           <p:cNvSpPr/>
           <p:nvPr/>
         </p:nvSpPr>
         <p:spPr>
           <a:xfrm>
-            <a:off x="548640" y="5205221"/>
-            <a:ext cx="411480" cy="411480"/>
+            <a:off x="9987648" y="2354580"/>
+            <a:ext cx="640080" cy="640080"/>
           </a:xfrm>
           <a:prstGeom prst="ellipse">
             <a:avLst/>
@@ -7857,7 +11044,7 @@
           <a:p>
             <a:pPr algn="ctr"/>
             <a:r>
-              <a:rPr sz="1400" b="1">
+              <a:rPr sz="2000" b="1">
                 <a:solidFill>
                   <a:srgbClr val="202122"/>
                 </a:solidFill>
@@ -7870,14 +11057,14 @@
       </p:sp>
       <p:sp>
         <p:nvSpPr>
-          <p:cNvPr id="13" name="TextBox 12"/>
-          <p:cNvSpPr txBox="1"/>
-          <p:nvPr/>
-        </p:nvSpPr>
-        <p:spPr>
-          <a:xfrm>
-            <a:off x="1234440" y="5186933"/>
-            <a:ext cx="10408615" cy="1030986"/>
+          <p:cNvPr id="20" name="TextBox 19"/>
+          <p:cNvSpPr txBox="1"/>
+          <p:nvPr/>
+        </p:nvSpPr>
+        <p:spPr>
+          <a:xfrm>
+            <a:off x="8972321" y="3131820"/>
+            <a:ext cx="2670733" cy="731520"/>
           </a:xfrm>
           <a:prstGeom prst="rect">
             <a:avLst/>
@@ -7888,26 +11075,92 @@
           <a:bodyPr wrap="square" anchor="t" lIns="0" rIns="0" tIns="0" bIns="0"/>
           <a:lstStyle/>
           <a:p>
+            <a:pPr algn="ctr"/>
+            <a:r>
+              <a:rPr sz="1700" b="1" i="0">
+                <a:solidFill>
+                  <a:srgbClr val="03306E"/>
+                </a:solidFill>
+                <a:latin typeface="Calibri"/>
+              </a:rPr>
+              <a:t>Decommission and redeploy</a:t>
+            </a:r>
+          </a:p>
+        </p:txBody>
+      </p:sp>
+      <p:sp>
+        <p:nvSpPr>
+          <p:cNvPr id="21" name="Rounded Rectangle 20"/>
+          <p:cNvSpPr/>
+          <p:nvPr/>
+        </p:nvSpPr>
+        <p:spPr>
+          <a:xfrm>
+            <a:off x="8972321" y="3909060"/>
+            <a:ext cx="2670733" cy="1508760"/>
+          </a:xfrm>
+          <a:prstGeom prst="roundRect">
+            <a:avLst>
+              <a:gd name="adj" fmla="val 6000"/>
+            </a:avLst>
+          </a:prstGeom>
+          <a:solidFill>
+            <a:srgbClr val="EAF3FF"/>
+          </a:solidFill>
+          <a:ln>
+            <a:noFill/>
+          </a:ln>
+          <a:effectLst/>
+        </p:spPr>
+        <p:style>
+          <a:lnRef idx="1">
+            <a:schemeClr val="accent1"/>
+          </a:lnRef>
+          <a:fillRef idx="3">
+            <a:schemeClr val="accent1"/>
+          </a:fillRef>
+          <a:effectRef idx="2">
+            <a:schemeClr val="accent1"/>
+          </a:effectRef>
+          <a:fontRef idx="minor">
+            <a:schemeClr val="lt1"/>
+          </a:fontRef>
+        </p:style>
+        <p:txBody>
+          <a:bodyPr rtlCol="0" anchor="ctr"/>
+          <a:lstStyle/>
+          <a:p/>
+        </p:txBody>
+      </p:sp>
+      <p:sp>
+        <p:nvSpPr>
+          <p:cNvPr id="22" name="TextBox 21"/>
+          <p:cNvSpPr txBox="1"/>
+          <p:nvPr/>
+        </p:nvSpPr>
+        <p:spPr>
+          <a:xfrm>
+            <a:off x="9109481" y="4046220"/>
+            <a:ext cx="2396413" cy="1234439"/>
+          </a:xfrm>
+          <a:prstGeom prst="rect">
+            <a:avLst/>
+          </a:prstGeom>
+          <a:noFill/>
+        </p:spPr>
+        <p:txBody>
+          <a:bodyPr wrap="square" anchor="t" lIns="0" rIns="0" tIns="0" bIns="0"/>
+          <a:lstStyle/>
+          <a:p>
             <a:pPr algn="l"/>
             <a:r>
               <a:rPr sz="1800" b="0" i="0">
                 <a:solidFill>
-                  <a:srgbClr val="54595D"/>
-                </a:solidFill>
-                <a:latin typeface="Calibri"/>
-              </a:rPr>
-              <a:t>Give two MDM security features.</a:t>
-            </a:r>
-          </a:p>
-          <a:p>
-            <a:r>
-              <a:rPr sz="1800" b="1">
-                <a:solidFill>
-                  <a:srgbClr val="03306E"/>
-                </a:solidFill>
-                <a:latin typeface="Calibri"/>
-              </a:rPr>
-              <a:t>Any two of: screen lock, encryption, password enforcement, login limits, MFA, authenticator apps.</a:t>
+                  <a:srgbClr val="202122"/>
+                </a:solidFill>
+                <a:latin typeface="Calibri"/>
+              </a:rPr>
+              <a:t>Retire old kit, manage joiners and leavers.</a:t>
             </a:r>
           </a:p>
         </p:txBody>
@@ -7999,7 +11252,7 @@
                 </a:solidFill>
                 <a:latin typeface="Cambria"/>
               </a:rPr>
-              <a:t>Activity: Write an MDM policy</a:t>
+              <a:t>Quick check: The asset management process</a:t>
             </a:r>
           </a:p>
         </p:txBody>
@@ -8072,19 +11325,17 @@
       </p:sp>
       <p:sp>
         <p:nvSpPr>
-          <p:cNvPr id="6" name="Rounded Rectangle 5"/>
+          <p:cNvPr id="6" name="Oval 5"/>
           <p:cNvSpPr/>
           <p:nvPr/>
         </p:nvSpPr>
         <p:spPr>
           <a:xfrm>
-            <a:off x="548640" y="1508760"/>
-            <a:ext cx="2011680" cy="457200"/>
-          </a:xfrm>
-          <a:prstGeom prst="roundRect">
-            <a:avLst>
-              <a:gd name="adj" fmla="val 50000"/>
-            </a:avLst>
+            <a:off x="548640" y="1691640"/>
+            <a:ext cx="502920" cy="502920"/>
+          </a:xfrm>
+          <a:prstGeom prst="ellipse">
+            <a:avLst/>
           </a:prstGeom>
           <a:solidFill>
             <a:srgbClr val="4EA1FF"/>
@@ -8109,9 +11360,20 @@
           </a:fontRef>
         </p:style>
         <p:txBody>
-          <a:bodyPr rtlCol="0" anchor="ctr"/>
-          <a:lstStyle/>
-          <a:p/>
+          <a:bodyPr rtlCol="0" anchor="ctr" lIns="0" rIns="0" tIns="0" bIns="0"/>
+          <a:lstStyle/>
+          <a:p>
+            <a:pPr algn="ctr"/>
+            <a:r>
+              <a:rPr sz="1600" b="1">
+                <a:solidFill>
+                  <a:srgbClr val="202122"/>
+                </a:solidFill>
+                <a:latin typeface="Calibri"/>
+              </a:rPr>
+              <a:t>1</a:t>
+            </a:r>
+          </a:p>
         </p:txBody>
       </p:sp>
       <p:sp>
@@ -8122,80 +11384,47 @@
         </p:nvSpPr>
         <p:spPr>
           <a:xfrm>
-            <a:off x="548640" y="1508760"/>
-            <a:ext cx="2011680" cy="457200"/>
-          </a:xfrm>
-          <a:prstGeom prst="rect">
-            <a:avLst/>
-          </a:prstGeom>
-          <a:noFill/>
-        </p:spPr>
-        <p:txBody>
-          <a:bodyPr wrap="square" anchor="ctr" lIns="0" rIns="0" tIns="0" bIns="0"/>
-          <a:lstStyle/>
-          <a:p>
-            <a:pPr algn="ctr"/>
-            <a:r>
-              <a:rPr sz="1400" b="1" i="0">
+            <a:off x="1371600" y="1645920"/>
+            <a:ext cx="10271455" cy="1188720"/>
+          </a:xfrm>
+          <a:prstGeom prst="rect">
+            <a:avLst/>
+          </a:prstGeom>
+          <a:noFill/>
+        </p:spPr>
+        <p:txBody>
+          <a:bodyPr wrap="square" anchor="t" lIns="0" rIns="0" tIns="0" bIns="0"/>
+          <a:lstStyle/>
+          <a:p>
+            <a:pPr algn="l"/>
+            <a:r>
+              <a:rPr sz="2400" b="0" i="0">
                 <a:solidFill>
                   <a:srgbClr val="202122"/>
                 </a:solidFill>
                 <a:latin typeface="Calibri"/>
               </a:rPr>
-              <a:t>25 minutes</a:t>
-            </a:r>
-          </a:p>
-        </p:txBody>
-      </p:sp>
-      <p:sp>
-        <p:nvSpPr>
-          <p:cNvPr id="8" name="TextBox 7"/>
-          <p:cNvSpPr txBox="1"/>
-          <p:nvPr/>
-        </p:nvSpPr>
-        <p:spPr>
-          <a:xfrm>
-            <a:off x="2743200" y="1508760"/>
-            <a:ext cx="4754880" cy="457200"/>
-          </a:xfrm>
-          <a:prstGeom prst="rect">
-            <a:avLst/>
-          </a:prstGeom>
-          <a:noFill/>
-        </p:spPr>
-        <p:txBody>
-          <a:bodyPr wrap="square" anchor="ctr" lIns="0" rIns="0" tIns="0" bIns="0"/>
-          <a:lstStyle/>
-          <a:p>
-            <a:pPr algn="l"/>
-            <a:r>
-              <a:rPr sz="1400" b="0" i="1">
-                <a:solidFill>
-                  <a:srgbClr val="54595D"/>
-                </a:solidFill>
-                <a:latin typeface="Calibri"/>
-              </a:rPr>
-              <a:t>Pairs</a:t>
-            </a:r>
-          </a:p>
-        </p:txBody>
-      </p:sp>
-      <p:sp>
-        <p:nvSpPr>
-          <p:cNvPr id="9" name="Oval 8"/>
+              <a:t>Name the four stages.</a:t>
+            </a:r>
+          </a:p>
+        </p:txBody>
+      </p:sp>
+      <p:sp>
+        <p:nvSpPr>
+          <p:cNvPr id="8" name="Oval 7"/>
           <p:cNvSpPr/>
           <p:nvPr/>
         </p:nvSpPr>
         <p:spPr>
           <a:xfrm>
-            <a:off x="548640" y="2482596"/>
-            <a:ext cx="384048" cy="384048"/>
+            <a:off x="548640" y="3108960"/>
+            <a:ext cx="502920" cy="502920"/>
           </a:xfrm>
           <a:prstGeom prst="ellipse">
             <a:avLst/>
           </a:prstGeom>
           <a:solidFill>
-            <a:srgbClr val="0645AD"/>
+            <a:srgbClr val="4EA1FF"/>
           </a:solidFill>
           <a:ln>
             <a:noFill/>
@@ -8222,66 +11451,66 @@
           <a:p>
             <a:pPr algn="ctr"/>
             <a:r>
-              <a:rPr sz="1300" b="1">
-                <a:solidFill>
-                  <a:srgbClr val="FFFFFF"/>
-                </a:solidFill>
-                <a:latin typeface="Calibri"/>
-              </a:rPr>
-              <a:t>1</a:t>
-            </a:r>
-          </a:p>
-        </p:txBody>
-      </p:sp>
-      <p:sp>
-        <p:nvSpPr>
-          <p:cNvPr id="10" name="TextBox 9"/>
-          <p:cNvSpPr txBox="1"/>
-          <p:nvPr/>
-        </p:nvSpPr>
-        <p:spPr>
-          <a:xfrm>
-            <a:off x="1143000" y="2240280"/>
-            <a:ext cx="5943600" cy="868680"/>
-          </a:xfrm>
-          <a:prstGeom prst="rect">
-            <a:avLst/>
-          </a:prstGeom>
-          <a:noFill/>
-        </p:spPr>
-        <p:txBody>
-          <a:bodyPr wrap="square" anchor="ctr" lIns="0" rIns="0" tIns="0" bIns="0"/>
+              <a:rPr sz="1600" b="1">
+                <a:solidFill>
+                  <a:srgbClr val="202122"/>
+                </a:solidFill>
+                <a:latin typeface="Calibri"/>
+              </a:rPr>
+              <a:t>2</a:t>
+            </a:r>
+          </a:p>
+        </p:txBody>
+      </p:sp>
+      <p:sp>
+        <p:nvSpPr>
+          <p:cNvPr id="9" name="TextBox 8"/>
+          <p:cNvSpPr txBox="1"/>
+          <p:nvPr/>
+        </p:nvSpPr>
+        <p:spPr>
+          <a:xfrm>
+            <a:off x="1371600" y="3063240"/>
+            <a:ext cx="10271455" cy="1188720"/>
+          </a:xfrm>
+          <a:prstGeom prst="rect">
+            <a:avLst/>
+          </a:prstGeom>
+          <a:noFill/>
+        </p:spPr>
+        <p:txBody>
+          <a:bodyPr wrap="square" anchor="t" lIns="0" rIns="0" tIns="0" bIns="0"/>
           <a:lstStyle/>
           <a:p>
             <a:pPr algn="l"/>
             <a:r>
-              <a:rPr sz="1700" b="0" i="0">
+              <a:rPr sz="2400" b="0" i="0">
                 <a:solidFill>
                   <a:srgbClr val="202122"/>
                 </a:solidFill>
                 <a:latin typeface="Calibri"/>
               </a:rPr>
-              <a:t>A charity is giving 25 staff smartphones for fieldwork.</a:t>
-            </a:r>
-          </a:p>
-        </p:txBody>
-      </p:sp>
-      <p:sp>
-        <p:nvSpPr>
-          <p:cNvPr id="11" name="Oval 10"/>
+              <a:t>Why track licences?</a:t>
+            </a:r>
+          </a:p>
+        </p:txBody>
+      </p:sp>
+      <p:sp>
+        <p:nvSpPr>
+          <p:cNvPr id="10" name="Oval 9"/>
           <p:cNvSpPr/>
           <p:nvPr/>
         </p:nvSpPr>
         <p:spPr>
           <a:xfrm>
-            <a:off x="548640" y="3461004"/>
-            <a:ext cx="384048" cy="384048"/>
+            <a:off x="548640" y="4526280"/>
+            <a:ext cx="502920" cy="502920"/>
           </a:xfrm>
           <a:prstGeom prst="ellipse">
             <a:avLst/>
           </a:prstGeom>
           <a:solidFill>
-            <a:srgbClr val="0645AD"/>
+            <a:srgbClr val="4EA1FF"/>
           </a:solidFill>
           <a:ln>
             <a:noFill/>
@@ -8308,13 +11537,46 @@
           <a:p>
             <a:pPr algn="ctr"/>
             <a:r>
-              <a:rPr sz="1300" b="1">
-                <a:solidFill>
-                  <a:srgbClr val="FFFFFF"/>
-                </a:solidFill>
-                <a:latin typeface="Calibri"/>
-              </a:rPr>
-              <a:t>2</a:t>
+              <a:rPr sz="1600" b="1">
+                <a:solidFill>
+                  <a:srgbClr val="202122"/>
+                </a:solidFill>
+                <a:latin typeface="Calibri"/>
+              </a:rPr>
+              <a:t>3</a:t>
+            </a:r>
+          </a:p>
+        </p:txBody>
+      </p:sp>
+      <p:sp>
+        <p:nvSpPr>
+          <p:cNvPr id="11" name="TextBox 10"/>
+          <p:cNvSpPr txBox="1"/>
+          <p:nvPr/>
+        </p:nvSpPr>
+        <p:spPr>
+          <a:xfrm>
+            <a:off x="1371600" y="4480560"/>
+            <a:ext cx="10271455" cy="1188720"/>
+          </a:xfrm>
+          <a:prstGeom prst="rect">
+            <a:avLst/>
+          </a:prstGeom>
+          <a:noFill/>
+        </p:spPr>
+        <p:txBody>
+          <a:bodyPr wrap="square" anchor="t" lIns="0" rIns="0" tIns="0" bIns="0"/>
+          <a:lstStyle/>
+          <a:p>
+            <a:pPr algn="l"/>
+            <a:r>
+              <a:rPr sz="2400" b="0" i="0">
+                <a:solidFill>
+                  <a:srgbClr val="202122"/>
+                </a:solidFill>
+                <a:latin typeface="Calibri"/>
+              </a:rPr>
+              <a:t>What happens at decommissioning?</a:t>
             </a:r>
           </a:p>
         </p:txBody>
@@ -8327,362 +11589,27 @@
         </p:nvSpPr>
         <p:spPr>
           <a:xfrm>
-            <a:off x="1143000" y="3218688"/>
-            <a:ext cx="5943600" cy="868680"/>
-          </a:xfrm>
-          <a:prstGeom prst="rect">
-            <a:avLst/>
-          </a:prstGeom>
-          <a:noFill/>
-        </p:spPr>
-        <p:txBody>
-          <a:bodyPr wrap="square" anchor="ctr" lIns="0" rIns="0" tIns="0" bIns="0"/>
+            <a:off x="548640" y="5852160"/>
+            <a:ext cx="11094415" cy="365760"/>
+          </a:xfrm>
+          <a:prstGeom prst="rect">
+            <a:avLst/>
+          </a:prstGeom>
+          <a:noFill/>
+        </p:spPr>
+        <p:txBody>
+          <a:bodyPr wrap="square" anchor="t" lIns="0" rIns="0" tIns="0" bIns="0"/>
           <a:lstStyle/>
           <a:p>
             <a:pPr algn="l"/>
             <a:r>
-              <a:rPr sz="1700" b="0" i="0">
-                <a:solidFill>
-                  <a:srgbClr val="202122"/>
-                </a:solidFill>
-                <a:latin typeface="Calibri"/>
-              </a:rPr>
-              <a:t>Choose the MDM settings you would enforce and explain each.</a:t>
-            </a:r>
-          </a:p>
-        </p:txBody>
-      </p:sp>
-      <p:sp>
-        <p:nvSpPr>
-          <p:cNvPr id="13" name="Oval 12"/>
-          <p:cNvSpPr/>
-          <p:nvPr/>
-        </p:nvSpPr>
-        <p:spPr>
-          <a:xfrm>
-            <a:off x="548640" y="4439412"/>
-            <a:ext cx="384048" cy="384048"/>
-          </a:xfrm>
-          <a:prstGeom prst="ellipse">
-            <a:avLst/>
-          </a:prstGeom>
-          <a:solidFill>
-            <a:srgbClr val="0645AD"/>
-          </a:solidFill>
-          <a:ln>
-            <a:noFill/>
-          </a:ln>
-          <a:effectLst/>
-        </p:spPr>
-        <p:style>
-          <a:lnRef idx="1">
-            <a:schemeClr val="accent1"/>
-          </a:lnRef>
-          <a:fillRef idx="3">
-            <a:schemeClr val="accent1"/>
-          </a:fillRef>
-          <a:effectRef idx="2">
-            <a:schemeClr val="accent1"/>
-          </a:effectRef>
-          <a:fontRef idx="minor">
-            <a:schemeClr val="lt1"/>
-          </a:fontRef>
-        </p:style>
-        <p:txBody>
-          <a:bodyPr rtlCol="0" anchor="ctr" lIns="0" rIns="0" tIns="0" bIns="0"/>
-          <a:lstStyle/>
-          <a:p>
-            <a:pPr algn="ctr"/>
-            <a:r>
-              <a:rPr sz="1300" b="1">
-                <a:solidFill>
-                  <a:srgbClr val="FFFFFF"/>
-                </a:solidFill>
-                <a:latin typeface="Calibri"/>
-              </a:rPr>
-              <a:t>3</a:t>
-            </a:r>
-          </a:p>
-        </p:txBody>
-      </p:sp>
-      <p:sp>
-        <p:nvSpPr>
-          <p:cNvPr id="14" name="TextBox 13"/>
-          <p:cNvSpPr txBox="1"/>
-          <p:nvPr/>
-        </p:nvSpPr>
-        <p:spPr>
-          <a:xfrm>
-            <a:off x="1143000" y="4197096"/>
-            <a:ext cx="5943600" cy="868680"/>
-          </a:xfrm>
-          <a:prstGeom prst="rect">
-            <a:avLst/>
-          </a:prstGeom>
-          <a:noFill/>
-        </p:spPr>
-        <p:txBody>
-          <a:bodyPr wrap="square" anchor="ctr" lIns="0" rIns="0" tIns="0" bIns="0"/>
-          <a:lstStyle/>
-          <a:p>
-            <a:pPr algn="l"/>
-            <a:r>
-              <a:rPr sz="1700" b="0" i="0">
-                <a:solidFill>
-                  <a:srgbClr val="202122"/>
-                </a:solidFill>
-                <a:latin typeface="Calibri"/>
-              </a:rPr>
-              <a:t>Decide which features to disable and why.</a:t>
-            </a:r>
-          </a:p>
-        </p:txBody>
-      </p:sp>
-      <p:sp>
-        <p:nvSpPr>
-          <p:cNvPr id="15" name="Oval 14"/>
-          <p:cNvSpPr/>
-          <p:nvPr/>
-        </p:nvSpPr>
-        <p:spPr>
-          <a:xfrm>
-            <a:off x="548640" y="5417820"/>
-            <a:ext cx="384048" cy="384048"/>
-          </a:xfrm>
-          <a:prstGeom prst="ellipse">
-            <a:avLst/>
-          </a:prstGeom>
-          <a:solidFill>
-            <a:srgbClr val="0645AD"/>
-          </a:solidFill>
-          <a:ln>
-            <a:noFill/>
-          </a:ln>
-          <a:effectLst/>
-        </p:spPr>
-        <p:style>
-          <a:lnRef idx="1">
-            <a:schemeClr val="accent1"/>
-          </a:lnRef>
-          <a:fillRef idx="3">
-            <a:schemeClr val="accent1"/>
-          </a:fillRef>
-          <a:effectRef idx="2">
-            <a:schemeClr val="accent1"/>
-          </a:effectRef>
-          <a:fontRef idx="minor">
-            <a:schemeClr val="lt1"/>
-          </a:fontRef>
-        </p:style>
-        <p:txBody>
-          <a:bodyPr rtlCol="0" anchor="ctr" lIns="0" rIns="0" tIns="0" bIns="0"/>
-          <a:lstStyle/>
-          <a:p>
-            <a:pPr algn="ctr"/>
-            <a:r>
-              <a:rPr sz="1300" b="1">
-                <a:solidFill>
-                  <a:srgbClr val="FFFFFF"/>
-                </a:solidFill>
-                <a:latin typeface="Calibri"/>
-              </a:rPr>
-              <a:t>4</a:t>
-            </a:r>
-          </a:p>
-        </p:txBody>
-      </p:sp>
-      <p:sp>
-        <p:nvSpPr>
-          <p:cNvPr id="16" name="TextBox 15"/>
-          <p:cNvSpPr txBox="1"/>
-          <p:nvPr/>
-        </p:nvSpPr>
-        <p:spPr>
-          <a:xfrm>
-            <a:off x="1143000" y="5175504"/>
-            <a:ext cx="5943600" cy="868680"/>
-          </a:xfrm>
-          <a:prstGeom prst="rect">
-            <a:avLst/>
-          </a:prstGeom>
-          <a:noFill/>
-        </p:spPr>
-        <p:txBody>
-          <a:bodyPr wrap="square" anchor="ctr" lIns="0" rIns="0" tIns="0" bIns="0"/>
-          <a:lstStyle/>
-          <a:p>
-            <a:pPr algn="l"/>
-            <a:r>
-              <a:rPr sz="1700" b="0" i="0">
-                <a:solidFill>
-                  <a:srgbClr val="202122"/>
-                </a:solidFill>
-                <a:latin typeface="Calibri"/>
-              </a:rPr>
-              <a:t>Write the steps to follow when a phone is reported lost.</a:t>
-            </a:r>
-          </a:p>
-        </p:txBody>
-      </p:sp>
-      <p:sp>
-        <p:nvSpPr>
-          <p:cNvPr id="17" name="Rounded Rectangle 16"/>
-          <p:cNvSpPr/>
-          <p:nvPr/>
-        </p:nvSpPr>
-        <p:spPr>
-          <a:xfrm>
-            <a:off x="7772400" y="1508760"/>
-            <a:ext cx="3867912" cy="4572000"/>
-          </a:xfrm>
-          <a:prstGeom prst="roundRect">
-            <a:avLst>
-              <a:gd name="adj" fmla="val 8000"/>
-            </a:avLst>
-          </a:prstGeom>
-          <a:solidFill>
-            <a:srgbClr val="EAF3FF"/>
-          </a:solidFill>
-          <a:ln>
-            <a:noFill/>
-          </a:ln>
-          <a:effectLst/>
-        </p:spPr>
-        <p:style>
-          <a:lnRef idx="1">
-            <a:schemeClr val="accent1"/>
-          </a:lnRef>
-          <a:fillRef idx="3">
-            <a:schemeClr val="accent1"/>
-          </a:fillRef>
-          <a:effectRef idx="2">
-            <a:schemeClr val="accent1"/>
-          </a:effectRef>
-          <a:fontRef idx="minor">
-            <a:schemeClr val="lt1"/>
-          </a:fontRef>
-        </p:style>
-        <p:txBody>
-          <a:bodyPr rtlCol="0" anchor="ctr"/>
-          <a:lstStyle/>
-          <a:p/>
-        </p:txBody>
-      </p:sp>
-      <p:sp>
-        <p:nvSpPr>
-          <p:cNvPr id="18" name="TextBox 17"/>
-          <p:cNvSpPr txBox="1"/>
-          <p:nvPr/>
-        </p:nvSpPr>
-        <p:spPr>
-          <a:xfrm>
-            <a:off x="8046720" y="1737360"/>
-            <a:ext cx="3291840" cy="365760"/>
-          </a:xfrm>
-          <a:prstGeom prst="rect">
-            <a:avLst/>
-          </a:prstGeom>
-          <a:noFill/>
-        </p:spPr>
-        <p:txBody>
-          <a:bodyPr wrap="square" anchor="t" lIns="0" rIns="0" tIns="0" bIns="0"/>
-          <a:lstStyle/>
-          <a:p>
-            <a:pPr algn="l"/>
-            <a:r>
-              <a:rPr sz="1300" b="1" i="0">
-                <a:solidFill>
-                  <a:srgbClr val="0645AD"/>
-                </a:solidFill>
-                <a:latin typeface="Calibri"/>
-              </a:rPr>
-              <a:t>SUCCESS CRITERIA</a:t>
-            </a:r>
-          </a:p>
-        </p:txBody>
-      </p:sp>
-      <p:sp>
-        <p:nvSpPr>
-          <p:cNvPr id="19" name="TextBox 18"/>
-          <p:cNvSpPr txBox="1"/>
-          <p:nvPr/>
-        </p:nvSpPr>
-        <p:spPr>
-          <a:xfrm>
-            <a:off x="8046720" y="2240280"/>
-            <a:ext cx="3337560" cy="3657600"/>
-          </a:xfrm>
-          <a:prstGeom prst="rect">
-            <a:avLst/>
-          </a:prstGeom>
-          <a:noFill/>
-        </p:spPr>
-        <p:txBody>
-          <a:bodyPr wrap="square" lIns="0" rIns="0" tIns="0" bIns="0">
-            <a:spAutoFit/>
-          </a:bodyPr>
-          <a:lstStyle/>
-          <a:p>
-            <a:pPr marL="274320" indent="-274320">
-              <a:spcAft>
-                <a:spcPts val="810"/>
-              </a:spcAft>
-              <a:buClr>
-                <a:srgbClr val="0645AD"/>
-              </a:buClr>
-              <a:buFont typeface="Arial"/>
-              <a:buChar char="•"/>
-            </a:pPr>
-            <a:r>
-              <a:rPr sz="1800" b="0">
-                <a:solidFill>
-                  <a:srgbClr val="202122"/>
-                </a:solidFill>
-                <a:latin typeface="Calibri"/>
-              </a:rPr>
-              <a:t>Security and usability balanced</a:t>
-            </a:r>
-          </a:p>
-          <a:p>
-            <a:pPr marL="274320" indent="-274320">
-              <a:spcAft>
-                <a:spcPts val="810"/>
-              </a:spcAft>
-              <a:buClr>
-                <a:srgbClr val="0645AD"/>
-              </a:buClr>
-              <a:buFont typeface="Arial"/>
-              <a:buChar char="•"/>
-            </a:pPr>
-            <a:r>
-              <a:rPr sz="1800" b="0">
-                <a:solidFill>
-                  <a:srgbClr val="202122"/>
-                </a:solidFill>
-                <a:latin typeface="Calibri"/>
-              </a:rPr>
-              <a:t>Lost-device steps include remote wipe</a:t>
-            </a:r>
-          </a:p>
-          <a:p>
-            <a:pPr marL="274320" indent="-274320">
-              <a:spcAft>
-                <a:spcPts val="810"/>
-              </a:spcAft>
-              <a:buClr>
-                <a:srgbClr val="0645AD"/>
-              </a:buClr>
-              <a:buFont typeface="Arial"/>
-              <a:buChar char="•"/>
-            </a:pPr>
-            <a:r>
-              <a:rPr sz="1800" b="0">
-                <a:solidFill>
-                  <a:srgbClr val="202122"/>
-                </a:solidFill>
-                <a:latin typeface="Calibri"/>
-              </a:rPr>
-              <a:t>Personal data considered</a:t>
+              <a:rPr sz="1300" b="0" i="1">
+                <a:solidFill>
+                  <a:srgbClr val="54595D"/>
+                </a:solidFill>
+                <a:latin typeface="Calibri"/>
+              </a:rPr>
+              <a:t>Answer on mini whiteboards or in your book. Answers are in the speaker notes.</a:t>
             </a:r>
           </a:p>
         </p:txBody>
@@ -8701,7 +11628,7 @@
     <p:bg>
       <p:bgPr>
         <a:solidFill>
-          <a:srgbClr val="03306E"/>
+          <a:srgbClr val="FFFFFF"/>
         </a:solidFill>
         <a:effectLst/>
       </p:bgPr>
@@ -8737,7 +11664,7 @@
             <a:r>
               <a:rPr sz="1100" b="1" i="0">
                 <a:solidFill>
-                  <a:srgbClr val="A9C8F0"/>
+                  <a:srgbClr val="54595D"/>
                 </a:solidFill>
                 <a:latin typeface="Calibri"/>
               </a:rPr>
@@ -8770,25 +11697,206 @@
             <a:r>
               <a:rPr sz="3200" b="1" i="0">
                 <a:solidFill>
-                  <a:srgbClr val="FFFFFF"/>
+                  <a:srgbClr val="03306E"/>
                 </a:solidFill>
                 <a:latin typeface="Cambria"/>
               </a:rPr>
-              <a:t>Exit ticket</a:t>
-            </a:r>
-          </a:p>
-        </p:txBody>
-      </p:sp>
-      <p:sp>
-        <p:nvSpPr>
-          <p:cNvPr id="4" name="Oval 3"/>
+              <a:t>Mobile Device Management (MDM)</a:t>
+            </a:r>
+          </a:p>
+        </p:txBody>
+      </p:sp>
+      <p:sp>
+        <p:nvSpPr>
+          <p:cNvPr id="4" name="TextBox 3"/>
+          <p:cNvSpPr txBox="1"/>
+          <p:nvPr/>
+        </p:nvSpPr>
+        <p:spPr>
+          <a:xfrm>
+            <a:off x="548640" y="6446520"/>
+            <a:ext cx="8229600" cy="274320"/>
+          </a:xfrm>
+          <a:prstGeom prst="rect">
+            <a:avLst/>
+          </a:prstGeom>
+          <a:noFill/>
+        </p:spPr>
+        <p:txBody>
+          <a:bodyPr wrap="square" anchor="t" lIns="0" rIns="0" tIns="0" bIns="0"/>
+          <a:lstStyle/>
+          <a:p>
+            <a:pPr algn="l"/>
+            <a:r>
+              <a:rPr sz="1000" b="0" i="0">
+                <a:solidFill>
+                  <a:srgbClr val="54595D"/>
+                </a:solidFill>
+                <a:latin typeface="Calibri"/>
+              </a:rPr>
+              <a:t>Digital Support and Security T Level  ·  Asset, Version and Mobile Device Management</a:t>
+            </a:r>
+          </a:p>
+        </p:txBody>
+      </p:sp>
+      <p:sp>
+        <p:nvSpPr>
+          <p:cNvPr id="5" name="TextBox 4"/>
+          <p:cNvSpPr txBox="1"/>
+          <p:nvPr/>
+        </p:nvSpPr>
+        <p:spPr>
+          <a:xfrm>
+            <a:off x="10728655" y="6446520"/>
+            <a:ext cx="914400" cy="274320"/>
+          </a:xfrm>
+          <a:prstGeom prst="rect">
+            <a:avLst/>
+          </a:prstGeom>
+          <a:noFill/>
+        </p:spPr>
+        <p:txBody>
+          <a:bodyPr wrap="square" anchor="t" lIns="0" rIns="0" tIns="0" bIns="0"/>
+          <a:lstStyle/>
+          <a:p>
+            <a:pPr algn="r"/>
+            <a:r>
+              <a:rPr sz="1000" b="0" i="0">
+                <a:solidFill>
+                  <a:srgbClr val="54595D"/>
+                </a:solidFill>
+                <a:latin typeface="Calibri"/>
+              </a:rPr>
+              <a:t>9</a:t>
+            </a:r>
+          </a:p>
+        </p:txBody>
+      </p:sp>
+      <p:sp>
+        <p:nvSpPr>
+          <p:cNvPr id="6" name="TextBox 5"/>
+          <p:cNvSpPr txBox="1"/>
+          <p:nvPr/>
+        </p:nvSpPr>
+        <p:spPr>
+          <a:xfrm>
+            <a:off x="548640" y="1554480"/>
+            <a:ext cx="6720840" cy="4617720"/>
+          </a:xfrm>
+          <a:prstGeom prst="rect">
+            <a:avLst/>
+          </a:prstGeom>
+          <a:noFill/>
+        </p:spPr>
+        <p:txBody>
+          <a:bodyPr wrap="square" lIns="0" rIns="0" tIns="0" bIns="0">
+            <a:spAutoFit/>
+          </a:bodyPr>
+          <a:lstStyle/>
+          <a:p>
+            <a:pPr>
+              <a:spcAft>
+                <a:spcPts val="1320"/>
+              </a:spcAft>
+            </a:pPr>
+            <a:r>
+              <a:rPr sz="2200" b="0">
+                <a:solidFill>
+                  <a:srgbClr val="202122"/>
+                </a:solidFill>
+                <a:latin typeface="Calibri"/>
+              </a:rPr>
+              <a:t>MDM software lets IT manage phones and tablets centrally.</a:t>
+            </a:r>
+          </a:p>
+          <a:p>
+            <a:pPr>
+              <a:spcAft>
+                <a:spcPts val="1320"/>
+              </a:spcAft>
+            </a:pPr>
+            <a:r>
+              <a:rPr sz="2200" b="0">
+                <a:solidFill>
+                  <a:srgbClr val="202122"/>
+                </a:solidFill>
+                <a:latin typeface="Calibri"/>
+              </a:rPr>
+              <a:t>It can track and locate devices, secure them and configure Wi-Fi, mobile data, hotspots, Bluetooth and email. It can separate work and personal profiles, so company data stays in the work area, and enforce policies such as a screen lock, encryption, password rules, login attempt limits and MFA.</a:t>
+            </a:r>
+          </a:p>
+          <a:p>
+            <a:pPr>
+              <a:spcAft>
+                <a:spcPts val="1320"/>
+              </a:spcAft>
+            </a:pPr>
+            <a:r>
+              <a:rPr sz="2200" b="0">
+                <a:solidFill>
+                  <a:srgbClr val="202122"/>
+                </a:solidFill>
+                <a:latin typeface="Calibri"/>
+              </a:rPr>
+              <a:t>Remotely, it can wipe a lost device, disable features, restrict app stores and control backup and sync.</a:t>
+            </a:r>
+          </a:p>
+        </p:txBody>
+      </p:sp>
+      <p:sp>
+        <p:nvSpPr>
+          <p:cNvPr id="7" name="Rounded Rectangle 6"/>
           <p:cNvSpPr/>
           <p:nvPr/>
         </p:nvSpPr>
         <p:spPr>
           <a:xfrm>
-            <a:off x="548640" y="1737360"/>
-            <a:ext cx="502920" cy="502920"/>
+            <a:off x="7772400" y="1554480"/>
+            <a:ext cx="3867912" cy="4526280"/>
+          </a:xfrm>
+          <a:prstGeom prst="roundRect">
+            <a:avLst>
+              <a:gd name="adj" fmla="val 8000"/>
+            </a:avLst>
+          </a:prstGeom>
+          <a:solidFill>
+            <a:srgbClr val="03306E"/>
+          </a:solidFill>
+          <a:ln>
+            <a:noFill/>
+          </a:ln>
+          <a:effectLst/>
+        </p:spPr>
+        <p:style>
+          <a:lnRef idx="1">
+            <a:schemeClr val="accent1"/>
+          </a:lnRef>
+          <a:fillRef idx="3">
+            <a:schemeClr val="accent1"/>
+          </a:fillRef>
+          <a:effectRef idx="2">
+            <a:schemeClr val="accent1"/>
+          </a:effectRef>
+          <a:fontRef idx="minor">
+            <a:schemeClr val="lt1"/>
+          </a:fontRef>
+        </p:style>
+        <p:txBody>
+          <a:bodyPr rtlCol="0" anchor="ctr"/>
+          <a:lstStyle/>
+          <a:p/>
+        </p:txBody>
+      </p:sp>
+      <p:sp>
+        <p:nvSpPr>
+          <p:cNvPr id="8" name="Oval 7"/>
+          <p:cNvSpPr/>
+          <p:nvPr/>
+        </p:nvSpPr>
+        <p:spPr>
+          <a:xfrm>
+            <a:off x="8046720" y="1828800"/>
+            <a:ext cx="548640" cy="548640"/>
           </a:xfrm>
           <a:prstGeom prst="ellipse">
             <a:avLst/>
@@ -8821,394 +11929,79 @@
           <a:p>
             <a:pPr algn="ctr"/>
             <a:r>
-              <a:rPr sz="1700" b="1">
+              <a:rPr sz="1300" b="1">
                 <a:solidFill>
                   <a:srgbClr val="202122"/>
                 </a:solidFill>
                 <a:latin typeface="Calibri"/>
               </a:rPr>
-              <a:t>1</a:t>
-            </a:r>
-          </a:p>
-        </p:txBody>
-      </p:sp>
-      <p:sp>
-        <p:nvSpPr>
-          <p:cNvPr id="5" name="TextBox 4"/>
-          <p:cNvSpPr txBox="1"/>
-          <p:nvPr/>
-        </p:nvSpPr>
-        <p:spPr>
-          <a:xfrm>
-            <a:off x="1325880" y="1645920"/>
-            <a:ext cx="6583680" cy="822960"/>
-          </a:xfrm>
-          <a:prstGeom prst="rect">
-            <a:avLst/>
-          </a:prstGeom>
-          <a:noFill/>
-        </p:spPr>
-        <p:txBody>
-          <a:bodyPr wrap="square" anchor="ctr" lIns="0" rIns="0" tIns="0" bIns="0"/>
+              <a:t>e.g.</a:t>
+            </a:r>
+          </a:p>
+        </p:txBody>
+      </p:sp>
+      <p:sp>
+        <p:nvSpPr>
+          <p:cNvPr id="9" name="TextBox 8"/>
+          <p:cNvSpPr txBox="1"/>
+          <p:nvPr/>
+        </p:nvSpPr>
+        <p:spPr>
+          <a:xfrm>
+            <a:off x="8046720" y="2560320"/>
+            <a:ext cx="3291840" cy="365760"/>
+          </a:xfrm>
+          <a:prstGeom prst="rect">
+            <a:avLst/>
+          </a:prstGeom>
+          <a:noFill/>
+        </p:spPr>
+        <p:txBody>
+          <a:bodyPr wrap="square" anchor="t" lIns="0" rIns="0" tIns="0" bIns="0"/>
           <a:lstStyle/>
           <a:p>
             <a:pPr algn="l"/>
             <a:r>
-              <a:rPr sz="2000" b="0" i="0">
+              <a:rPr sz="1300" b="1" i="0">
+                <a:solidFill>
+                  <a:srgbClr val="A9C8F0"/>
+                </a:solidFill>
+                <a:latin typeface="Calibri"/>
+              </a:rPr>
+              <a:t>EXAMPLE</a:t>
+            </a:r>
+          </a:p>
+        </p:txBody>
+      </p:sp>
+      <p:sp>
+        <p:nvSpPr>
+          <p:cNvPr id="10" name="TextBox 9"/>
+          <p:cNvSpPr txBox="1"/>
+          <p:nvPr/>
+        </p:nvSpPr>
+        <p:spPr>
+          <a:xfrm>
+            <a:off x="8046720" y="2971800"/>
+            <a:ext cx="3291840" cy="2971800"/>
+          </a:xfrm>
+          <a:prstGeom prst="rect">
+            <a:avLst/>
+          </a:prstGeom>
+          <a:noFill/>
+        </p:spPr>
+        <p:txBody>
+          <a:bodyPr wrap="square" anchor="t" lIns="0" rIns="0" tIns="0" bIns="0"/>
+          <a:lstStyle/>
+          <a:p>
+            <a:pPr algn="l"/>
+            <a:r>
+              <a:rPr sz="1900" b="0" i="0">
                 <a:solidFill>
                   <a:srgbClr val="FFFFFF"/>
                 </a:solidFill>
-                <a:latin typeface="Calibri"/>
-              </a:rPr>
-              <a:t>Why track software licences?</a:t>
-            </a:r>
-          </a:p>
-        </p:txBody>
-      </p:sp>
-      <p:sp>
-        <p:nvSpPr>
-          <p:cNvPr id="6" name="Oval 5"/>
-          <p:cNvSpPr/>
-          <p:nvPr/>
-        </p:nvSpPr>
-        <p:spPr>
-          <a:xfrm>
-            <a:off x="548640" y="2697480"/>
-            <a:ext cx="502920" cy="502920"/>
-          </a:xfrm>
-          <a:prstGeom prst="ellipse">
-            <a:avLst/>
-          </a:prstGeom>
-          <a:solidFill>
-            <a:srgbClr val="4EA1FF"/>
-          </a:solidFill>
-          <a:ln>
-            <a:noFill/>
-          </a:ln>
-          <a:effectLst/>
-        </p:spPr>
-        <p:style>
-          <a:lnRef idx="1">
-            <a:schemeClr val="accent1"/>
-          </a:lnRef>
-          <a:fillRef idx="3">
-            <a:schemeClr val="accent1"/>
-          </a:fillRef>
-          <a:effectRef idx="2">
-            <a:schemeClr val="accent1"/>
-          </a:effectRef>
-          <a:fontRef idx="minor">
-            <a:schemeClr val="lt1"/>
-          </a:fontRef>
-        </p:style>
-        <p:txBody>
-          <a:bodyPr rtlCol="0" anchor="ctr" lIns="0" rIns="0" tIns="0" bIns="0"/>
-          <a:lstStyle/>
-          <a:p>
-            <a:pPr algn="ctr"/>
-            <a:r>
-              <a:rPr sz="1700" b="1">
-                <a:solidFill>
-                  <a:srgbClr val="202122"/>
-                </a:solidFill>
-                <a:latin typeface="Calibri"/>
-              </a:rPr>
-              <a:t>2</a:t>
-            </a:r>
-          </a:p>
-        </p:txBody>
-      </p:sp>
-      <p:sp>
-        <p:nvSpPr>
-          <p:cNvPr id="7" name="TextBox 6"/>
-          <p:cNvSpPr txBox="1"/>
-          <p:nvPr/>
-        </p:nvSpPr>
-        <p:spPr>
-          <a:xfrm>
-            <a:off x="1325880" y="2606040"/>
-            <a:ext cx="6583680" cy="822960"/>
-          </a:xfrm>
-          <a:prstGeom prst="rect">
-            <a:avLst/>
-          </a:prstGeom>
-          <a:noFill/>
-        </p:spPr>
-        <p:txBody>
-          <a:bodyPr wrap="square" anchor="ctr" lIns="0" rIns="0" tIns="0" bIns="0"/>
-          <a:lstStyle/>
-          <a:p>
-            <a:pPr algn="l"/>
-            <a:r>
-              <a:rPr sz="2000" b="0" i="0">
-                <a:solidFill>
-                  <a:srgbClr val="FFFFFF"/>
-                </a:solidFill>
-                <a:latin typeface="Calibri"/>
-              </a:rPr>
-              <a:t>What is the benefit of separating work and personal profiles?</a:t>
-            </a:r>
-          </a:p>
-        </p:txBody>
-      </p:sp>
-      <p:sp>
-        <p:nvSpPr>
-          <p:cNvPr id="8" name="Oval 7"/>
-          <p:cNvSpPr/>
-          <p:nvPr/>
-        </p:nvSpPr>
-        <p:spPr>
-          <a:xfrm>
-            <a:off x="548640" y="3657600"/>
-            <a:ext cx="502920" cy="502920"/>
-          </a:xfrm>
-          <a:prstGeom prst="ellipse">
-            <a:avLst/>
-          </a:prstGeom>
-          <a:solidFill>
-            <a:srgbClr val="4EA1FF"/>
-          </a:solidFill>
-          <a:ln>
-            <a:noFill/>
-          </a:ln>
-          <a:effectLst/>
-        </p:spPr>
-        <p:style>
-          <a:lnRef idx="1">
-            <a:schemeClr val="accent1"/>
-          </a:lnRef>
-          <a:fillRef idx="3">
-            <a:schemeClr val="accent1"/>
-          </a:fillRef>
-          <a:effectRef idx="2">
-            <a:schemeClr val="accent1"/>
-          </a:effectRef>
-          <a:fontRef idx="minor">
-            <a:schemeClr val="lt1"/>
-          </a:fontRef>
-        </p:style>
-        <p:txBody>
-          <a:bodyPr rtlCol="0" anchor="ctr" lIns="0" rIns="0" tIns="0" bIns="0"/>
-          <a:lstStyle/>
-          <a:p>
-            <a:pPr algn="ctr"/>
-            <a:r>
-              <a:rPr sz="1700" b="1">
-                <a:solidFill>
-                  <a:srgbClr val="202122"/>
-                </a:solidFill>
-                <a:latin typeface="Calibri"/>
-              </a:rPr>
-              <a:t>3</a:t>
-            </a:r>
-          </a:p>
-        </p:txBody>
-      </p:sp>
-      <p:sp>
-        <p:nvSpPr>
-          <p:cNvPr id="9" name="TextBox 8"/>
-          <p:cNvSpPr txBox="1"/>
-          <p:nvPr/>
-        </p:nvSpPr>
-        <p:spPr>
-          <a:xfrm>
-            <a:off x="1325880" y="3566160"/>
-            <a:ext cx="6583680" cy="822960"/>
-          </a:xfrm>
-          <a:prstGeom prst="rect">
-            <a:avLst/>
-          </a:prstGeom>
-          <a:noFill/>
-        </p:spPr>
-        <p:txBody>
-          <a:bodyPr wrap="square" anchor="ctr" lIns="0" rIns="0" tIns="0" bIns="0"/>
-          <a:lstStyle/>
-          <a:p>
-            <a:pPr algn="l"/>
-            <a:r>
-              <a:rPr sz="2000" b="0" i="0">
-                <a:solidFill>
-                  <a:srgbClr val="FFFFFF"/>
-                </a:solidFill>
-                <a:latin typeface="Calibri"/>
-              </a:rPr>
-              <a:t>Name one thing to do when a staff member leaves.</a:t>
-            </a:r>
-          </a:p>
-        </p:txBody>
-      </p:sp>
-      <p:sp>
-        <p:nvSpPr>
-          <p:cNvPr id="10" name="Rounded Rectangle 9"/>
-          <p:cNvSpPr/>
-          <p:nvPr/>
-        </p:nvSpPr>
-        <p:spPr>
-          <a:xfrm>
-            <a:off x="8229600" y="1645920"/>
-            <a:ext cx="3410712" cy="2926080"/>
-          </a:xfrm>
-          <a:prstGeom prst="roundRect">
-            <a:avLst>
-              <a:gd name="adj" fmla="val 8000"/>
-            </a:avLst>
-          </a:prstGeom>
-          <a:solidFill>
-            <a:srgbClr val="0645AD"/>
-          </a:solidFill>
-          <a:ln>
-            <a:noFill/>
-          </a:ln>
-          <a:effectLst/>
-        </p:spPr>
-        <p:style>
-          <a:lnRef idx="1">
-            <a:schemeClr val="accent1"/>
-          </a:lnRef>
-          <a:fillRef idx="3">
-            <a:schemeClr val="accent1"/>
-          </a:fillRef>
-          <a:effectRef idx="2">
-            <a:schemeClr val="accent1"/>
-          </a:effectRef>
-          <a:fontRef idx="minor">
-            <a:schemeClr val="lt1"/>
-          </a:fontRef>
-        </p:style>
-        <p:txBody>
-          <a:bodyPr rtlCol="0" anchor="ctr"/>
-          <a:lstStyle/>
-          <a:p/>
-        </p:txBody>
-      </p:sp>
-      <p:sp>
-        <p:nvSpPr>
-          <p:cNvPr id="11" name="TextBox 10"/>
-          <p:cNvSpPr txBox="1"/>
-          <p:nvPr/>
-        </p:nvSpPr>
-        <p:spPr>
-          <a:xfrm>
-            <a:off x="8503920" y="1874519"/>
-            <a:ext cx="2926080" cy="365760"/>
-          </a:xfrm>
-          <a:prstGeom prst="rect">
-            <a:avLst/>
-          </a:prstGeom>
-          <a:noFill/>
-        </p:spPr>
-        <p:txBody>
-          <a:bodyPr wrap="square" anchor="t" lIns="0" rIns="0" tIns="0" bIns="0"/>
-          <a:lstStyle/>
-          <a:p>
-            <a:pPr algn="l"/>
-            <a:r>
-              <a:rPr sz="1300" b="1" i="0">
-                <a:solidFill>
-                  <a:srgbClr val="A9C8F0"/>
-                </a:solidFill>
-                <a:latin typeface="Calibri"/>
-              </a:rPr>
-              <a:t>REVISE THIS TOPIC</a:t>
-            </a:r>
-          </a:p>
-        </p:txBody>
-      </p:sp>
-      <p:sp>
-        <p:nvSpPr>
-          <p:cNvPr id="12" name="TextBox 11"/>
-          <p:cNvSpPr txBox="1"/>
-          <p:nvPr/>
-        </p:nvSpPr>
-        <p:spPr>
-          <a:xfrm>
-            <a:off x="8503920" y="2286000"/>
-            <a:ext cx="2926080" cy="548640"/>
-          </a:xfrm>
-          <a:prstGeom prst="rect">
-            <a:avLst/>
-          </a:prstGeom>
-          <a:noFill/>
-        </p:spPr>
-        <p:txBody>
-          <a:bodyPr wrap="square" anchor="t" lIns="0" rIns="0" tIns="0" bIns="0"/>
-          <a:lstStyle/>
-          <a:p>
-            <a:pPr algn="l"/>
-            <a:r>
-              <a:rPr sz="1400" b="0" i="0">
-                <a:solidFill>
-                  <a:srgbClr val="FFFFFF"/>
-                </a:solidFill>
-                <a:latin typeface="Calibri"/>
-              </a:rPr>
-              <a:t>Revision notes for this lesson are on the study wiki:</a:t>
-            </a:r>
-          </a:p>
-        </p:txBody>
-      </p:sp>
-      <p:sp>
-        <p:nvSpPr>
-          <p:cNvPr id="13" name="TextBox 12"/>
-          <p:cNvSpPr txBox="1"/>
-          <p:nvPr/>
-        </p:nvSpPr>
-        <p:spPr>
-          <a:xfrm>
-            <a:off x="8503920" y="2926080"/>
-            <a:ext cx="2926080" cy="1463040"/>
-          </a:xfrm>
-          <a:prstGeom prst="rect">
-            <a:avLst/>
-          </a:prstGeom>
-          <a:noFill/>
-        </p:spPr>
-        <p:txBody>
-          <a:bodyPr wrap="square" anchor="t" lIns="0" rIns="0" tIns="0" bIns="0"/>
-          <a:lstStyle/>
-          <a:p>
-            <a:pPr algn="l"/>
-            <a:r>
-              <a:rPr sz="1900" b="1" i="0">
-                <a:solidFill>
-                  <a:srgbClr val="FFFFFF"/>
-                </a:solidFill>
                 <a:latin typeface="Cambria"/>
               </a:rPr>
-              <a:t>Digital Support - Installing, Configuring and Supporting Software and Operating Systems</a:t>
-            </a:r>
-          </a:p>
-        </p:txBody>
-      </p:sp>
-      <p:sp>
-        <p:nvSpPr>
-          <p:cNvPr id="14" name="TextBox 13"/>
-          <p:cNvSpPr txBox="1"/>
-          <p:nvPr/>
-        </p:nvSpPr>
-        <p:spPr>
-          <a:xfrm>
-            <a:off x="548640" y="5669280"/>
-            <a:ext cx="11094415" cy="548640"/>
-          </a:xfrm>
-          <a:prstGeom prst="rect">
-            <a:avLst/>
-          </a:prstGeom>
-          <a:noFill/>
-        </p:spPr>
-        <p:txBody>
-          <a:bodyPr wrap="square" anchor="t" lIns="0" rIns="0" tIns="0" bIns="0"/>
-          <a:lstStyle/>
-          <a:p>
-            <a:pPr algn="l"/>
-            <a:r>
-              <a:rPr sz="1200" b="0" i="0">
-                <a:solidFill>
-                  <a:srgbClr val="A9C8F0"/>
-                </a:solidFill>
-                <a:latin typeface="Calibri"/>
-              </a:rPr>
-              <a:t>https://lana6478.github.io/Digital-Suport-and-security-T-levle/#/02-occupational-specialisms/digital-support/02-software-and-os-support.md</a:t>
+              <a:t>A manager leaves their phone on a train. IT locates it, then remotely wipes the work profile before anyone can access company email.</a:t>
             </a:r>
           </a:p>
         </p:txBody>
